--- a/latex/final_presentation/DPaDS_final.pptx
+++ b/latex/final_presentation/DPaDS_final.pptx
@@ -9,6 +9,15 @@
   </p:notesMasterIdLst>
   <p:sldIdLst>
     <p:sldId id="256" r:id="rId4"/>
+    <p:sldId id="269" r:id="rId21"/>
+    <p:sldId id="270" r:id="rId22"/>
+    <p:sldId id="271" r:id="rId23"/>
+    <p:sldId id="272" r:id="rId24"/>
+    <p:sldId id="273" r:id="rId25"/>
+    <p:sldId id="274" r:id="rId26"/>
+    <p:sldId id="275" r:id="rId27"/>
+    <p:sldId id="276" r:id="rId28"/>
+    <p:sldId id="277" r:id="rId29"/>
     <p:sldId id="257" r:id="rId5"/>
     <p:sldId id="258" r:id="rId6"/>
     <p:sldId id="259" r:id="rId7"/>
@@ -15855,6 +15864,6449 @@
 </p:sld>
 </file>
 
+<file path=ppt/slides/slide14.xml><?xml version="1.0" encoding="utf-8"?>
+<p:sld xmlns:a="http://schemas.openxmlformats.org/drawingml/2006/main" xmlns:p="http://schemas.openxmlformats.org/presentationml/2006/main" xmlns:r="http://schemas.openxmlformats.org/officeDocument/2006/relationships">
+  <p:cSld>
+    <p:spTree>
+      <p:nvGrpSpPr>
+        <p:cNvPr id="1" name=""/>
+        <p:cNvGrpSpPr/>
+        <p:nvPr/>
+      </p:nvGrpSpPr>
+      <p:grpSpPr/>
+      <p:sp>
+        <p:nvSpPr>
+          <p:cNvPr id="2" name="title_m0"/>
+          <p:cNvSpPr txBox="1"/>
+          <p:nvPr/>
+        </p:nvSpPr>
+        <p:spPr>
+          <a:xfrm>
+            <a:off x="457200" y="87474"/>
+            <a:ext cx="8458200" cy="769776"/>
+          </a:xfrm>
+          <a:prstGeom prst="rect">
+            <a:avLst/>
+          </a:prstGeom>
+          <a:noFill/>
+        </p:spPr>
+        <p:txBody>
+          <a:bodyPr wrap="square" lIns="0" rIns="0" tIns="0" bIns="0" anchor="b">
+            <a:spAutoFit/>
+          </a:bodyPr>
+          <a:lstStyle/>
+          <a:p>
+            <a:pPr algn="l"/>
+            <a:r>
+              <a:rPr sz="1800" b="0">
+                <a:solidFill>
+                  <a:srgbClr val="808080"/>
+                </a:solidFill>
+                <a:latin typeface="Calibri"/>
+              </a:rPr>
+              <a:t>FL-Trilemma: Project Timeline</a:t>
+            </a:r>
+          </a:p>
+        </p:txBody>
+      </p:sp>
+      <p:cxnSp>
+        <p:nvCxnSpPr>
+          <p:cNvPr id="4" name="divider_m0"/>
+          <p:cNvCxnSpPr/>
+          <p:nvPr/>
+        </p:nvCxnSpPr>
+        <p:spPr>
+          <a:xfrm>
+            <a:off x="571500" y="952500"/>
+            <a:ext cx="8001000" cy="0"/>
+          </a:xfrm>
+          <a:prstGeom prst="line">
+            <a:avLst/>
+          </a:prstGeom>
+          <a:ln w="9525">
+            <a:solidFill>
+              <a:srgbClr val="B3B3B3"/>
+            </a:solidFill>
+          </a:ln>
+          <a:effectLst/>
+        </p:spPr>
+        <p:style>
+          <a:lnRef idx="2">
+            <a:schemeClr val="accent1"/>
+          </a:lnRef>
+          <a:fillRef idx="0">
+            <a:schemeClr val="accent1"/>
+          </a:fillRef>
+          <a:effectRef idx="1">
+            <a:schemeClr val="accent1"/>
+          </a:effectRef>
+          <a:fontRef idx="minor">
+            <a:schemeClr val="tx1"/>
+          </a:fontRef>
+        </p:style>
+      </p:cxnSp>
+      <p:sp>
+        <p:nvSpPr>
+          <p:cNvPr id="5" name="content_pill_m0"/>
+          <p:cNvSpPr/>
+          <p:nvPr/>
+        </p:nvSpPr>
+        <p:spPr>
+          <a:xfrm>
+            <a:off x="762000" y="1095375"/>
+            <a:ext cx="825000" cy="188082"/>
+          </a:xfrm>
+          <a:prstGeom prst="roundRect">
+            <a:avLst>
+              <a:gd name="adj" fmla="val 50000"/>
+            </a:avLst>
+          </a:prstGeom>
+          <a:solidFill>
+            <a:srgbClr val="C9E1FF"/>
+          </a:solidFill>
+          <a:ln>
+            <a:noFill/>
+          </a:ln>
+          <a:effectLst/>
+        </p:spPr>
+        <p:style>
+          <a:lnRef idx="1">
+            <a:schemeClr val="accent1"/>
+          </a:lnRef>
+          <a:fillRef idx="3">
+            <a:schemeClr val="accent1"/>
+          </a:fillRef>
+          <a:effectRef idx="2">
+            <a:schemeClr val="accent1"/>
+          </a:effectRef>
+          <a:fontRef idx="minor">
+            <a:schemeClr val="lt1"/>
+          </a:fontRef>
+        </p:style>
+        <p:txBody>
+          <a:bodyPr rtlCol="0" anchor="ctr" lIns="60000" rIns="60000" tIns="0" bIns="0" wrap="none"/>
+          <a:lstStyle/>
+          <a:p>
+            <a:pPr algn="ctr"/>
+            <a:r>
+              <a:rPr sz="900" b="1">
+                <a:solidFill>
+                  <a:srgbClr val="325786"/>
+                </a:solidFill>
+                <a:latin typeface="Calibri"/>
+              </a:rPr>
+              <a:t>09.04.2026</a:t>
+            </a:r>
+          </a:p>
+        </p:txBody>
+      </p:sp>
+      <p:sp>
+        <p:nvSpPr>
+          <p:cNvPr id="6" name="content_headline_m0"/>
+          <p:cNvSpPr txBox="1"/>
+          <p:nvPr/>
+        </p:nvSpPr>
+        <p:spPr>
+          <a:xfrm>
+            <a:off x="762000" y="1369126"/>
+            <a:ext cx="5762625" cy="239316"/>
+          </a:xfrm>
+          <a:prstGeom prst="rect">
+            <a:avLst/>
+          </a:prstGeom>
+          <a:noFill/>
+        </p:spPr>
+        <p:txBody>
+          <a:bodyPr wrap="square" lIns="0" rIns="0" tIns="0" bIns="0">
+            <a:spAutoFit/>
+          </a:bodyPr>
+          <a:lstStyle/>
+          <a:p>
+            <a:pPr algn="l"/>
+            <a:r>
+              <a:rPr sz="1500" b="1">
+                <a:solidFill>
+                  <a:srgbClr val="1F2023"/>
+                </a:solidFill>
+                <a:latin typeface="Calibri"/>
+              </a:rPr>
+              <a:t>Project Kick-off</a:t>
+            </a:r>
+          </a:p>
+        </p:txBody>
+      </p:sp>
+      <p:sp>
+        <p:nvSpPr>
+          <p:cNvPr id="7" name="content_bullets_m0"/>
+          <p:cNvSpPr txBox="1"/>
+          <p:nvPr/>
+        </p:nvSpPr>
+        <p:spPr>
+          <a:xfrm>
+            <a:off x="762000" y="1646504"/>
+            <a:ext cx="5762625" cy="188082"/>
+          </a:xfrm>
+          <a:prstGeom prst="rect">
+            <a:avLst/>
+          </a:prstGeom>
+          <a:noFill/>
+        </p:spPr>
+        <p:txBody>
+          <a:bodyPr wrap="square" lIns="0" rIns="0" tIns="0" bIns="0">
+            <a:spAutoFit/>
+          </a:bodyPr>
+          <a:lstStyle/>
+          <a:p>
+            <a:pPr>
+              <a:spcAft>
+                <a:spcPts val="600"/>
+              </a:spcAft>
+            </a:pPr>
+            <a:r>
+              <a:rPr sz="1050" b="1">
+                <a:solidFill>
+                  <a:srgbClr val="C1212A"/>
+                </a:solidFill>
+                <a:latin typeface="Calibri"/>
+              </a:rPr>
+              <a:t>-  </a:t>
+            </a:r>
+            <a:r>
+              <a:rPr sz="1050">
+                <a:solidFill>
+                  <a:srgbClr val="325786"/>
+                </a:solidFill>
+                <a:latin typeface="Calibri"/>
+              </a:rPr>
+              <a:t>Master Project Seminar Data Protection and Data Security begins</a:t>
+            </a:r>
+          </a:p>
+        </p:txBody>
+      </p:sp>
+      <p:sp>
+        <p:nvSpPr>
+          <p:cNvPr id="8" name="!!tl_track"/>
+          <p:cNvSpPr/>
+          <p:nvPr/>
+        </p:nvSpPr>
+        <p:spPr>
+          <a:xfrm>
+            <a:off x="952500" y="2847919"/>
+            <a:ext cx="7239000" cy="18976"/>
+          </a:xfrm>
+          <a:prstGeom prst="roundRect">
+            <a:avLst>
+              <a:gd name="adj" fmla="val 50000"/>
+            </a:avLst>
+          </a:prstGeom>
+          <a:solidFill>
+            <a:srgbClr val="E2E2E2"/>
+          </a:solidFill>
+          <a:ln>
+            <a:noFill/>
+          </a:ln>
+          <a:effectLst/>
+        </p:spPr>
+        <p:style>
+          <a:lnRef idx="1">
+            <a:schemeClr val="accent1"/>
+          </a:lnRef>
+          <a:fillRef idx="3">
+            <a:schemeClr val="accent1"/>
+          </a:fillRef>
+          <a:effectRef idx="2">
+            <a:schemeClr val="accent1"/>
+          </a:effectRef>
+          <a:fontRef idx="minor">
+            <a:schemeClr val="lt1"/>
+          </a:fontRef>
+        </p:style>
+        <p:txBody>
+          <a:bodyPr rtlCol="0" anchor="ctr"/>
+          <a:lstStyle/>
+          <a:p>
+            <a:pPr algn="ctr"/>
+          </a:p>
+        </p:txBody>
+      </p:sp>
+      <p:sp>
+        <p:nvSpPr>
+          <p:cNvPr id="9" name="!!tl_fill"/>
+          <p:cNvSpPr/>
+          <p:nvPr/>
+        </p:nvSpPr>
+        <p:spPr>
+          <a:xfrm>
+            <a:off x="952500" y="2847919"/>
+            <a:ext cx="0" cy="18976"/>
+          </a:xfrm>
+          <a:prstGeom prst="roundRect">
+            <a:avLst>
+              <a:gd name="adj" fmla="val 50000"/>
+            </a:avLst>
+          </a:prstGeom>
+          <a:solidFill>
+            <a:srgbClr val="325786"/>
+          </a:solidFill>
+          <a:ln>
+            <a:noFill/>
+          </a:ln>
+          <a:effectLst/>
+        </p:spPr>
+        <p:style>
+          <a:lnRef idx="1">
+            <a:schemeClr val="accent1"/>
+          </a:lnRef>
+          <a:fillRef idx="3">
+            <a:schemeClr val="accent1"/>
+          </a:fillRef>
+          <a:effectRef idx="2">
+            <a:schemeClr val="accent1"/>
+          </a:effectRef>
+          <a:fontRef idx="minor">
+            <a:schemeClr val="lt1"/>
+          </a:fontRef>
+        </p:style>
+        <p:txBody>
+          <a:bodyPr rtlCol="0" anchor="ctr"/>
+          <a:lstStyle/>
+          <a:p>
+            <a:pPr algn="ctr"/>
+          </a:p>
+        </p:txBody>
+      </p:sp>
+      <p:sp>
+        <p:nvSpPr>
+          <p:cNvPr id="10" name="!!tl_dot_1"/>
+          <p:cNvSpPr/>
+          <p:nvPr/>
+        </p:nvSpPr>
+        <p:spPr>
+          <a:xfrm>
+            <a:off x="885825" y="2790825"/>
+            <a:ext cx="133350" cy="133350"/>
+          </a:xfrm>
+          <a:prstGeom prst="ellipse">
+            <a:avLst/>
+          </a:prstGeom>
+          <a:solidFill>
+            <a:srgbClr val="325786"/>
+          </a:solidFill>
+          <a:ln>
+            <a:noFill/>
+          </a:ln>
+          <a:effectLst/>
+        </p:spPr>
+        <p:style>
+          <a:lnRef idx="1">
+            <a:schemeClr val="accent1"/>
+          </a:lnRef>
+          <a:fillRef idx="3">
+            <a:schemeClr val="accent1"/>
+          </a:fillRef>
+          <a:effectRef idx="2">
+            <a:schemeClr val="accent1"/>
+          </a:effectRef>
+          <a:fontRef idx="minor">
+            <a:schemeClr val="lt1"/>
+          </a:fontRef>
+        </p:style>
+        <p:txBody>
+          <a:bodyPr rtlCol="0" anchor="ctr"/>
+          <a:lstStyle/>
+          <a:p>
+            <a:pPr algn="ctr"/>
+          </a:p>
+        </p:txBody>
+      </p:sp>
+      <p:sp>
+        <p:nvSpPr>
+          <p:cNvPr id="11" name="lbl_1_s0"/>
+          <p:cNvSpPr txBox="1"/>
+          <p:nvPr/>
+        </p:nvSpPr>
+        <p:spPr>
+          <a:xfrm>
+            <a:off x="666750" y="3009863"/>
+            <a:ext cx="571500" cy="150019"/>
+          </a:xfrm>
+          <a:prstGeom prst="rect">
+            <a:avLst/>
+          </a:prstGeom>
+          <a:noFill/>
+        </p:spPr>
+        <p:txBody>
+          <a:bodyPr wrap="square" lIns="0" rIns="0" tIns="0" bIns="0">
+            <a:spAutoFit/>
+          </a:bodyPr>
+          <a:lstStyle/>
+          <a:p>
+            <a:pPr algn="ctr"/>
+            <a:r>
+              <a:rPr sz="900" b="1">
+                <a:solidFill>
+                  <a:srgbClr val="1F2023"/>
+                </a:solidFill>
+                <a:latin typeface="Calibri"/>
+              </a:rPr>
+              <a:t>09.04.2026</a:t>
+            </a:r>
+          </a:p>
+        </p:txBody>
+      </p:sp>
+      <p:sp>
+        <p:nvSpPr>
+          <p:cNvPr id="12" name="!!tl_dot_2"/>
+          <p:cNvSpPr/>
+          <p:nvPr/>
+        </p:nvSpPr>
+        <p:spPr>
+          <a:xfrm>
+            <a:off x="1819275" y="2819400"/>
+            <a:ext cx="76200" cy="76200"/>
+          </a:xfrm>
+          <a:prstGeom prst="ellipse">
+            <a:avLst/>
+          </a:prstGeom>
+          <a:solidFill>
+            <a:srgbClr val="D1D5DB"/>
+          </a:solidFill>
+          <a:ln>
+            <a:noFill/>
+          </a:ln>
+          <a:effectLst/>
+        </p:spPr>
+        <p:style>
+          <a:lnRef idx="1">
+            <a:schemeClr val="accent1"/>
+          </a:lnRef>
+          <a:fillRef idx="3">
+            <a:schemeClr val="accent1"/>
+          </a:fillRef>
+          <a:effectRef idx="2">
+            <a:schemeClr val="accent1"/>
+          </a:effectRef>
+          <a:fontRef idx="minor">
+            <a:schemeClr val="lt1"/>
+          </a:fontRef>
+        </p:style>
+        <p:txBody>
+          <a:bodyPr rtlCol="0" anchor="ctr"/>
+          <a:lstStyle/>
+          <a:p>
+            <a:pPr algn="ctr"/>
+          </a:p>
+        </p:txBody>
+      </p:sp>
+      <p:sp>
+        <p:nvSpPr>
+          <p:cNvPr id="13" name="lbl_2_s0"/>
+          <p:cNvSpPr txBox="1"/>
+          <p:nvPr/>
+        </p:nvSpPr>
+        <p:spPr>
+          <a:xfrm>
+            <a:off x="1571625" y="3009863"/>
+            <a:ext cx="571500" cy="150019"/>
+          </a:xfrm>
+          <a:prstGeom prst="rect">
+            <a:avLst/>
+          </a:prstGeom>
+          <a:noFill/>
+        </p:spPr>
+        <p:txBody>
+          <a:bodyPr wrap="square" lIns="0" rIns="0" tIns="0" bIns="0">
+            <a:spAutoFit/>
+          </a:bodyPr>
+          <a:lstStyle/>
+          <a:p>
+            <a:pPr algn="ctr"/>
+            <a:r>
+              <a:rPr sz="900" b="0">
+                <a:solidFill>
+                  <a:srgbClr val="9CA3AF"/>
+                </a:solidFill>
+                <a:latin typeface="Calibri"/>
+              </a:rPr>
+              <a:t>16.04.2026</a:t>
+            </a:r>
+          </a:p>
+        </p:txBody>
+      </p:sp>
+      <p:sp>
+        <p:nvSpPr>
+          <p:cNvPr id="14" name="!!tl_dot_3"/>
+          <p:cNvSpPr/>
+          <p:nvPr/>
+        </p:nvSpPr>
+        <p:spPr>
+          <a:xfrm>
+            <a:off x="2724150" y="2819400"/>
+            <a:ext cx="76200" cy="76200"/>
+          </a:xfrm>
+          <a:prstGeom prst="ellipse">
+            <a:avLst/>
+          </a:prstGeom>
+          <a:solidFill>
+            <a:srgbClr val="D1D5DB"/>
+          </a:solidFill>
+          <a:ln>
+            <a:noFill/>
+          </a:ln>
+          <a:effectLst/>
+        </p:spPr>
+        <p:style>
+          <a:lnRef idx="1">
+            <a:schemeClr val="accent1"/>
+          </a:lnRef>
+          <a:fillRef idx="3">
+            <a:schemeClr val="accent1"/>
+          </a:fillRef>
+          <a:effectRef idx="2">
+            <a:schemeClr val="accent1"/>
+          </a:effectRef>
+          <a:fontRef idx="minor">
+            <a:schemeClr val="lt1"/>
+          </a:fontRef>
+        </p:style>
+        <p:txBody>
+          <a:bodyPr rtlCol="0" anchor="ctr"/>
+          <a:lstStyle/>
+          <a:p>
+            <a:pPr algn="ctr"/>
+          </a:p>
+        </p:txBody>
+      </p:sp>
+      <p:sp>
+        <p:nvSpPr>
+          <p:cNvPr id="15" name="lbl_3_s0"/>
+          <p:cNvSpPr txBox="1"/>
+          <p:nvPr/>
+        </p:nvSpPr>
+        <p:spPr>
+          <a:xfrm>
+            <a:off x="2476500" y="3009863"/>
+            <a:ext cx="571500" cy="150019"/>
+          </a:xfrm>
+          <a:prstGeom prst="rect">
+            <a:avLst/>
+          </a:prstGeom>
+          <a:noFill/>
+        </p:spPr>
+        <p:txBody>
+          <a:bodyPr wrap="square" lIns="0" rIns="0" tIns="0" bIns="0">
+            <a:spAutoFit/>
+          </a:bodyPr>
+          <a:lstStyle/>
+          <a:p>
+            <a:pPr algn="ctr"/>
+            <a:r>
+              <a:rPr sz="900" b="0">
+                <a:solidFill>
+                  <a:srgbClr val="9CA3AF"/>
+                </a:solidFill>
+                <a:latin typeface="Calibri"/>
+              </a:rPr>
+              <a:t>30.04.2026</a:t>
+            </a:r>
+          </a:p>
+        </p:txBody>
+      </p:sp>
+      <p:sp>
+        <p:nvSpPr>
+          <p:cNvPr id="16" name="!!tl_dot_4"/>
+          <p:cNvSpPr/>
+          <p:nvPr/>
+        </p:nvSpPr>
+        <p:spPr>
+          <a:xfrm>
+            <a:off x="3629025" y="2819400"/>
+            <a:ext cx="76200" cy="76200"/>
+          </a:xfrm>
+          <a:prstGeom prst="ellipse">
+            <a:avLst/>
+          </a:prstGeom>
+          <a:solidFill>
+            <a:srgbClr val="D1D5DB"/>
+          </a:solidFill>
+          <a:ln>
+            <a:noFill/>
+          </a:ln>
+          <a:effectLst/>
+        </p:spPr>
+        <p:style>
+          <a:lnRef idx="1">
+            <a:schemeClr val="accent1"/>
+          </a:lnRef>
+          <a:fillRef idx="3">
+            <a:schemeClr val="accent1"/>
+          </a:fillRef>
+          <a:effectRef idx="2">
+            <a:schemeClr val="accent1"/>
+          </a:effectRef>
+          <a:fontRef idx="minor">
+            <a:schemeClr val="lt1"/>
+          </a:fontRef>
+        </p:style>
+        <p:txBody>
+          <a:bodyPr rtlCol="0" anchor="ctr"/>
+          <a:lstStyle/>
+          <a:p>
+            <a:pPr algn="ctr"/>
+          </a:p>
+        </p:txBody>
+      </p:sp>
+      <p:sp>
+        <p:nvSpPr>
+          <p:cNvPr id="17" name="lbl_4_s0"/>
+          <p:cNvSpPr txBox="1"/>
+          <p:nvPr/>
+        </p:nvSpPr>
+        <p:spPr>
+          <a:xfrm>
+            <a:off x="3381375" y="3009863"/>
+            <a:ext cx="571500" cy="150019"/>
+          </a:xfrm>
+          <a:prstGeom prst="rect">
+            <a:avLst/>
+          </a:prstGeom>
+          <a:noFill/>
+        </p:spPr>
+        <p:txBody>
+          <a:bodyPr wrap="square" lIns="0" rIns="0" tIns="0" bIns="0">
+            <a:spAutoFit/>
+          </a:bodyPr>
+          <a:lstStyle/>
+          <a:p>
+            <a:pPr algn="ctr"/>
+            <a:r>
+              <a:rPr sz="900" b="0">
+                <a:solidFill>
+                  <a:srgbClr val="9CA3AF"/>
+                </a:solidFill>
+                <a:latin typeface="Calibri"/>
+              </a:rPr>
+              <a:t>~21.05.2026</a:t>
+            </a:r>
+          </a:p>
+        </p:txBody>
+      </p:sp>
+      <p:sp>
+        <p:nvSpPr>
+          <p:cNvPr id="18" name="!!tl_dot_5"/>
+          <p:cNvSpPr/>
+          <p:nvPr/>
+        </p:nvSpPr>
+        <p:spPr>
+          <a:xfrm>
+            <a:off x="4533900" y="2819400"/>
+            <a:ext cx="76200" cy="76200"/>
+          </a:xfrm>
+          <a:prstGeom prst="ellipse">
+            <a:avLst/>
+          </a:prstGeom>
+          <a:solidFill>
+            <a:srgbClr val="D1D5DB"/>
+          </a:solidFill>
+          <a:ln>
+            <a:noFill/>
+          </a:ln>
+          <a:effectLst/>
+        </p:spPr>
+        <p:style>
+          <a:lnRef idx="1">
+            <a:schemeClr val="accent1"/>
+          </a:lnRef>
+          <a:fillRef idx="3">
+            <a:schemeClr val="accent1"/>
+          </a:fillRef>
+          <a:effectRef idx="2">
+            <a:schemeClr val="accent1"/>
+          </a:effectRef>
+          <a:fontRef idx="minor">
+            <a:schemeClr val="lt1"/>
+          </a:fontRef>
+        </p:style>
+        <p:txBody>
+          <a:bodyPr rtlCol="0" anchor="ctr"/>
+          <a:lstStyle/>
+          <a:p>
+            <a:pPr algn="ctr"/>
+          </a:p>
+        </p:txBody>
+      </p:sp>
+      <p:sp>
+        <p:nvSpPr>
+          <p:cNvPr id="19" name="lbl_5_s0"/>
+          <p:cNvSpPr txBox="1"/>
+          <p:nvPr/>
+        </p:nvSpPr>
+        <p:spPr>
+          <a:xfrm>
+            <a:off x="4286250" y="3009863"/>
+            <a:ext cx="571500" cy="150019"/>
+          </a:xfrm>
+          <a:prstGeom prst="rect">
+            <a:avLst/>
+          </a:prstGeom>
+          <a:noFill/>
+        </p:spPr>
+        <p:txBody>
+          <a:bodyPr wrap="square" lIns="0" rIns="0" tIns="0" bIns="0">
+            <a:spAutoFit/>
+          </a:bodyPr>
+          <a:lstStyle/>
+          <a:p>
+            <a:pPr algn="ctr"/>
+            <a:r>
+              <a:rPr sz="900" b="0">
+                <a:solidFill>
+                  <a:srgbClr val="9CA3AF"/>
+                </a:solidFill>
+                <a:latin typeface="Calibri"/>
+              </a:rPr>
+              <a:t>18.06.2026</a:t>
+            </a:r>
+          </a:p>
+        </p:txBody>
+      </p:sp>
+      <p:sp>
+        <p:nvSpPr>
+          <p:cNvPr id="20" name="!!tl_dot_6"/>
+          <p:cNvSpPr/>
+          <p:nvPr/>
+        </p:nvSpPr>
+        <p:spPr>
+          <a:xfrm>
+            <a:off x="5438775" y="2819400"/>
+            <a:ext cx="76200" cy="76200"/>
+          </a:xfrm>
+          <a:prstGeom prst="ellipse">
+            <a:avLst/>
+          </a:prstGeom>
+          <a:solidFill>
+            <a:srgbClr val="D1D5DB"/>
+          </a:solidFill>
+          <a:ln>
+            <a:noFill/>
+          </a:ln>
+          <a:effectLst/>
+        </p:spPr>
+        <p:style>
+          <a:lnRef idx="1">
+            <a:schemeClr val="accent1"/>
+          </a:lnRef>
+          <a:fillRef idx="3">
+            <a:schemeClr val="accent1"/>
+          </a:fillRef>
+          <a:effectRef idx="2">
+            <a:schemeClr val="accent1"/>
+          </a:effectRef>
+          <a:fontRef idx="minor">
+            <a:schemeClr val="lt1"/>
+          </a:fontRef>
+        </p:style>
+        <p:txBody>
+          <a:bodyPr rtlCol="0" anchor="ctr"/>
+          <a:lstStyle/>
+          <a:p>
+            <a:pPr algn="ctr"/>
+          </a:p>
+        </p:txBody>
+      </p:sp>
+      <p:sp>
+        <p:nvSpPr>
+          <p:cNvPr id="21" name="lbl_6_s0"/>
+          <p:cNvSpPr txBox="1"/>
+          <p:nvPr/>
+        </p:nvSpPr>
+        <p:spPr>
+          <a:xfrm>
+            <a:off x="5191125" y="3009863"/>
+            <a:ext cx="571500" cy="150019"/>
+          </a:xfrm>
+          <a:prstGeom prst="rect">
+            <a:avLst/>
+          </a:prstGeom>
+          <a:noFill/>
+        </p:spPr>
+        <p:txBody>
+          <a:bodyPr wrap="square" lIns="0" rIns="0" tIns="0" bIns="0">
+            <a:spAutoFit/>
+          </a:bodyPr>
+          <a:lstStyle/>
+          <a:p>
+            <a:pPr algn="ctr"/>
+            <a:r>
+              <a:rPr sz="900" b="0">
+                <a:solidFill>
+                  <a:srgbClr val="9CA3AF"/>
+                </a:solidFill>
+                <a:latin typeface="Calibri"/>
+              </a:rPr>
+              <a:t>25.06.2026</a:t>
+            </a:r>
+          </a:p>
+        </p:txBody>
+      </p:sp>
+      <p:sp>
+        <p:nvSpPr>
+          <p:cNvPr id="22" name="!!tl_dot_7"/>
+          <p:cNvSpPr/>
+          <p:nvPr/>
+        </p:nvSpPr>
+        <p:spPr>
+          <a:xfrm>
+            <a:off x="6343650" y="2819400"/>
+            <a:ext cx="76200" cy="76200"/>
+          </a:xfrm>
+          <a:prstGeom prst="ellipse">
+            <a:avLst/>
+          </a:prstGeom>
+          <a:solidFill>
+            <a:srgbClr val="D1D5DB"/>
+          </a:solidFill>
+          <a:ln>
+            <a:noFill/>
+          </a:ln>
+          <a:effectLst/>
+        </p:spPr>
+        <p:style>
+          <a:lnRef idx="1">
+            <a:schemeClr val="accent1"/>
+          </a:lnRef>
+          <a:fillRef idx="3">
+            <a:schemeClr val="accent1"/>
+          </a:fillRef>
+          <a:effectRef idx="2">
+            <a:schemeClr val="accent1"/>
+          </a:effectRef>
+          <a:fontRef idx="minor">
+            <a:schemeClr val="lt1"/>
+          </a:fontRef>
+        </p:style>
+        <p:txBody>
+          <a:bodyPr rtlCol="0" anchor="ctr"/>
+          <a:lstStyle/>
+          <a:p>
+            <a:pPr algn="ctr"/>
+          </a:p>
+        </p:txBody>
+      </p:sp>
+      <p:sp>
+        <p:nvSpPr>
+          <p:cNvPr id="23" name="lbl_7_s0"/>
+          <p:cNvSpPr txBox="1"/>
+          <p:nvPr/>
+        </p:nvSpPr>
+        <p:spPr>
+          <a:xfrm>
+            <a:off x="6096000" y="3009863"/>
+            <a:ext cx="571500" cy="150019"/>
+          </a:xfrm>
+          <a:prstGeom prst="rect">
+            <a:avLst/>
+          </a:prstGeom>
+          <a:noFill/>
+        </p:spPr>
+        <p:txBody>
+          <a:bodyPr wrap="square" lIns="0" rIns="0" tIns="0" bIns="0">
+            <a:spAutoFit/>
+          </a:bodyPr>
+          <a:lstStyle/>
+          <a:p>
+            <a:pPr algn="ctr"/>
+            <a:r>
+              <a:rPr sz="900" b="0">
+                <a:solidFill>
+                  <a:srgbClr val="9CA3AF"/>
+                </a:solidFill>
+                <a:latin typeface="Calibri"/>
+              </a:rPr>
+              <a:t>09.07.2026</a:t>
+            </a:r>
+          </a:p>
+        </p:txBody>
+      </p:sp>
+      <p:sp>
+        <p:nvSpPr>
+          <p:cNvPr id="24" name="!!tl_dot_8"/>
+          <p:cNvSpPr/>
+          <p:nvPr/>
+        </p:nvSpPr>
+        <p:spPr>
+          <a:xfrm>
+            <a:off x="7248525" y="2819400"/>
+            <a:ext cx="76200" cy="76200"/>
+          </a:xfrm>
+          <a:prstGeom prst="ellipse">
+            <a:avLst/>
+          </a:prstGeom>
+          <a:solidFill>
+            <a:srgbClr val="D1D5DB"/>
+          </a:solidFill>
+          <a:ln>
+            <a:noFill/>
+          </a:ln>
+          <a:effectLst/>
+        </p:spPr>
+        <p:style>
+          <a:lnRef idx="1">
+            <a:schemeClr val="accent1"/>
+          </a:lnRef>
+          <a:fillRef idx="3">
+            <a:schemeClr val="accent1"/>
+          </a:fillRef>
+          <a:effectRef idx="2">
+            <a:schemeClr val="accent1"/>
+          </a:effectRef>
+          <a:fontRef idx="minor">
+            <a:schemeClr val="lt1"/>
+          </a:fontRef>
+        </p:style>
+        <p:txBody>
+          <a:bodyPr rtlCol="0" anchor="ctr"/>
+          <a:lstStyle/>
+          <a:p>
+            <a:pPr algn="ctr"/>
+          </a:p>
+        </p:txBody>
+      </p:sp>
+      <p:sp>
+        <p:nvSpPr>
+          <p:cNvPr id="25" name="lbl_8_s0"/>
+          <p:cNvSpPr txBox="1"/>
+          <p:nvPr/>
+        </p:nvSpPr>
+        <p:spPr>
+          <a:xfrm>
+            <a:off x="7000875" y="3009863"/>
+            <a:ext cx="571500" cy="150019"/>
+          </a:xfrm>
+          <a:prstGeom prst="rect">
+            <a:avLst/>
+          </a:prstGeom>
+          <a:noFill/>
+        </p:spPr>
+        <p:txBody>
+          <a:bodyPr wrap="square" lIns="0" rIns="0" tIns="0" bIns="0">
+            <a:spAutoFit/>
+          </a:bodyPr>
+          <a:lstStyle/>
+          <a:p>
+            <a:pPr algn="ctr"/>
+            <a:r>
+              <a:rPr sz="900" b="0">
+                <a:solidFill>
+                  <a:srgbClr val="9CA3AF"/>
+                </a:solidFill>
+                <a:latin typeface="Calibri"/>
+              </a:rPr>
+              <a:t>16.07.2026</a:t>
+            </a:r>
+          </a:p>
+        </p:txBody>
+      </p:sp>
+      <p:sp>
+        <p:nvSpPr>
+          <p:cNvPr id="26" name="!!tl_dot_9"/>
+          <p:cNvSpPr/>
+          <p:nvPr/>
+        </p:nvSpPr>
+        <p:spPr>
+          <a:xfrm>
+            <a:off x="8153400" y="2819400"/>
+            <a:ext cx="76200" cy="76200"/>
+          </a:xfrm>
+          <a:prstGeom prst="ellipse">
+            <a:avLst/>
+          </a:prstGeom>
+          <a:solidFill>
+            <a:srgbClr val="D1D5DB"/>
+          </a:solidFill>
+          <a:ln>
+            <a:noFill/>
+          </a:ln>
+          <a:effectLst/>
+        </p:spPr>
+        <p:style>
+          <a:lnRef idx="1">
+            <a:schemeClr val="accent1"/>
+          </a:lnRef>
+          <a:fillRef idx="3">
+            <a:schemeClr val="accent1"/>
+          </a:fillRef>
+          <a:effectRef idx="2">
+            <a:schemeClr val="accent1"/>
+          </a:effectRef>
+          <a:fontRef idx="minor">
+            <a:schemeClr val="lt1"/>
+          </a:fontRef>
+        </p:style>
+        <p:txBody>
+          <a:bodyPr rtlCol="0" anchor="ctr"/>
+          <a:lstStyle/>
+          <a:p>
+            <a:pPr algn="ctr"/>
+          </a:p>
+        </p:txBody>
+      </p:sp>
+      <p:sp>
+        <p:nvSpPr>
+          <p:cNvPr id="27" name="lbl_9_s0"/>
+          <p:cNvSpPr txBox="1"/>
+          <p:nvPr/>
+        </p:nvSpPr>
+        <p:spPr>
+          <a:xfrm>
+            <a:off x="7905750" y="3009863"/>
+            <a:ext cx="571500" cy="150019"/>
+          </a:xfrm>
+          <a:prstGeom prst="rect">
+            <a:avLst/>
+          </a:prstGeom>
+          <a:noFill/>
+        </p:spPr>
+        <p:txBody>
+          <a:bodyPr wrap="square" lIns="0" rIns="0" tIns="0" bIns="0">
+            <a:spAutoFit/>
+          </a:bodyPr>
+          <a:lstStyle/>
+          <a:p>
+            <a:pPr algn="ctr"/>
+            <a:r>
+              <a:rPr sz="900" b="0">
+                <a:solidFill>
+                  <a:srgbClr val="9CA3AF"/>
+                </a:solidFill>
+                <a:latin typeface="Calibri"/>
+              </a:rPr>
+              <a:t>20.07.2026</a:t>
+            </a:r>
+          </a:p>
+        </p:txBody>
+      </p:sp>
+    </p:spTree>
+  </p:cSld>
+  <p:clrMapOvr>
+    <a:masterClrMapping/>
+  </p:clrMapOvr>
+  <mc:AlternateContent xmlns:mc="http://schemas.openxmlformats.org/markup-compatibility/2006">
+    <mc:Choice xmlns:p159="http://schemas.microsoft.com/office/powerpoint/2015/09/main" Requires="p159">
+      <p:transition spd="slow">
+        <p159:morph option="byObject"/>
+      </p:transition>
+    </mc:Choice>
+    <mc:Fallback>
+      <p:transition spd="slow">
+        <p:fade/>
+      </p:transition>
+    </mc:Fallback>
+  </mc:AlternateContent>
+</p:sld>
+</file>
+
+<file path=ppt/slides/slide15.xml><?xml version="1.0" encoding="utf-8"?>
+<p:sld xmlns:a="http://schemas.openxmlformats.org/drawingml/2006/main" xmlns:p="http://schemas.openxmlformats.org/presentationml/2006/main" xmlns:r="http://schemas.openxmlformats.org/officeDocument/2006/relationships">
+  <p:cSld>
+    <p:spTree>
+      <p:nvGrpSpPr>
+        <p:cNvPr id="1" name=""/>
+        <p:cNvGrpSpPr/>
+        <p:nvPr/>
+      </p:nvGrpSpPr>
+      <p:grpSpPr/>
+      <p:sp>
+        <p:nvSpPr>
+          <p:cNvPr id="2" name="title_m1"/>
+          <p:cNvSpPr txBox="1"/>
+          <p:nvPr/>
+        </p:nvSpPr>
+        <p:spPr>
+          <a:xfrm>
+            <a:off x="457200" y="87474"/>
+            <a:ext cx="8458200" cy="769776"/>
+          </a:xfrm>
+          <a:prstGeom prst="rect">
+            <a:avLst/>
+          </a:prstGeom>
+          <a:noFill/>
+        </p:spPr>
+        <p:txBody>
+          <a:bodyPr wrap="square" lIns="0" rIns="0" tIns="0" bIns="0" anchor="b">
+            <a:spAutoFit/>
+          </a:bodyPr>
+          <a:lstStyle/>
+          <a:p>
+            <a:pPr algn="l"/>
+            <a:r>
+              <a:rPr sz="1800" b="0">
+                <a:solidFill>
+                  <a:srgbClr val="808080"/>
+                </a:solidFill>
+                <a:latin typeface="Calibri"/>
+              </a:rPr>
+              <a:t>FL-Trilemma: Project Timeline</a:t>
+            </a:r>
+          </a:p>
+        </p:txBody>
+      </p:sp>
+      <p:cxnSp>
+        <p:nvCxnSpPr>
+          <p:cNvPr id="4" name="divider_m1"/>
+          <p:cNvCxnSpPr/>
+          <p:nvPr/>
+        </p:nvCxnSpPr>
+        <p:spPr>
+          <a:xfrm>
+            <a:off x="571500" y="952500"/>
+            <a:ext cx="8001000" cy="0"/>
+          </a:xfrm>
+          <a:prstGeom prst="line">
+            <a:avLst/>
+          </a:prstGeom>
+          <a:ln w="9525">
+            <a:solidFill>
+              <a:srgbClr val="B3B3B3"/>
+            </a:solidFill>
+          </a:ln>
+          <a:effectLst/>
+        </p:spPr>
+        <p:style>
+          <a:lnRef idx="2">
+            <a:schemeClr val="accent1"/>
+          </a:lnRef>
+          <a:fillRef idx="0">
+            <a:schemeClr val="accent1"/>
+          </a:fillRef>
+          <a:effectRef idx="1">
+            <a:schemeClr val="accent1"/>
+          </a:effectRef>
+          <a:fontRef idx="minor">
+            <a:schemeClr val="tx1"/>
+          </a:fontRef>
+        </p:style>
+      </p:cxnSp>
+      <p:sp>
+        <p:nvSpPr>
+          <p:cNvPr id="5" name="content_pill_m1"/>
+          <p:cNvSpPr/>
+          <p:nvPr/>
+        </p:nvSpPr>
+        <p:spPr>
+          <a:xfrm>
+            <a:off x="762000" y="3333750"/>
+            <a:ext cx="825000" cy="188082"/>
+          </a:xfrm>
+          <a:prstGeom prst="roundRect">
+            <a:avLst>
+              <a:gd name="adj" fmla="val 50000"/>
+            </a:avLst>
+          </a:prstGeom>
+          <a:solidFill>
+            <a:srgbClr val="C9E1FF"/>
+          </a:solidFill>
+          <a:ln>
+            <a:noFill/>
+          </a:ln>
+          <a:effectLst/>
+        </p:spPr>
+        <p:style>
+          <a:lnRef idx="1">
+            <a:schemeClr val="accent1"/>
+          </a:lnRef>
+          <a:fillRef idx="3">
+            <a:schemeClr val="accent1"/>
+          </a:fillRef>
+          <a:effectRef idx="2">
+            <a:schemeClr val="accent1"/>
+          </a:effectRef>
+          <a:fontRef idx="minor">
+            <a:schemeClr val="lt1"/>
+          </a:fontRef>
+        </p:style>
+        <p:txBody>
+          <a:bodyPr rtlCol="0" anchor="ctr" lIns="60000" rIns="60000" tIns="0" bIns="0" wrap="none"/>
+          <a:lstStyle/>
+          <a:p>
+            <a:pPr algn="ctr"/>
+            <a:r>
+              <a:rPr sz="900" b="1">
+                <a:solidFill>
+                  <a:srgbClr val="325786"/>
+                </a:solidFill>
+                <a:latin typeface="Calibri"/>
+              </a:rPr>
+              <a:t>16.04.2026</a:t>
+            </a:r>
+          </a:p>
+        </p:txBody>
+      </p:sp>
+      <p:sp>
+        <p:nvSpPr>
+          <p:cNvPr id="6" name="content_headline_m1"/>
+          <p:cNvSpPr txBox="1"/>
+          <p:nvPr/>
+        </p:nvSpPr>
+        <p:spPr>
+          <a:xfrm>
+            <a:off x="762000" y="3607501"/>
+            <a:ext cx="5762625" cy="239316"/>
+          </a:xfrm>
+          <a:prstGeom prst="rect">
+            <a:avLst/>
+          </a:prstGeom>
+          <a:noFill/>
+        </p:spPr>
+        <p:txBody>
+          <a:bodyPr wrap="square" lIns="0" rIns="0" tIns="0" bIns="0">
+            <a:spAutoFit/>
+          </a:bodyPr>
+          <a:lstStyle/>
+          <a:p>
+            <a:pPr algn="l"/>
+            <a:r>
+              <a:rPr sz="1500" b="1">
+                <a:solidFill>
+                  <a:srgbClr val="1F2023"/>
+                </a:solidFill>
+                <a:latin typeface="Calibri"/>
+              </a:rPr>
+              <a:t>Schedule &amp; Topic Distribution</a:t>
+            </a:r>
+          </a:p>
+        </p:txBody>
+      </p:sp>
+      <p:sp>
+        <p:nvSpPr>
+          <p:cNvPr id="7" name="content_bullets_m1"/>
+          <p:cNvSpPr txBox="1"/>
+          <p:nvPr/>
+        </p:nvSpPr>
+        <p:spPr>
+          <a:xfrm>
+            <a:off x="762000" y="3884880"/>
+            <a:ext cx="5762625" cy="188082"/>
+          </a:xfrm>
+          <a:prstGeom prst="rect">
+            <a:avLst/>
+          </a:prstGeom>
+          <a:noFill/>
+        </p:spPr>
+        <p:txBody>
+          <a:bodyPr wrap="square" lIns="0" rIns="0" tIns="0" bIns="0">
+            <a:spAutoFit/>
+          </a:bodyPr>
+          <a:lstStyle/>
+          <a:p>
+            <a:pPr>
+              <a:spcAft>
+                <a:spcPts val="600"/>
+              </a:spcAft>
+            </a:pPr>
+            <a:r>
+              <a:rPr sz="1050" b="1">
+                <a:solidFill>
+                  <a:srgbClr val="C1212A"/>
+                </a:solidFill>
+                <a:latin typeface="Calibri"/>
+              </a:rPr>
+              <a:t>-  </a:t>
+            </a:r>
+            <a:r>
+              <a:rPr sz="1050">
+                <a:solidFill>
+                  <a:srgbClr val="325786"/>
+                </a:solidFill>
+                <a:latin typeface="Calibri"/>
+              </a:rPr>
+              <a:t>Presentation of project schedule and topic distribution</a:t>
+            </a:r>
+          </a:p>
+        </p:txBody>
+      </p:sp>
+      <p:sp>
+        <p:nvSpPr>
+          <p:cNvPr id="8" name="!!tl_track"/>
+          <p:cNvSpPr/>
+          <p:nvPr/>
+        </p:nvSpPr>
+        <p:spPr>
+          <a:xfrm>
+            <a:off x="952500" y="2847919"/>
+            <a:ext cx="7239000" cy="18976"/>
+          </a:xfrm>
+          <a:prstGeom prst="roundRect">
+            <a:avLst>
+              <a:gd name="adj" fmla="val 50000"/>
+            </a:avLst>
+          </a:prstGeom>
+          <a:solidFill>
+            <a:srgbClr val="E2E2E2"/>
+          </a:solidFill>
+          <a:ln>
+            <a:noFill/>
+          </a:ln>
+          <a:effectLst/>
+        </p:spPr>
+        <p:style>
+          <a:lnRef idx="1">
+            <a:schemeClr val="accent1"/>
+          </a:lnRef>
+          <a:fillRef idx="3">
+            <a:schemeClr val="accent1"/>
+          </a:fillRef>
+          <a:effectRef idx="2">
+            <a:schemeClr val="accent1"/>
+          </a:effectRef>
+          <a:fontRef idx="minor">
+            <a:schemeClr val="lt1"/>
+          </a:fontRef>
+        </p:style>
+        <p:txBody>
+          <a:bodyPr rtlCol="0" anchor="ctr"/>
+          <a:lstStyle/>
+          <a:p>
+            <a:pPr algn="ctr"/>
+          </a:p>
+        </p:txBody>
+      </p:sp>
+      <p:sp>
+        <p:nvSpPr>
+          <p:cNvPr id="9" name="!!tl_fill"/>
+          <p:cNvSpPr/>
+          <p:nvPr/>
+        </p:nvSpPr>
+        <p:spPr>
+          <a:xfrm>
+            <a:off x="952500" y="2847919"/>
+            <a:ext cx="904875" cy="18976"/>
+          </a:xfrm>
+          <a:prstGeom prst="roundRect">
+            <a:avLst>
+              <a:gd name="adj" fmla="val 50000"/>
+            </a:avLst>
+          </a:prstGeom>
+          <a:solidFill>
+            <a:srgbClr val="325786"/>
+          </a:solidFill>
+          <a:ln>
+            <a:noFill/>
+          </a:ln>
+          <a:effectLst/>
+        </p:spPr>
+        <p:style>
+          <a:lnRef idx="1">
+            <a:schemeClr val="accent1"/>
+          </a:lnRef>
+          <a:fillRef idx="3">
+            <a:schemeClr val="accent1"/>
+          </a:fillRef>
+          <a:effectRef idx="2">
+            <a:schemeClr val="accent1"/>
+          </a:effectRef>
+          <a:fontRef idx="minor">
+            <a:schemeClr val="lt1"/>
+          </a:fontRef>
+        </p:style>
+        <p:txBody>
+          <a:bodyPr rtlCol="0" anchor="ctr"/>
+          <a:lstStyle/>
+          <a:p>
+            <a:pPr algn="ctr"/>
+          </a:p>
+        </p:txBody>
+      </p:sp>
+      <p:sp>
+        <p:nvSpPr>
+          <p:cNvPr id="10" name="!!tl_dot_1"/>
+          <p:cNvSpPr/>
+          <p:nvPr/>
+        </p:nvSpPr>
+        <p:spPr>
+          <a:xfrm>
+            <a:off x="914400" y="2819400"/>
+            <a:ext cx="76200" cy="76200"/>
+          </a:xfrm>
+          <a:prstGeom prst="ellipse">
+            <a:avLst/>
+          </a:prstGeom>
+          <a:solidFill>
+            <a:srgbClr val="D1D5DB"/>
+          </a:solidFill>
+          <a:ln>
+            <a:noFill/>
+          </a:ln>
+          <a:effectLst/>
+        </p:spPr>
+        <p:style>
+          <a:lnRef idx="1">
+            <a:schemeClr val="accent1"/>
+          </a:lnRef>
+          <a:fillRef idx="3">
+            <a:schemeClr val="accent1"/>
+          </a:fillRef>
+          <a:effectRef idx="2">
+            <a:schemeClr val="accent1"/>
+          </a:effectRef>
+          <a:fontRef idx="minor">
+            <a:schemeClr val="lt1"/>
+          </a:fontRef>
+        </p:style>
+        <p:txBody>
+          <a:bodyPr rtlCol="0" anchor="ctr"/>
+          <a:lstStyle/>
+          <a:p>
+            <a:pPr algn="ctr"/>
+          </a:p>
+        </p:txBody>
+      </p:sp>
+      <p:sp>
+        <p:nvSpPr>
+          <p:cNvPr id="11" name="lbl_1_s1"/>
+          <p:cNvSpPr txBox="1"/>
+          <p:nvPr/>
+        </p:nvSpPr>
+        <p:spPr>
+          <a:xfrm>
+            <a:off x="666750" y="3009863"/>
+            <a:ext cx="571500" cy="150019"/>
+          </a:xfrm>
+          <a:prstGeom prst="rect">
+            <a:avLst/>
+          </a:prstGeom>
+          <a:noFill/>
+        </p:spPr>
+        <p:txBody>
+          <a:bodyPr wrap="square" lIns="0" rIns="0" tIns="0" bIns="0">
+            <a:spAutoFit/>
+          </a:bodyPr>
+          <a:lstStyle/>
+          <a:p>
+            <a:pPr algn="ctr"/>
+            <a:r>
+              <a:rPr sz="900" b="0">
+                <a:solidFill>
+                  <a:srgbClr val="9CA3AF"/>
+                </a:solidFill>
+                <a:latin typeface="Calibri"/>
+              </a:rPr>
+              <a:t>09.04.2026</a:t>
+            </a:r>
+          </a:p>
+        </p:txBody>
+      </p:sp>
+      <p:sp>
+        <p:nvSpPr>
+          <p:cNvPr id="12" name="!!tl_dot_2"/>
+          <p:cNvSpPr/>
+          <p:nvPr/>
+        </p:nvSpPr>
+        <p:spPr>
+          <a:xfrm>
+            <a:off x="1790700" y="2790825"/>
+            <a:ext cx="133350" cy="133350"/>
+          </a:xfrm>
+          <a:prstGeom prst="ellipse">
+            <a:avLst/>
+          </a:prstGeom>
+          <a:solidFill>
+            <a:srgbClr val="325786"/>
+          </a:solidFill>
+          <a:ln>
+            <a:noFill/>
+          </a:ln>
+          <a:effectLst/>
+        </p:spPr>
+        <p:style>
+          <a:lnRef idx="1">
+            <a:schemeClr val="accent1"/>
+          </a:lnRef>
+          <a:fillRef idx="3">
+            <a:schemeClr val="accent1"/>
+          </a:fillRef>
+          <a:effectRef idx="2">
+            <a:schemeClr val="accent1"/>
+          </a:effectRef>
+          <a:fontRef idx="minor">
+            <a:schemeClr val="lt1"/>
+          </a:fontRef>
+        </p:style>
+        <p:txBody>
+          <a:bodyPr rtlCol="0" anchor="ctr"/>
+          <a:lstStyle/>
+          <a:p>
+            <a:pPr algn="ctr"/>
+          </a:p>
+        </p:txBody>
+      </p:sp>
+      <p:sp>
+        <p:nvSpPr>
+          <p:cNvPr id="13" name="lbl_2_s1"/>
+          <p:cNvSpPr txBox="1"/>
+          <p:nvPr/>
+        </p:nvSpPr>
+        <p:spPr>
+          <a:xfrm>
+            <a:off x="1571625" y="3009863"/>
+            <a:ext cx="571500" cy="150019"/>
+          </a:xfrm>
+          <a:prstGeom prst="rect">
+            <a:avLst/>
+          </a:prstGeom>
+          <a:noFill/>
+        </p:spPr>
+        <p:txBody>
+          <a:bodyPr wrap="square" lIns="0" rIns="0" tIns="0" bIns="0">
+            <a:spAutoFit/>
+          </a:bodyPr>
+          <a:lstStyle/>
+          <a:p>
+            <a:pPr algn="ctr"/>
+            <a:r>
+              <a:rPr sz="900" b="1">
+                <a:solidFill>
+                  <a:srgbClr val="1F2023"/>
+                </a:solidFill>
+                <a:latin typeface="Calibri"/>
+              </a:rPr>
+              <a:t>16.04.2026</a:t>
+            </a:r>
+          </a:p>
+        </p:txBody>
+      </p:sp>
+      <p:sp>
+        <p:nvSpPr>
+          <p:cNvPr id="14" name="!!tl_dot_3"/>
+          <p:cNvSpPr/>
+          <p:nvPr/>
+        </p:nvSpPr>
+        <p:spPr>
+          <a:xfrm>
+            <a:off x="2724150" y="2819400"/>
+            <a:ext cx="76200" cy="76200"/>
+          </a:xfrm>
+          <a:prstGeom prst="ellipse">
+            <a:avLst/>
+          </a:prstGeom>
+          <a:solidFill>
+            <a:srgbClr val="D1D5DB"/>
+          </a:solidFill>
+          <a:ln>
+            <a:noFill/>
+          </a:ln>
+          <a:effectLst/>
+        </p:spPr>
+        <p:style>
+          <a:lnRef idx="1">
+            <a:schemeClr val="accent1"/>
+          </a:lnRef>
+          <a:fillRef idx="3">
+            <a:schemeClr val="accent1"/>
+          </a:fillRef>
+          <a:effectRef idx="2">
+            <a:schemeClr val="accent1"/>
+          </a:effectRef>
+          <a:fontRef idx="minor">
+            <a:schemeClr val="lt1"/>
+          </a:fontRef>
+        </p:style>
+        <p:txBody>
+          <a:bodyPr rtlCol="0" anchor="ctr"/>
+          <a:lstStyle/>
+          <a:p>
+            <a:pPr algn="ctr"/>
+          </a:p>
+        </p:txBody>
+      </p:sp>
+      <p:sp>
+        <p:nvSpPr>
+          <p:cNvPr id="15" name="lbl_3_s1"/>
+          <p:cNvSpPr txBox="1"/>
+          <p:nvPr/>
+        </p:nvSpPr>
+        <p:spPr>
+          <a:xfrm>
+            <a:off x="2476500" y="3009863"/>
+            <a:ext cx="571500" cy="150019"/>
+          </a:xfrm>
+          <a:prstGeom prst="rect">
+            <a:avLst/>
+          </a:prstGeom>
+          <a:noFill/>
+        </p:spPr>
+        <p:txBody>
+          <a:bodyPr wrap="square" lIns="0" rIns="0" tIns="0" bIns="0">
+            <a:spAutoFit/>
+          </a:bodyPr>
+          <a:lstStyle/>
+          <a:p>
+            <a:pPr algn="ctr"/>
+            <a:r>
+              <a:rPr sz="900" b="0">
+                <a:solidFill>
+                  <a:srgbClr val="9CA3AF"/>
+                </a:solidFill>
+                <a:latin typeface="Calibri"/>
+              </a:rPr>
+              <a:t>30.04.2026</a:t>
+            </a:r>
+          </a:p>
+        </p:txBody>
+      </p:sp>
+      <p:sp>
+        <p:nvSpPr>
+          <p:cNvPr id="16" name="!!tl_dot_4"/>
+          <p:cNvSpPr/>
+          <p:nvPr/>
+        </p:nvSpPr>
+        <p:spPr>
+          <a:xfrm>
+            <a:off x="3629025" y="2819400"/>
+            <a:ext cx="76200" cy="76200"/>
+          </a:xfrm>
+          <a:prstGeom prst="ellipse">
+            <a:avLst/>
+          </a:prstGeom>
+          <a:solidFill>
+            <a:srgbClr val="D1D5DB"/>
+          </a:solidFill>
+          <a:ln>
+            <a:noFill/>
+          </a:ln>
+          <a:effectLst/>
+        </p:spPr>
+        <p:style>
+          <a:lnRef idx="1">
+            <a:schemeClr val="accent1"/>
+          </a:lnRef>
+          <a:fillRef idx="3">
+            <a:schemeClr val="accent1"/>
+          </a:fillRef>
+          <a:effectRef idx="2">
+            <a:schemeClr val="accent1"/>
+          </a:effectRef>
+          <a:fontRef idx="minor">
+            <a:schemeClr val="lt1"/>
+          </a:fontRef>
+        </p:style>
+        <p:txBody>
+          <a:bodyPr rtlCol="0" anchor="ctr"/>
+          <a:lstStyle/>
+          <a:p>
+            <a:pPr algn="ctr"/>
+          </a:p>
+        </p:txBody>
+      </p:sp>
+      <p:sp>
+        <p:nvSpPr>
+          <p:cNvPr id="17" name="lbl_4_s1"/>
+          <p:cNvSpPr txBox="1"/>
+          <p:nvPr/>
+        </p:nvSpPr>
+        <p:spPr>
+          <a:xfrm>
+            <a:off x="3381375" y="3009863"/>
+            <a:ext cx="571500" cy="150019"/>
+          </a:xfrm>
+          <a:prstGeom prst="rect">
+            <a:avLst/>
+          </a:prstGeom>
+          <a:noFill/>
+        </p:spPr>
+        <p:txBody>
+          <a:bodyPr wrap="square" lIns="0" rIns="0" tIns="0" bIns="0">
+            <a:spAutoFit/>
+          </a:bodyPr>
+          <a:lstStyle/>
+          <a:p>
+            <a:pPr algn="ctr"/>
+            <a:r>
+              <a:rPr sz="900" b="0">
+                <a:solidFill>
+                  <a:srgbClr val="9CA3AF"/>
+                </a:solidFill>
+                <a:latin typeface="Calibri"/>
+              </a:rPr>
+              <a:t>~21.05.2026</a:t>
+            </a:r>
+          </a:p>
+        </p:txBody>
+      </p:sp>
+      <p:sp>
+        <p:nvSpPr>
+          <p:cNvPr id="18" name="!!tl_dot_5"/>
+          <p:cNvSpPr/>
+          <p:nvPr/>
+        </p:nvSpPr>
+        <p:spPr>
+          <a:xfrm>
+            <a:off x="4533900" y="2819400"/>
+            <a:ext cx="76200" cy="76200"/>
+          </a:xfrm>
+          <a:prstGeom prst="ellipse">
+            <a:avLst/>
+          </a:prstGeom>
+          <a:solidFill>
+            <a:srgbClr val="D1D5DB"/>
+          </a:solidFill>
+          <a:ln>
+            <a:noFill/>
+          </a:ln>
+          <a:effectLst/>
+        </p:spPr>
+        <p:style>
+          <a:lnRef idx="1">
+            <a:schemeClr val="accent1"/>
+          </a:lnRef>
+          <a:fillRef idx="3">
+            <a:schemeClr val="accent1"/>
+          </a:fillRef>
+          <a:effectRef idx="2">
+            <a:schemeClr val="accent1"/>
+          </a:effectRef>
+          <a:fontRef idx="minor">
+            <a:schemeClr val="lt1"/>
+          </a:fontRef>
+        </p:style>
+        <p:txBody>
+          <a:bodyPr rtlCol="0" anchor="ctr"/>
+          <a:lstStyle/>
+          <a:p>
+            <a:pPr algn="ctr"/>
+          </a:p>
+        </p:txBody>
+      </p:sp>
+      <p:sp>
+        <p:nvSpPr>
+          <p:cNvPr id="19" name="lbl_5_s1"/>
+          <p:cNvSpPr txBox="1"/>
+          <p:nvPr/>
+        </p:nvSpPr>
+        <p:spPr>
+          <a:xfrm>
+            <a:off x="4286250" y="3009863"/>
+            <a:ext cx="571500" cy="150019"/>
+          </a:xfrm>
+          <a:prstGeom prst="rect">
+            <a:avLst/>
+          </a:prstGeom>
+          <a:noFill/>
+        </p:spPr>
+        <p:txBody>
+          <a:bodyPr wrap="square" lIns="0" rIns="0" tIns="0" bIns="0">
+            <a:spAutoFit/>
+          </a:bodyPr>
+          <a:lstStyle/>
+          <a:p>
+            <a:pPr algn="ctr"/>
+            <a:r>
+              <a:rPr sz="900" b="0">
+                <a:solidFill>
+                  <a:srgbClr val="9CA3AF"/>
+                </a:solidFill>
+                <a:latin typeface="Calibri"/>
+              </a:rPr>
+              <a:t>18.06.2026</a:t>
+            </a:r>
+          </a:p>
+        </p:txBody>
+      </p:sp>
+      <p:sp>
+        <p:nvSpPr>
+          <p:cNvPr id="20" name="!!tl_dot_6"/>
+          <p:cNvSpPr/>
+          <p:nvPr/>
+        </p:nvSpPr>
+        <p:spPr>
+          <a:xfrm>
+            <a:off x="5438775" y="2819400"/>
+            <a:ext cx="76200" cy="76200"/>
+          </a:xfrm>
+          <a:prstGeom prst="ellipse">
+            <a:avLst/>
+          </a:prstGeom>
+          <a:solidFill>
+            <a:srgbClr val="D1D5DB"/>
+          </a:solidFill>
+          <a:ln>
+            <a:noFill/>
+          </a:ln>
+          <a:effectLst/>
+        </p:spPr>
+        <p:style>
+          <a:lnRef idx="1">
+            <a:schemeClr val="accent1"/>
+          </a:lnRef>
+          <a:fillRef idx="3">
+            <a:schemeClr val="accent1"/>
+          </a:fillRef>
+          <a:effectRef idx="2">
+            <a:schemeClr val="accent1"/>
+          </a:effectRef>
+          <a:fontRef idx="minor">
+            <a:schemeClr val="lt1"/>
+          </a:fontRef>
+        </p:style>
+        <p:txBody>
+          <a:bodyPr rtlCol="0" anchor="ctr"/>
+          <a:lstStyle/>
+          <a:p>
+            <a:pPr algn="ctr"/>
+          </a:p>
+        </p:txBody>
+      </p:sp>
+      <p:sp>
+        <p:nvSpPr>
+          <p:cNvPr id="21" name="lbl_6_s1"/>
+          <p:cNvSpPr txBox="1"/>
+          <p:nvPr/>
+        </p:nvSpPr>
+        <p:spPr>
+          <a:xfrm>
+            <a:off x="5191125" y="3009863"/>
+            <a:ext cx="571500" cy="150019"/>
+          </a:xfrm>
+          <a:prstGeom prst="rect">
+            <a:avLst/>
+          </a:prstGeom>
+          <a:noFill/>
+        </p:spPr>
+        <p:txBody>
+          <a:bodyPr wrap="square" lIns="0" rIns="0" tIns="0" bIns="0">
+            <a:spAutoFit/>
+          </a:bodyPr>
+          <a:lstStyle/>
+          <a:p>
+            <a:pPr algn="ctr"/>
+            <a:r>
+              <a:rPr sz="900" b="0">
+                <a:solidFill>
+                  <a:srgbClr val="9CA3AF"/>
+                </a:solidFill>
+                <a:latin typeface="Calibri"/>
+              </a:rPr>
+              <a:t>25.06.2026</a:t>
+            </a:r>
+          </a:p>
+        </p:txBody>
+      </p:sp>
+      <p:sp>
+        <p:nvSpPr>
+          <p:cNvPr id="22" name="!!tl_dot_7"/>
+          <p:cNvSpPr/>
+          <p:nvPr/>
+        </p:nvSpPr>
+        <p:spPr>
+          <a:xfrm>
+            <a:off x="6343650" y="2819400"/>
+            <a:ext cx="76200" cy="76200"/>
+          </a:xfrm>
+          <a:prstGeom prst="ellipse">
+            <a:avLst/>
+          </a:prstGeom>
+          <a:solidFill>
+            <a:srgbClr val="D1D5DB"/>
+          </a:solidFill>
+          <a:ln>
+            <a:noFill/>
+          </a:ln>
+          <a:effectLst/>
+        </p:spPr>
+        <p:style>
+          <a:lnRef idx="1">
+            <a:schemeClr val="accent1"/>
+          </a:lnRef>
+          <a:fillRef idx="3">
+            <a:schemeClr val="accent1"/>
+          </a:fillRef>
+          <a:effectRef idx="2">
+            <a:schemeClr val="accent1"/>
+          </a:effectRef>
+          <a:fontRef idx="minor">
+            <a:schemeClr val="lt1"/>
+          </a:fontRef>
+        </p:style>
+        <p:txBody>
+          <a:bodyPr rtlCol="0" anchor="ctr"/>
+          <a:lstStyle/>
+          <a:p>
+            <a:pPr algn="ctr"/>
+          </a:p>
+        </p:txBody>
+      </p:sp>
+      <p:sp>
+        <p:nvSpPr>
+          <p:cNvPr id="23" name="lbl_7_s1"/>
+          <p:cNvSpPr txBox="1"/>
+          <p:nvPr/>
+        </p:nvSpPr>
+        <p:spPr>
+          <a:xfrm>
+            <a:off x="6096000" y="3009863"/>
+            <a:ext cx="571500" cy="150019"/>
+          </a:xfrm>
+          <a:prstGeom prst="rect">
+            <a:avLst/>
+          </a:prstGeom>
+          <a:noFill/>
+        </p:spPr>
+        <p:txBody>
+          <a:bodyPr wrap="square" lIns="0" rIns="0" tIns="0" bIns="0">
+            <a:spAutoFit/>
+          </a:bodyPr>
+          <a:lstStyle/>
+          <a:p>
+            <a:pPr algn="ctr"/>
+            <a:r>
+              <a:rPr sz="900" b="0">
+                <a:solidFill>
+                  <a:srgbClr val="9CA3AF"/>
+                </a:solidFill>
+                <a:latin typeface="Calibri"/>
+              </a:rPr>
+              <a:t>09.07.2026</a:t>
+            </a:r>
+          </a:p>
+        </p:txBody>
+      </p:sp>
+      <p:sp>
+        <p:nvSpPr>
+          <p:cNvPr id="24" name="!!tl_dot_8"/>
+          <p:cNvSpPr/>
+          <p:nvPr/>
+        </p:nvSpPr>
+        <p:spPr>
+          <a:xfrm>
+            <a:off x="7248525" y="2819400"/>
+            <a:ext cx="76200" cy="76200"/>
+          </a:xfrm>
+          <a:prstGeom prst="ellipse">
+            <a:avLst/>
+          </a:prstGeom>
+          <a:solidFill>
+            <a:srgbClr val="D1D5DB"/>
+          </a:solidFill>
+          <a:ln>
+            <a:noFill/>
+          </a:ln>
+          <a:effectLst/>
+        </p:spPr>
+        <p:style>
+          <a:lnRef idx="1">
+            <a:schemeClr val="accent1"/>
+          </a:lnRef>
+          <a:fillRef idx="3">
+            <a:schemeClr val="accent1"/>
+          </a:fillRef>
+          <a:effectRef idx="2">
+            <a:schemeClr val="accent1"/>
+          </a:effectRef>
+          <a:fontRef idx="minor">
+            <a:schemeClr val="lt1"/>
+          </a:fontRef>
+        </p:style>
+        <p:txBody>
+          <a:bodyPr rtlCol="0" anchor="ctr"/>
+          <a:lstStyle/>
+          <a:p>
+            <a:pPr algn="ctr"/>
+          </a:p>
+        </p:txBody>
+      </p:sp>
+      <p:sp>
+        <p:nvSpPr>
+          <p:cNvPr id="25" name="lbl_8_s1"/>
+          <p:cNvSpPr txBox="1"/>
+          <p:nvPr/>
+        </p:nvSpPr>
+        <p:spPr>
+          <a:xfrm>
+            <a:off x="7000875" y="3009863"/>
+            <a:ext cx="571500" cy="150019"/>
+          </a:xfrm>
+          <a:prstGeom prst="rect">
+            <a:avLst/>
+          </a:prstGeom>
+          <a:noFill/>
+        </p:spPr>
+        <p:txBody>
+          <a:bodyPr wrap="square" lIns="0" rIns="0" tIns="0" bIns="0">
+            <a:spAutoFit/>
+          </a:bodyPr>
+          <a:lstStyle/>
+          <a:p>
+            <a:pPr algn="ctr"/>
+            <a:r>
+              <a:rPr sz="900" b="0">
+                <a:solidFill>
+                  <a:srgbClr val="9CA3AF"/>
+                </a:solidFill>
+                <a:latin typeface="Calibri"/>
+              </a:rPr>
+              <a:t>16.07.2026</a:t>
+            </a:r>
+          </a:p>
+        </p:txBody>
+      </p:sp>
+      <p:sp>
+        <p:nvSpPr>
+          <p:cNvPr id="26" name="!!tl_dot_9"/>
+          <p:cNvSpPr/>
+          <p:nvPr/>
+        </p:nvSpPr>
+        <p:spPr>
+          <a:xfrm>
+            <a:off x="8153400" y="2819400"/>
+            <a:ext cx="76200" cy="76200"/>
+          </a:xfrm>
+          <a:prstGeom prst="ellipse">
+            <a:avLst/>
+          </a:prstGeom>
+          <a:solidFill>
+            <a:srgbClr val="D1D5DB"/>
+          </a:solidFill>
+          <a:ln>
+            <a:noFill/>
+          </a:ln>
+          <a:effectLst/>
+        </p:spPr>
+        <p:style>
+          <a:lnRef idx="1">
+            <a:schemeClr val="accent1"/>
+          </a:lnRef>
+          <a:fillRef idx="3">
+            <a:schemeClr val="accent1"/>
+          </a:fillRef>
+          <a:effectRef idx="2">
+            <a:schemeClr val="accent1"/>
+          </a:effectRef>
+          <a:fontRef idx="minor">
+            <a:schemeClr val="lt1"/>
+          </a:fontRef>
+        </p:style>
+        <p:txBody>
+          <a:bodyPr rtlCol="0" anchor="ctr"/>
+          <a:lstStyle/>
+          <a:p>
+            <a:pPr algn="ctr"/>
+          </a:p>
+        </p:txBody>
+      </p:sp>
+      <p:sp>
+        <p:nvSpPr>
+          <p:cNvPr id="27" name="lbl_9_s1"/>
+          <p:cNvSpPr txBox="1"/>
+          <p:nvPr/>
+        </p:nvSpPr>
+        <p:spPr>
+          <a:xfrm>
+            <a:off x="7905750" y="3009863"/>
+            <a:ext cx="571500" cy="150019"/>
+          </a:xfrm>
+          <a:prstGeom prst="rect">
+            <a:avLst/>
+          </a:prstGeom>
+          <a:noFill/>
+        </p:spPr>
+        <p:txBody>
+          <a:bodyPr wrap="square" lIns="0" rIns="0" tIns="0" bIns="0">
+            <a:spAutoFit/>
+          </a:bodyPr>
+          <a:lstStyle/>
+          <a:p>
+            <a:pPr algn="ctr"/>
+            <a:r>
+              <a:rPr sz="900" b="0">
+                <a:solidFill>
+                  <a:srgbClr val="9CA3AF"/>
+                </a:solidFill>
+                <a:latin typeface="Calibri"/>
+              </a:rPr>
+              <a:t>20.07.2026</a:t>
+            </a:r>
+          </a:p>
+        </p:txBody>
+      </p:sp>
+    </p:spTree>
+  </p:cSld>
+  <p:clrMapOvr>
+    <a:masterClrMapping/>
+  </p:clrMapOvr>
+  <mc:AlternateContent xmlns:mc="http://schemas.openxmlformats.org/markup-compatibility/2006">
+    <mc:Choice xmlns:p159="http://schemas.microsoft.com/office/powerpoint/2015/09/main" Requires="p159">
+      <p:transition spd="slow">
+        <p159:morph option="byObject"/>
+      </p:transition>
+    </mc:Choice>
+    <mc:Fallback>
+      <p:transition spd="slow">
+        <p:fade/>
+      </p:transition>
+    </mc:Fallback>
+  </mc:AlternateContent>
+</p:sld>
+</file>
+
+<file path=ppt/slides/slide16.xml><?xml version="1.0" encoding="utf-8"?>
+<p:sld xmlns:a="http://schemas.openxmlformats.org/drawingml/2006/main" xmlns:p="http://schemas.openxmlformats.org/presentationml/2006/main" xmlns:r="http://schemas.openxmlformats.org/officeDocument/2006/relationships">
+  <p:cSld>
+    <p:spTree>
+      <p:nvGrpSpPr>
+        <p:cNvPr id="1" name=""/>
+        <p:cNvGrpSpPr/>
+        <p:nvPr/>
+      </p:nvGrpSpPr>
+      <p:grpSpPr/>
+      <p:sp>
+        <p:nvSpPr>
+          <p:cNvPr id="2" name="title_m2"/>
+          <p:cNvSpPr txBox="1"/>
+          <p:nvPr/>
+        </p:nvSpPr>
+        <p:spPr>
+          <a:xfrm>
+            <a:off x="457200" y="87474"/>
+            <a:ext cx="8458200" cy="769776"/>
+          </a:xfrm>
+          <a:prstGeom prst="rect">
+            <a:avLst/>
+          </a:prstGeom>
+          <a:noFill/>
+        </p:spPr>
+        <p:txBody>
+          <a:bodyPr wrap="square" lIns="0" rIns="0" tIns="0" bIns="0" anchor="b">
+            <a:spAutoFit/>
+          </a:bodyPr>
+          <a:lstStyle/>
+          <a:p>
+            <a:pPr algn="l"/>
+            <a:r>
+              <a:rPr sz="1800" b="0">
+                <a:solidFill>
+                  <a:srgbClr val="808080"/>
+                </a:solidFill>
+                <a:latin typeface="Calibri"/>
+              </a:rPr>
+              <a:t>FL-Trilemma: Project Timeline</a:t>
+            </a:r>
+          </a:p>
+        </p:txBody>
+      </p:sp>
+      <p:cxnSp>
+        <p:nvCxnSpPr>
+          <p:cNvPr id="4" name="divider_m2"/>
+          <p:cNvCxnSpPr/>
+          <p:nvPr/>
+        </p:nvCxnSpPr>
+        <p:spPr>
+          <a:xfrm>
+            <a:off x="571500" y="952500"/>
+            <a:ext cx="8001000" cy="0"/>
+          </a:xfrm>
+          <a:prstGeom prst="line">
+            <a:avLst/>
+          </a:prstGeom>
+          <a:ln w="9525">
+            <a:solidFill>
+              <a:srgbClr val="B3B3B3"/>
+            </a:solidFill>
+          </a:ln>
+          <a:effectLst/>
+        </p:spPr>
+        <p:style>
+          <a:lnRef idx="2">
+            <a:schemeClr val="accent1"/>
+          </a:lnRef>
+          <a:fillRef idx="0">
+            <a:schemeClr val="accent1"/>
+          </a:fillRef>
+          <a:effectRef idx="1">
+            <a:schemeClr val="accent1"/>
+          </a:effectRef>
+          <a:fontRef idx="minor">
+            <a:schemeClr val="tx1"/>
+          </a:fontRef>
+        </p:style>
+      </p:cxnSp>
+      <p:sp>
+        <p:nvSpPr>
+          <p:cNvPr id="5" name="content_pill_m2"/>
+          <p:cNvSpPr/>
+          <p:nvPr/>
+        </p:nvSpPr>
+        <p:spPr>
+          <a:xfrm>
+            <a:off x="762000" y="1095375"/>
+            <a:ext cx="825000" cy="188082"/>
+          </a:xfrm>
+          <a:prstGeom prst="roundRect">
+            <a:avLst>
+              <a:gd name="adj" fmla="val 50000"/>
+            </a:avLst>
+          </a:prstGeom>
+          <a:solidFill>
+            <a:srgbClr val="C9E1FF"/>
+          </a:solidFill>
+          <a:ln>
+            <a:noFill/>
+          </a:ln>
+          <a:effectLst/>
+        </p:spPr>
+        <p:style>
+          <a:lnRef idx="1">
+            <a:schemeClr val="accent1"/>
+          </a:lnRef>
+          <a:fillRef idx="3">
+            <a:schemeClr val="accent1"/>
+          </a:fillRef>
+          <a:effectRef idx="2">
+            <a:schemeClr val="accent1"/>
+          </a:effectRef>
+          <a:fontRef idx="minor">
+            <a:schemeClr val="lt1"/>
+          </a:fontRef>
+        </p:style>
+        <p:txBody>
+          <a:bodyPr rtlCol="0" anchor="ctr" lIns="60000" rIns="60000" tIns="0" bIns="0" wrap="none"/>
+          <a:lstStyle/>
+          <a:p>
+            <a:pPr algn="ctr"/>
+            <a:r>
+              <a:rPr sz="900" b="1">
+                <a:solidFill>
+                  <a:srgbClr val="325786"/>
+                </a:solidFill>
+                <a:latin typeface="Calibri"/>
+              </a:rPr>
+              <a:t>30.04.2026</a:t>
+            </a:r>
+          </a:p>
+        </p:txBody>
+      </p:sp>
+      <p:sp>
+        <p:nvSpPr>
+          <p:cNvPr id="6" name="content_headline_m2"/>
+          <p:cNvSpPr txBox="1"/>
+          <p:nvPr/>
+        </p:nvSpPr>
+        <p:spPr>
+          <a:xfrm>
+            <a:off x="762000" y="1369126"/>
+            <a:ext cx="5762625" cy="239316"/>
+          </a:xfrm>
+          <a:prstGeom prst="rect">
+            <a:avLst/>
+          </a:prstGeom>
+          <a:noFill/>
+        </p:spPr>
+        <p:txBody>
+          <a:bodyPr wrap="square" lIns="0" rIns="0" tIns="0" bIns="0">
+            <a:spAutoFit/>
+          </a:bodyPr>
+          <a:lstStyle/>
+          <a:p>
+            <a:pPr algn="l"/>
+            <a:r>
+              <a:rPr sz="1500" b="1">
+                <a:solidFill>
+                  <a:srgbClr val="1F2023"/>
+                </a:solidFill>
+                <a:latin typeface="Calibri"/>
+              </a:rPr>
+              <a:t>Small Presentations on Potential Topics</a:t>
+            </a:r>
+          </a:p>
+        </p:txBody>
+      </p:sp>
+      <p:sp>
+        <p:nvSpPr>
+          <p:cNvPr id="7" name="content_bullets_m2"/>
+          <p:cNvSpPr txBox="1"/>
+          <p:nvPr/>
+        </p:nvSpPr>
+        <p:spPr>
+          <a:xfrm>
+            <a:off x="762000" y="1646504"/>
+            <a:ext cx="5762625" cy="376163"/>
+          </a:xfrm>
+          <a:prstGeom prst="rect">
+            <a:avLst/>
+          </a:prstGeom>
+          <a:noFill/>
+        </p:spPr>
+        <p:txBody>
+          <a:bodyPr wrap="square" lIns="0" rIns="0" tIns="0" bIns="0">
+            <a:spAutoFit/>
+          </a:bodyPr>
+          <a:lstStyle/>
+          <a:p>
+            <a:pPr>
+              <a:spcAft>
+                <a:spcPts val="600"/>
+              </a:spcAft>
+            </a:pPr>
+            <a:r>
+              <a:rPr sz="1050" b="1">
+                <a:solidFill>
+                  <a:srgbClr val="C1212A"/>
+                </a:solidFill>
+                <a:latin typeface="Calibri"/>
+              </a:rPr>
+              <a:t>-  </a:t>
+            </a:r>
+            <a:r>
+              <a:rPr sz="1050">
+                <a:solidFill>
+                  <a:srgbClr val="325786"/>
+                </a:solidFill>
+                <a:latin typeface="Calibri"/>
+              </a:rPr>
+              <a:t>DFL.tex - Security and Privacy Concerns in Federated Learning: An Introduction</a:t>
+            </a:r>
+          </a:p>
+          <a:p>
+            <a:pPr>
+              <a:spcAft>
+                <a:spcPts val="600"/>
+              </a:spcAft>
+            </a:pPr>
+            <a:r>
+              <a:rPr sz="1050" b="1">
+                <a:solidFill>
+                  <a:srgbClr val="C1212A"/>
+                </a:solidFill>
+                <a:latin typeface="Calibri"/>
+              </a:rPr>
+              <a:t>-  </a:t>
+            </a:r>
+            <a:r>
+              <a:rPr sz="1050">
+                <a:solidFill>
+                  <a:srgbClr val="325786"/>
+                </a:solidFill>
+                <a:latin typeface="Calibri"/>
+              </a:rPr>
+              <a:t>SMPC.tex - Introduction to Secure Multi-Party Computation</a:t>
+            </a:r>
+          </a:p>
+        </p:txBody>
+      </p:sp>
+      <p:sp>
+        <p:nvSpPr>
+          <p:cNvPr id="8" name="!!tl_track"/>
+          <p:cNvSpPr/>
+          <p:nvPr/>
+        </p:nvSpPr>
+        <p:spPr>
+          <a:xfrm>
+            <a:off x="952500" y="2847919"/>
+            <a:ext cx="7239000" cy="18976"/>
+          </a:xfrm>
+          <a:prstGeom prst="roundRect">
+            <a:avLst>
+              <a:gd name="adj" fmla="val 50000"/>
+            </a:avLst>
+          </a:prstGeom>
+          <a:solidFill>
+            <a:srgbClr val="E2E2E2"/>
+          </a:solidFill>
+          <a:ln>
+            <a:noFill/>
+          </a:ln>
+          <a:effectLst/>
+        </p:spPr>
+        <p:style>
+          <a:lnRef idx="1">
+            <a:schemeClr val="accent1"/>
+          </a:lnRef>
+          <a:fillRef idx="3">
+            <a:schemeClr val="accent1"/>
+          </a:fillRef>
+          <a:effectRef idx="2">
+            <a:schemeClr val="accent1"/>
+          </a:effectRef>
+          <a:fontRef idx="minor">
+            <a:schemeClr val="lt1"/>
+          </a:fontRef>
+        </p:style>
+        <p:txBody>
+          <a:bodyPr rtlCol="0" anchor="ctr"/>
+          <a:lstStyle/>
+          <a:p>
+            <a:pPr algn="ctr"/>
+          </a:p>
+        </p:txBody>
+      </p:sp>
+      <p:sp>
+        <p:nvSpPr>
+          <p:cNvPr id="9" name="!!tl_fill"/>
+          <p:cNvSpPr/>
+          <p:nvPr/>
+        </p:nvSpPr>
+        <p:spPr>
+          <a:xfrm>
+            <a:off x="952500" y="2847919"/>
+            <a:ext cx="1809750" cy="18976"/>
+          </a:xfrm>
+          <a:prstGeom prst="roundRect">
+            <a:avLst>
+              <a:gd name="adj" fmla="val 50000"/>
+            </a:avLst>
+          </a:prstGeom>
+          <a:solidFill>
+            <a:srgbClr val="325786"/>
+          </a:solidFill>
+          <a:ln>
+            <a:noFill/>
+          </a:ln>
+          <a:effectLst/>
+        </p:spPr>
+        <p:style>
+          <a:lnRef idx="1">
+            <a:schemeClr val="accent1"/>
+          </a:lnRef>
+          <a:fillRef idx="3">
+            <a:schemeClr val="accent1"/>
+          </a:fillRef>
+          <a:effectRef idx="2">
+            <a:schemeClr val="accent1"/>
+          </a:effectRef>
+          <a:fontRef idx="minor">
+            <a:schemeClr val="lt1"/>
+          </a:fontRef>
+        </p:style>
+        <p:txBody>
+          <a:bodyPr rtlCol="0" anchor="ctr"/>
+          <a:lstStyle/>
+          <a:p>
+            <a:pPr algn="ctr"/>
+          </a:p>
+        </p:txBody>
+      </p:sp>
+      <p:sp>
+        <p:nvSpPr>
+          <p:cNvPr id="10" name="!!tl_dot_1"/>
+          <p:cNvSpPr/>
+          <p:nvPr/>
+        </p:nvSpPr>
+        <p:spPr>
+          <a:xfrm>
+            <a:off x="914400" y="2819400"/>
+            <a:ext cx="76200" cy="76200"/>
+          </a:xfrm>
+          <a:prstGeom prst="ellipse">
+            <a:avLst/>
+          </a:prstGeom>
+          <a:solidFill>
+            <a:srgbClr val="D1D5DB"/>
+          </a:solidFill>
+          <a:ln>
+            <a:noFill/>
+          </a:ln>
+          <a:effectLst/>
+        </p:spPr>
+        <p:style>
+          <a:lnRef idx="1">
+            <a:schemeClr val="accent1"/>
+          </a:lnRef>
+          <a:fillRef idx="3">
+            <a:schemeClr val="accent1"/>
+          </a:fillRef>
+          <a:effectRef idx="2">
+            <a:schemeClr val="accent1"/>
+          </a:effectRef>
+          <a:fontRef idx="minor">
+            <a:schemeClr val="lt1"/>
+          </a:fontRef>
+        </p:style>
+        <p:txBody>
+          <a:bodyPr rtlCol="0" anchor="ctr"/>
+          <a:lstStyle/>
+          <a:p>
+            <a:pPr algn="ctr"/>
+          </a:p>
+        </p:txBody>
+      </p:sp>
+      <p:sp>
+        <p:nvSpPr>
+          <p:cNvPr id="11" name="lbl_1_s2"/>
+          <p:cNvSpPr txBox="1"/>
+          <p:nvPr/>
+        </p:nvSpPr>
+        <p:spPr>
+          <a:xfrm>
+            <a:off x="666750" y="3009863"/>
+            <a:ext cx="571500" cy="150019"/>
+          </a:xfrm>
+          <a:prstGeom prst="rect">
+            <a:avLst/>
+          </a:prstGeom>
+          <a:noFill/>
+        </p:spPr>
+        <p:txBody>
+          <a:bodyPr wrap="square" lIns="0" rIns="0" tIns="0" bIns="0">
+            <a:spAutoFit/>
+          </a:bodyPr>
+          <a:lstStyle/>
+          <a:p>
+            <a:pPr algn="ctr"/>
+            <a:r>
+              <a:rPr sz="900" b="0">
+                <a:solidFill>
+                  <a:srgbClr val="9CA3AF"/>
+                </a:solidFill>
+                <a:latin typeface="Calibri"/>
+              </a:rPr>
+              <a:t>09.04.2026</a:t>
+            </a:r>
+          </a:p>
+        </p:txBody>
+      </p:sp>
+      <p:sp>
+        <p:nvSpPr>
+          <p:cNvPr id="12" name="!!tl_dot_2"/>
+          <p:cNvSpPr/>
+          <p:nvPr/>
+        </p:nvSpPr>
+        <p:spPr>
+          <a:xfrm>
+            <a:off x="1819275" y="2819400"/>
+            <a:ext cx="76200" cy="76200"/>
+          </a:xfrm>
+          <a:prstGeom prst="ellipse">
+            <a:avLst/>
+          </a:prstGeom>
+          <a:solidFill>
+            <a:srgbClr val="D1D5DB"/>
+          </a:solidFill>
+          <a:ln>
+            <a:noFill/>
+          </a:ln>
+          <a:effectLst/>
+        </p:spPr>
+        <p:style>
+          <a:lnRef idx="1">
+            <a:schemeClr val="accent1"/>
+          </a:lnRef>
+          <a:fillRef idx="3">
+            <a:schemeClr val="accent1"/>
+          </a:fillRef>
+          <a:effectRef idx="2">
+            <a:schemeClr val="accent1"/>
+          </a:effectRef>
+          <a:fontRef idx="minor">
+            <a:schemeClr val="lt1"/>
+          </a:fontRef>
+        </p:style>
+        <p:txBody>
+          <a:bodyPr rtlCol="0" anchor="ctr"/>
+          <a:lstStyle/>
+          <a:p>
+            <a:pPr algn="ctr"/>
+          </a:p>
+        </p:txBody>
+      </p:sp>
+      <p:sp>
+        <p:nvSpPr>
+          <p:cNvPr id="13" name="lbl_2_s2"/>
+          <p:cNvSpPr txBox="1"/>
+          <p:nvPr/>
+        </p:nvSpPr>
+        <p:spPr>
+          <a:xfrm>
+            <a:off x="1571625" y="3009863"/>
+            <a:ext cx="571500" cy="150019"/>
+          </a:xfrm>
+          <a:prstGeom prst="rect">
+            <a:avLst/>
+          </a:prstGeom>
+          <a:noFill/>
+        </p:spPr>
+        <p:txBody>
+          <a:bodyPr wrap="square" lIns="0" rIns="0" tIns="0" bIns="0">
+            <a:spAutoFit/>
+          </a:bodyPr>
+          <a:lstStyle/>
+          <a:p>
+            <a:pPr algn="ctr"/>
+            <a:r>
+              <a:rPr sz="900" b="0">
+                <a:solidFill>
+                  <a:srgbClr val="9CA3AF"/>
+                </a:solidFill>
+                <a:latin typeface="Calibri"/>
+              </a:rPr>
+              <a:t>16.04.2026</a:t>
+            </a:r>
+          </a:p>
+        </p:txBody>
+      </p:sp>
+      <p:sp>
+        <p:nvSpPr>
+          <p:cNvPr id="14" name="!!tl_dot_3"/>
+          <p:cNvSpPr/>
+          <p:nvPr/>
+        </p:nvSpPr>
+        <p:spPr>
+          <a:xfrm>
+            <a:off x="2695575" y="2790825"/>
+            <a:ext cx="133350" cy="133350"/>
+          </a:xfrm>
+          <a:prstGeom prst="ellipse">
+            <a:avLst/>
+          </a:prstGeom>
+          <a:solidFill>
+            <a:srgbClr val="325786"/>
+          </a:solidFill>
+          <a:ln>
+            <a:noFill/>
+          </a:ln>
+          <a:effectLst/>
+        </p:spPr>
+        <p:style>
+          <a:lnRef idx="1">
+            <a:schemeClr val="accent1"/>
+          </a:lnRef>
+          <a:fillRef idx="3">
+            <a:schemeClr val="accent1"/>
+          </a:fillRef>
+          <a:effectRef idx="2">
+            <a:schemeClr val="accent1"/>
+          </a:effectRef>
+          <a:fontRef idx="minor">
+            <a:schemeClr val="lt1"/>
+          </a:fontRef>
+        </p:style>
+        <p:txBody>
+          <a:bodyPr rtlCol="0" anchor="ctr"/>
+          <a:lstStyle/>
+          <a:p>
+            <a:pPr algn="ctr"/>
+          </a:p>
+        </p:txBody>
+      </p:sp>
+      <p:sp>
+        <p:nvSpPr>
+          <p:cNvPr id="15" name="lbl_3_s2"/>
+          <p:cNvSpPr txBox="1"/>
+          <p:nvPr/>
+        </p:nvSpPr>
+        <p:spPr>
+          <a:xfrm>
+            <a:off x="2476500" y="3009863"/>
+            <a:ext cx="571500" cy="150019"/>
+          </a:xfrm>
+          <a:prstGeom prst="rect">
+            <a:avLst/>
+          </a:prstGeom>
+          <a:noFill/>
+        </p:spPr>
+        <p:txBody>
+          <a:bodyPr wrap="square" lIns="0" rIns="0" tIns="0" bIns="0">
+            <a:spAutoFit/>
+          </a:bodyPr>
+          <a:lstStyle/>
+          <a:p>
+            <a:pPr algn="ctr"/>
+            <a:r>
+              <a:rPr sz="900" b="1">
+                <a:solidFill>
+                  <a:srgbClr val="1F2023"/>
+                </a:solidFill>
+                <a:latin typeface="Calibri"/>
+              </a:rPr>
+              <a:t>30.04.2026</a:t>
+            </a:r>
+          </a:p>
+        </p:txBody>
+      </p:sp>
+      <p:sp>
+        <p:nvSpPr>
+          <p:cNvPr id="16" name="!!tl_dot_4"/>
+          <p:cNvSpPr/>
+          <p:nvPr/>
+        </p:nvSpPr>
+        <p:spPr>
+          <a:xfrm>
+            <a:off x="3629025" y="2819400"/>
+            <a:ext cx="76200" cy="76200"/>
+          </a:xfrm>
+          <a:prstGeom prst="ellipse">
+            <a:avLst/>
+          </a:prstGeom>
+          <a:solidFill>
+            <a:srgbClr val="D1D5DB"/>
+          </a:solidFill>
+          <a:ln>
+            <a:noFill/>
+          </a:ln>
+          <a:effectLst/>
+        </p:spPr>
+        <p:style>
+          <a:lnRef idx="1">
+            <a:schemeClr val="accent1"/>
+          </a:lnRef>
+          <a:fillRef idx="3">
+            <a:schemeClr val="accent1"/>
+          </a:fillRef>
+          <a:effectRef idx="2">
+            <a:schemeClr val="accent1"/>
+          </a:effectRef>
+          <a:fontRef idx="minor">
+            <a:schemeClr val="lt1"/>
+          </a:fontRef>
+        </p:style>
+        <p:txBody>
+          <a:bodyPr rtlCol="0" anchor="ctr"/>
+          <a:lstStyle/>
+          <a:p>
+            <a:pPr algn="ctr"/>
+          </a:p>
+        </p:txBody>
+      </p:sp>
+      <p:sp>
+        <p:nvSpPr>
+          <p:cNvPr id="17" name="lbl_4_s2"/>
+          <p:cNvSpPr txBox="1"/>
+          <p:nvPr/>
+        </p:nvSpPr>
+        <p:spPr>
+          <a:xfrm>
+            <a:off x="3381375" y="3009863"/>
+            <a:ext cx="571500" cy="150019"/>
+          </a:xfrm>
+          <a:prstGeom prst="rect">
+            <a:avLst/>
+          </a:prstGeom>
+          <a:noFill/>
+        </p:spPr>
+        <p:txBody>
+          <a:bodyPr wrap="square" lIns="0" rIns="0" tIns="0" bIns="0">
+            <a:spAutoFit/>
+          </a:bodyPr>
+          <a:lstStyle/>
+          <a:p>
+            <a:pPr algn="ctr"/>
+            <a:r>
+              <a:rPr sz="900" b="0">
+                <a:solidFill>
+                  <a:srgbClr val="9CA3AF"/>
+                </a:solidFill>
+                <a:latin typeface="Calibri"/>
+              </a:rPr>
+              <a:t>~21.05.2026</a:t>
+            </a:r>
+          </a:p>
+        </p:txBody>
+      </p:sp>
+      <p:sp>
+        <p:nvSpPr>
+          <p:cNvPr id="18" name="!!tl_dot_5"/>
+          <p:cNvSpPr/>
+          <p:nvPr/>
+        </p:nvSpPr>
+        <p:spPr>
+          <a:xfrm>
+            <a:off x="4533900" y="2819400"/>
+            <a:ext cx="76200" cy="76200"/>
+          </a:xfrm>
+          <a:prstGeom prst="ellipse">
+            <a:avLst/>
+          </a:prstGeom>
+          <a:solidFill>
+            <a:srgbClr val="D1D5DB"/>
+          </a:solidFill>
+          <a:ln>
+            <a:noFill/>
+          </a:ln>
+          <a:effectLst/>
+        </p:spPr>
+        <p:style>
+          <a:lnRef idx="1">
+            <a:schemeClr val="accent1"/>
+          </a:lnRef>
+          <a:fillRef idx="3">
+            <a:schemeClr val="accent1"/>
+          </a:fillRef>
+          <a:effectRef idx="2">
+            <a:schemeClr val="accent1"/>
+          </a:effectRef>
+          <a:fontRef idx="minor">
+            <a:schemeClr val="lt1"/>
+          </a:fontRef>
+        </p:style>
+        <p:txBody>
+          <a:bodyPr rtlCol="0" anchor="ctr"/>
+          <a:lstStyle/>
+          <a:p>
+            <a:pPr algn="ctr"/>
+          </a:p>
+        </p:txBody>
+      </p:sp>
+      <p:sp>
+        <p:nvSpPr>
+          <p:cNvPr id="19" name="lbl_5_s2"/>
+          <p:cNvSpPr txBox="1"/>
+          <p:nvPr/>
+        </p:nvSpPr>
+        <p:spPr>
+          <a:xfrm>
+            <a:off x="4286250" y="3009863"/>
+            <a:ext cx="571500" cy="150019"/>
+          </a:xfrm>
+          <a:prstGeom prst="rect">
+            <a:avLst/>
+          </a:prstGeom>
+          <a:noFill/>
+        </p:spPr>
+        <p:txBody>
+          <a:bodyPr wrap="square" lIns="0" rIns="0" tIns="0" bIns="0">
+            <a:spAutoFit/>
+          </a:bodyPr>
+          <a:lstStyle/>
+          <a:p>
+            <a:pPr algn="ctr"/>
+            <a:r>
+              <a:rPr sz="900" b="0">
+                <a:solidFill>
+                  <a:srgbClr val="9CA3AF"/>
+                </a:solidFill>
+                <a:latin typeface="Calibri"/>
+              </a:rPr>
+              <a:t>18.06.2026</a:t>
+            </a:r>
+          </a:p>
+        </p:txBody>
+      </p:sp>
+      <p:sp>
+        <p:nvSpPr>
+          <p:cNvPr id="20" name="!!tl_dot_6"/>
+          <p:cNvSpPr/>
+          <p:nvPr/>
+        </p:nvSpPr>
+        <p:spPr>
+          <a:xfrm>
+            <a:off x="5438775" y="2819400"/>
+            <a:ext cx="76200" cy="76200"/>
+          </a:xfrm>
+          <a:prstGeom prst="ellipse">
+            <a:avLst/>
+          </a:prstGeom>
+          <a:solidFill>
+            <a:srgbClr val="D1D5DB"/>
+          </a:solidFill>
+          <a:ln>
+            <a:noFill/>
+          </a:ln>
+          <a:effectLst/>
+        </p:spPr>
+        <p:style>
+          <a:lnRef idx="1">
+            <a:schemeClr val="accent1"/>
+          </a:lnRef>
+          <a:fillRef idx="3">
+            <a:schemeClr val="accent1"/>
+          </a:fillRef>
+          <a:effectRef idx="2">
+            <a:schemeClr val="accent1"/>
+          </a:effectRef>
+          <a:fontRef idx="minor">
+            <a:schemeClr val="lt1"/>
+          </a:fontRef>
+        </p:style>
+        <p:txBody>
+          <a:bodyPr rtlCol="0" anchor="ctr"/>
+          <a:lstStyle/>
+          <a:p>
+            <a:pPr algn="ctr"/>
+          </a:p>
+        </p:txBody>
+      </p:sp>
+      <p:sp>
+        <p:nvSpPr>
+          <p:cNvPr id="21" name="lbl_6_s2"/>
+          <p:cNvSpPr txBox="1"/>
+          <p:nvPr/>
+        </p:nvSpPr>
+        <p:spPr>
+          <a:xfrm>
+            <a:off x="5191125" y="3009863"/>
+            <a:ext cx="571500" cy="150019"/>
+          </a:xfrm>
+          <a:prstGeom prst="rect">
+            <a:avLst/>
+          </a:prstGeom>
+          <a:noFill/>
+        </p:spPr>
+        <p:txBody>
+          <a:bodyPr wrap="square" lIns="0" rIns="0" tIns="0" bIns="0">
+            <a:spAutoFit/>
+          </a:bodyPr>
+          <a:lstStyle/>
+          <a:p>
+            <a:pPr algn="ctr"/>
+            <a:r>
+              <a:rPr sz="900" b="0">
+                <a:solidFill>
+                  <a:srgbClr val="9CA3AF"/>
+                </a:solidFill>
+                <a:latin typeface="Calibri"/>
+              </a:rPr>
+              <a:t>25.06.2026</a:t>
+            </a:r>
+          </a:p>
+        </p:txBody>
+      </p:sp>
+      <p:sp>
+        <p:nvSpPr>
+          <p:cNvPr id="22" name="!!tl_dot_7"/>
+          <p:cNvSpPr/>
+          <p:nvPr/>
+        </p:nvSpPr>
+        <p:spPr>
+          <a:xfrm>
+            <a:off x="6343650" y="2819400"/>
+            <a:ext cx="76200" cy="76200"/>
+          </a:xfrm>
+          <a:prstGeom prst="ellipse">
+            <a:avLst/>
+          </a:prstGeom>
+          <a:solidFill>
+            <a:srgbClr val="D1D5DB"/>
+          </a:solidFill>
+          <a:ln>
+            <a:noFill/>
+          </a:ln>
+          <a:effectLst/>
+        </p:spPr>
+        <p:style>
+          <a:lnRef idx="1">
+            <a:schemeClr val="accent1"/>
+          </a:lnRef>
+          <a:fillRef idx="3">
+            <a:schemeClr val="accent1"/>
+          </a:fillRef>
+          <a:effectRef idx="2">
+            <a:schemeClr val="accent1"/>
+          </a:effectRef>
+          <a:fontRef idx="minor">
+            <a:schemeClr val="lt1"/>
+          </a:fontRef>
+        </p:style>
+        <p:txBody>
+          <a:bodyPr rtlCol="0" anchor="ctr"/>
+          <a:lstStyle/>
+          <a:p>
+            <a:pPr algn="ctr"/>
+          </a:p>
+        </p:txBody>
+      </p:sp>
+      <p:sp>
+        <p:nvSpPr>
+          <p:cNvPr id="23" name="lbl_7_s2"/>
+          <p:cNvSpPr txBox="1"/>
+          <p:nvPr/>
+        </p:nvSpPr>
+        <p:spPr>
+          <a:xfrm>
+            <a:off x="6096000" y="3009863"/>
+            <a:ext cx="571500" cy="150019"/>
+          </a:xfrm>
+          <a:prstGeom prst="rect">
+            <a:avLst/>
+          </a:prstGeom>
+          <a:noFill/>
+        </p:spPr>
+        <p:txBody>
+          <a:bodyPr wrap="square" lIns="0" rIns="0" tIns="0" bIns="0">
+            <a:spAutoFit/>
+          </a:bodyPr>
+          <a:lstStyle/>
+          <a:p>
+            <a:pPr algn="ctr"/>
+            <a:r>
+              <a:rPr sz="900" b="0">
+                <a:solidFill>
+                  <a:srgbClr val="9CA3AF"/>
+                </a:solidFill>
+                <a:latin typeface="Calibri"/>
+              </a:rPr>
+              <a:t>09.07.2026</a:t>
+            </a:r>
+          </a:p>
+        </p:txBody>
+      </p:sp>
+      <p:sp>
+        <p:nvSpPr>
+          <p:cNvPr id="24" name="!!tl_dot_8"/>
+          <p:cNvSpPr/>
+          <p:nvPr/>
+        </p:nvSpPr>
+        <p:spPr>
+          <a:xfrm>
+            <a:off x="7248525" y="2819400"/>
+            <a:ext cx="76200" cy="76200"/>
+          </a:xfrm>
+          <a:prstGeom prst="ellipse">
+            <a:avLst/>
+          </a:prstGeom>
+          <a:solidFill>
+            <a:srgbClr val="D1D5DB"/>
+          </a:solidFill>
+          <a:ln>
+            <a:noFill/>
+          </a:ln>
+          <a:effectLst/>
+        </p:spPr>
+        <p:style>
+          <a:lnRef idx="1">
+            <a:schemeClr val="accent1"/>
+          </a:lnRef>
+          <a:fillRef idx="3">
+            <a:schemeClr val="accent1"/>
+          </a:fillRef>
+          <a:effectRef idx="2">
+            <a:schemeClr val="accent1"/>
+          </a:effectRef>
+          <a:fontRef idx="minor">
+            <a:schemeClr val="lt1"/>
+          </a:fontRef>
+        </p:style>
+        <p:txBody>
+          <a:bodyPr rtlCol="0" anchor="ctr"/>
+          <a:lstStyle/>
+          <a:p>
+            <a:pPr algn="ctr"/>
+          </a:p>
+        </p:txBody>
+      </p:sp>
+      <p:sp>
+        <p:nvSpPr>
+          <p:cNvPr id="25" name="lbl_8_s2"/>
+          <p:cNvSpPr txBox="1"/>
+          <p:nvPr/>
+        </p:nvSpPr>
+        <p:spPr>
+          <a:xfrm>
+            <a:off x="7000875" y="3009863"/>
+            <a:ext cx="571500" cy="150019"/>
+          </a:xfrm>
+          <a:prstGeom prst="rect">
+            <a:avLst/>
+          </a:prstGeom>
+          <a:noFill/>
+        </p:spPr>
+        <p:txBody>
+          <a:bodyPr wrap="square" lIns="0" rIns="0" tIns="0" bIns="0">
+            <a:spAutoFit/>
+          </a:bodyPr>
+          <a:lstStyle/>
+          <a:p>
+            <a:pPr algn="ctr"/>
+            <a:r>
+              <a:rPr sz="900" b="0">
+                <a:solidFill>
+                  <a:srgbClr val="9CA3AF"/>
+                </a:solidFill>
+                <a:latin typeface="Calibri"/>
+              </a:rPr>
+              <a:t>16.07.2026</a:t>
+            </a:r>
+          </a:p>
+        </p:txBody>
+      </p:sp>
+      <p:sp>
+        <p:nvSpPr>
+          <p:cNvPr id="26" name="!!tl_dot_9"/>
+          <p:cNvSpPr/>
+          <p:nvPr/>
+        </p:nvSpPr>
+        <p:spPr>
+          <a:xfrm>
+            <a:off x="8153400" y="2819400"/>
+            <a:ext cx="76200" cy="76200"/>
+          </a:xfrm>
+          <a:prstGeom prst="ellipse">
+            <a:avLst/>
+          </a:prstGeom>
+          <a:solidFill>
+            <a:srgbClr val="D1D5DB"/>
+          </a:solidFill>
+          <a:ln>
+            <a:noFill/>
+          </a:ln>
+          <a:effectLst/>
+        </p:spPr>
+        <p:style>
+          <a:lnRef idx="1">
+            <a:schemeClr val="accent1"/>
+          </a:lnRef>
+          <a:fillRef idx="3">
+            <a:schemeClr val="accent1"/>
+          </a:fillRef>
+          <a:effectRef idx="2">
+            <a:schemeClr val="accent1"/>
+          </a:effectRef>
+          <a:fontRef idx="minor">
+            <a:schemeClr val="lt1"/>
+          </a:fontRef>
+        </p:style>
+        <p:txBody>
+          <a:bodyPr rtlCol="0" anchor="ctr"/>
+          <a:lstStyle/>
+          <a:p>
+            <a:pPr algn="ctr"/>
+          </a:p>
+        </p:txBody>
+      </p:sp>
+      <p:sp>
+        <p:nvSpPr>
+          <p:cNvPr id="27" name="lbl_9_s2"/>
+          <p:cNvSpPr txBox="1"/>
+          <p:nvPr/>
+        </p:nvSpPr>
+        <p:spPr>
+          <a:xfrm>
+            <a:off x="7905750" y="3009863"/>
+            <a:ext cx="571500" cy="150019"/>
+          </a:xfrm>
+          <a:prstGeom prst="rect">
+            <a:avLst/>
+          </a:prstGeom>
+          <a:noFill/>
+        </p:spPr>
+        <p:txBody>
+          <a:bodyPr wrap="square" lIns="0" rIns="0" tIns="0" bIns="0">
+            <a:spAutoFit/>
+          </a:bodyPr>
+          <a:lstStyle/>
+          <a:p>
+            <a:pPr algn="ctr"/>
+            <a:r>
+              <a:rPr sz="900" b="0">
+                <a:solidFill>
+                  <a:srgbClr val="9CA3AF"/>
+                </a:solidFill>
+                <a:latin typeface="Calibri"/>
+              </a:rPr>
+              <a:t>20.07.2026</a:t>
+            </a:r>
+          </a:p>
+        </p:txBody>
+      </p:sp>
+    </p:spTree>
+  </p:cSld>
+  <p:clrMapOvr>
+    <a:masterClrMapping/>
+  </p:clrMapOvr>
+  <mc:AlternateContent xmlns:mc="http://schemas.openxmlformats.org/markup-compatibility/2006">
+    <mc:Choice xmlns:p159="http://schemas.microsoft.com/office/powerpoint/2015/09/main" Requires="p159">
+      <p:transition spd="slow">
+        <p159:morph option="byObject"/>
+      </p:transition>
+    </mc:Choice>
+    <mc:Fallback>
+      <p:transition spd="slow">
+        <p:fade/>
+      </p:transition>
+    </mc:Fallback>
+  </mc:AlternateContent>
+</p:sld>
+</file>
+
+<file path=ppt/slides/slide17.xml><?xml version="1.0" encoding="utf-8"?>
+<p:sld xmlns:a="http://schemas.openxmlformats.org/drawingml/2006/main" xmlns:p="http://schemas.openxmlformats.org/presentationml/2006/main" xmlns:r="http://schemas.openxmlformats.org/officeDocument/2006/relationships">
+  <p:cSld>
+    <p:spTree>
+      <p:nvGrpSpPr>
+        <p:cNvPr id="1" name=""/>
+        <p:cNvGrpSpPr/>
+        <p:nvPr/>
+      </p:nvGrpSpPr>
+      <p:grpSpPr/>
+      <p:sp>
+        <p:nvSpPr>
+          <p:cNvPr id="2" name="title_m3"/>
+          <p:cNvSpPr txBox="1"/>
+          <p:nvPr/>
+        </p:nvSpPr>
+        <p:spPr>
+          <a:xfrm>
+            <a:off x="457200" y="87474"/>
+            <a:ext cx="8458200" cy="769776"/>
+          </a:xfrm>
+          <a:prstGeom prst="rect">
+            <a:avLst/>
+          </a:prstGeom>
+          <a:noFill/>
+        </p:spPr>
+        <p:txBody>
+          <a:bodyPr wrap="square" lIns="0" rIns="0" tIns="0" bIns="0" anchor="b">
+            <a:spAutoFit/>
+          </a:bodyPr>
+          <a:lstStyle/>
+          <a:p>
+            <a:pPr algn="l"/>
+            <a:r>
+              <a:rPr sz="1800" b="0">
+                <a:solidFill>
+                  <a:srgbClr val="808080"/>
+                </a:solidFill>
+                <a:latin typeface="Calibri"/>
+              </a:rPr>
+              <a:t>FL-Trilemma: Project Timeline</a:t>
+            </a:r>
+          </a:p>
+        </p:txBody>
+      </p:sp>
+      <p:cxnSp>
+        <p:nvCxnSpPr>
+          <p:cNvPr id="4" name="divider_m3"/>
+          <p:cNvCxnSpPr/>
+          <p:nvPr/>
+        </p:nvCxnSpPr>
+        <p:spPr>
+          <a:xfrm>
+            <a:off x="571500" y="952500"/>
+            <a:ext cx="8001000" cy="0"/>
+          </a:xfrm>
+          <a:prstGeom prst="line">
+            <a:avLst/>
+          </a:prstGeom>
+          <a:ln w="9525">
+            <a:solidFill>
+              <a:srgbClr val="B3B3B3"/>
+            </a:solidFill>
+          </a:ln>
+          <a:effectLst/>
+        </p:spPr>
+        <p:style>
+          <a:lnRef idx="2">
+            <a:schemeClr val="accent1"/>
+          </a:lnRef>
+          <a:fillRef idx="0">
+            <a:schemeClr val="accent1"/>
+          </a:fillRef>
+          <a:effectRef idx="1">
+            <a:schemeClr val="accent1"/>
+          </a:effectRef>
+          <a:fontRef idx="minor">
+            <a:schemeClr val="tx1"/>
+          </a:fontRef>
+        </p:style>
+      </p:cxnSp>
+      <p:sp>
+        <p:nvSpPr>
+          <p:cNvPr id="5" name="content_pill_m3"/>
+          <p:cNvSpPr/>
+          <p:nvPr/>
+        </p:nvSpPr>
+        <p:spPr>
+          <a:xfrm>
+            <a:off x="762000" y="3333750"/>
+            <a:ext cx="825000" cy="188082"/>
+          </a:xfrm>
+          <a:prstGeom prst="roundRect">
+            <a:avLst>
+              <a:gd name="adj" fmla="val 50000"/>
+            </a:avLst>
+          </a:prstGeom>
+          <a:solidFill>
+            <a:srgbClr val="C9E1FF"/>
+          </a:solidFill>
+          <a:ln>
+            <a:noFill/>
+          </a:ln>
+          <a:effectLst/>
+        </p:spPr>
+        <p:style>
+          <a:lnRef idx="1">
+            <a:schemeClr val="accent1"/>
+          </a:lnRef>
+          <a:fillRef idx="3">
+            <a:schemeClr val="accent1"/>
+          </a:fillRef>
+          <a:effectRef idx="2">
+            <a:schemeClr val="accent1"/>
+          </a:effectRef>
+          <a:fontRef idx="minor">
+            <a:schemeClr val="lt1"/>
+          </a:fontRef>
+        </p:style>
+        <p:txBody>
+          <a:bodyPr rtlCol="0" anchor="ctr" lIns="60000" rIns="60000" tIns="0" bIns="0" wrap="none"/>
+          <a:lstStyle/>
+          <a:p>
+            <a:pPr algn="ctr"/>
+            <a:r>
+              <a:rPr sz="900" b="1">
+                <a:solidFill>
+                  <a:srgbClr val="325786"/>
+                </a:solidFill>
+                <a:latin typeface="Calibri"/>
+              </a:rPr>
+              <a:t>~21.05.2026</a:t>
+            </a:r>
+          </a:p>
+        </p:txBody>
+      </p:sp>
+      <p:sp>
+        <p:nvSpPr>
+          <p:cNvPr id="6" name="content_headline_m3"/>
+          <p:cNvSpPr txBox="1"/>
+          <p:nvPr/>
+        </p:nvSpPr>
+        <p:spPr>
+          <a:xfrm>
+            <a:off x="762000" y="3607501"/>
+            <a:ext cx="5762625" cy="239316"/>
+          </a:xfrm>
+          <a:prstGeom prst="rect">
+            <a:avLst/>
+          </a:prstGeom>
+          <a:noFill/>
+        </p:spPr>
+        <p:txBody>
+          <a:bodyPr wrap="square" lIns="0" rIns="0" tIns="0" bIns="0">
+            <a:spAutoFit/>
+          </a:bodyPr>
+          <a:lstStyle/>
+          <a:p>
+            <a:pPr algn="l"/>
+            <a:r>
+              <a:rPr sz="1500" b="1">
+                <a:solidFill>
+                  <a:srgbClr val="1F2023"/>
+                </a:solidFill>
+                <a:latin typeface="Calibri"/>
+              </a:rPr>
+              <a:t>Lock-in: FL Trilemma</a:t>
+            </a:r>
+          </a:p>
+        </p:txBody>
+      </p:sp>
+      <p:sp>
+        <p:nvSpPr>
+          <p:cNvPr id="7" name="content_bullets_m3"/>
+          <p:cNvSpPr txBox="1"/>
+          <p:nvPr/>
+        </p:nvSpPr>
+        <p:spPr>
+          <a:xfrm>
+            <a:off x="762000" y="3884880"/>
+            <a:ext cx="5762625" cy="376163"/>
+          </a:xfrm>
+          <a:prstGeom prst="rect">
+            <a:avLst/>
+          </a:prstGeom>
+          <a:noFill/>
+        </p:spPr>
+        <p:txBody>
+          <a:bodyPr wrap="square" lIns="0" rIns="0" tIns="0" bIns="0">
+            <a:spAutoFit/>
+          </a:bodyPr>
+          <a:lstStyle/>
+          <a:p>
+            <a:pPr>
+              <a:spcAft>
+                <a:spcPts val="600"/>
+              </a:spcAft>
+            </a:pPr>
+            <a:r>
+              <a:rPr sz="1050" b="1">
+                <a:solidFill>
+                  <a:srgbClr val="C1212A"/>
+                </a:solidFill>
+                <a:latin typeface="Calibri"/>
+              </a:rPr>
+              <a:t>-  </a:t>
+            </a:r>
+            <a:r>
+              <a:rPr sz="1050">
+                <a:solidFill>
+                  <a:srgbClr val="325786"/>
+                </a:solidFill>
+                <a:latin typeface="Calibri"/>
+              </a:rPr>
+              <a:t>Theoretical understanding of the problem space</a:t>
+            </a:r>
+          </a:p>
+          <a:p>
+            <a:pPr>
+              <a:spcAft>
+                <a:spcPts val="600"/>
+              </a:spcAft>
+            </a:pPr>
+            <a:r>
+              <a:rPr sz="1050" b="1">
+                <a:solidFill>
+                  <a:srgbClr val="C1212A"/>
+                </a:solidFill>
+                <a:latin typeface="Calibri"/>
+              </a:rPr>
+              <a:t>-  </a:t>
+            </a:r>
+            <a:r>
+              <a:rPr sz="1050">
+                <a:solidFill>
+                  <a:srgbClr val="325786"/>
+                </a:solidFill>
+                <a:latin typeface="Calibri"/>
+              </a:rPr>
+              <a:t>Robust aggregation landscape reviewed: FLTrust, Krum, Trimmed Mean</a:t>
+            </a:r>
+          </a:p>
+        </p:txBody>
+      </p:sp>
+      <p:sp>
+        <p:nvSpPr>
+          <p:cNvPr id="8" name="!!tl_track"/>
+          <p:cNvSpPr/>
+          <p:nvPr/>
+        </p:nvSpPr>
+        <p:spPr>
+          <a:xfrm>
+            <a:off x="952500" y="2847919"/>
+            <a:ext cx="7239000" cy="18976"/>
+          </a:xfrm>
+          <a:prstGeom prst="roundRect">
+            <a:avLst>
+              <a:gd name="adj" fmla="val 50000"/>
+            </a:avLst>
+          </a:prstGeom>
+          <a:solidFill>
+            <a:srgbClr val="E2E2E2"/>
+          </a:solidFill>
+          <a:ln>
+            <a:noFill/>
+          </a:ln>
+          <a:effectLst/>
+        </p:spPr>
+        <p:style>
+          <a:lnRef idx="1">
+            <a:schemeClr val="accent1"/>
+          </a:lnRef>
+          <a:fillRef idx="3">
+            <a:schemeClr val="accent1"/>
+          </a:fillRef>
+          <a:effectRef idx="2">
+            <a:schemeClr val="accent1"/>
+          </a:effectRef>
+          <a:fontRef idx="minor">
+            <a:schemeClr val="lt1"/>
+          </a:fontRef>
+        </p:style>
+        <p:txBody>
+          <a:bodyPr rtlCol="0" anchor="ctr"/>
+          <a:lstStyle/>
+          <a:p>
+            <a:pPr algn="ctr"/>
+          </a:p>
+        </p:txBody>
+      </p:sp>
+      <p:sp>
+        <p:nvSpPr>
+          <p:cNvPr id="9" name="!!tl_fill"/>
+          <p:cNvSpPr/>
+          <p:nvPr/>
+        </p:nvSpPr>
+        <p:spPr>
+          <a:xfrm>
+            <a:off x="952500" y="2847919"/>
+            <a:ext cx="2714625" cy="18976"/>
+          </a:xfrm>
+          <a:prstGeom prst="roundRect">
+            <a:avLst>
+              <a:gd name="adj" fmla="val 50000"/>
+            </a:avLst>
+          </a:prstGeom>
+          <a:solidFill>
+            <a:srgbClr val="325786"/>
+          </a:solidFill>
+          <a:ln>
+            <a:noFill/>
+          </a:ln>
+          <a:effectLst/>
+        </p:spPr>
+        <p:style>
+          <a:lnRef idx="1">
+            <a:schemeClr val="accent1"/>
+          </a:lnRef>
+          <a:fillRef idx="3">
+            <a:schemeClr val="accent1"/>
+          </a:fillRef>
+          <a:effectRef idx="2">
+            <a:schemeClr val="accent1"/>
+          </a:effectRef>
+          <a:fontRef idx="minor">
+            <a:schemeClr val="lt1"/>
+          </a:fontRef>
+        </p:style>
+        <p:txBody>
+          <a:bodyPr rtlCol="0" anchor="ctr"/>
+          <a:lstStyle/>
+          <a:p>
+            <a:pPr algn="ctr"/>
+          </a:p>
+        </p:txBody>
+      </p:sp>
+      <p:sp>
+        <p:nvSpPr>
+          <p:cNvPr id="10" name="!!tl_dot_1"/>
+          <p:cNvSpPr/>
+          <p:nvPr/>
+        </p:nvSpPr>
+        <p:spPr>
+          <a:xfrm>
+            <a:off x="914400" y="2819400"/>
+            <a:ext cx="76200" cy="76200"/>
+          </a:xfrm>
+          <a:prstGeom prst="ellipse">
+            <a:avLst/>
+          </a:prstGeom>
+          <a:solidFill>
+            <a:srgbClr val="D1D5DB"/>
+          </a:solidFill>
+          <a:ln>
+            <a:noFill/>
+          </a:ln>
+          <a:effectLst/>
+        </p:spPr>
+        <p:style>
+          <a:lnRef idx="1">
+            <a:schemeClr val="accent1"/>
+          </a:lnRef>
+          <a:fillRef idx="3">
+            <a:schemeClr val="accent1"/>
+          </a:fillRef>
+          <a:effectRef idx="2">
+            <a:schemeClr val="accent1"/>
+          </a:effectRef>
+          <a:fontRef idx="minor">
+            <a:schemeClr val="lt1"/>
+          </a:fontRef>
+        </p:style>
+        <p:txBody>
+          <a:bodyPr rtlCol="0" anchor="ctr"/>
+          <a:lstStyle/>
+          <a:p>
+            <a:pPr algn="ctr"/>
+          </a:p>
+        </p:txBody>
+      </p:sp>
+      <p:sp>
+        <p:nvSpPr>
+          <p:cNvPr id="11" name="lbl_1_s3"/>
+          <p:cNvSpPr txBox="1"/>
+          <p:nvPr/>
+        </p:nvSpPr>
+        <p:spPr>
+          <a:xfrm>
+            <a:off x="666750" y="3009863"/>
+            <a:ext cx="571500" cy="150019"/>
+          </a:xfrm>
+          <a:prstGeom prst="rect">
+            <a:avLst/>
+          </a:prstGeom>
+          <a:noFill/>
+        </p:spPr>
+        <p:txBody>
+          <a:bodyPr wrap="square" lIns="0" rIns="0" tIns="0" bIns="0">
+            <a:spAutoFit/>
+          </a:bodyPr>
+          <a:lstStyle/>
+          <a:p>
+            <a:pPr algn="ctr"/>
+            <a:r>
+              <a:rPr sz="900" b="0">
+                <a:solidFill>
+                  <a:srgbClr val="9CA3AF"/>
+                </a:solidFill>
+                <a:latin typeface="Calibri"/>
+              </a:rPr>
+              <a:t>09.04.2026</a:t>
+            </a:r>
+          </a:p>
+        </p:txBody>
+      </p:sp>
+      <p:sp>
+        <p:nvSpPr>
+          <p:cNvPr id="12" name="!!tl_dot_2"/>
+          <p:cNvSpPr/>
+          <p:nvPr/>
+        </p:nvSpPr>
+        <p:spPr>
+          <a:xfrm>
+            <a:off x="1819275" y="2819400"/>
+            <a:ext cx="76200" cy="76200"/>
+          </a:xfrm>
+          <a:prstGeom prst="ellipse">
+            <a:avLst/>
+          </a:prstGeom>
+          <a:solidFill>
+            <a:srgbClr val="D1D5DB"/>
+          </a:solidFill>
+          <a:ln>
+            <a:noFill/>
+          </a:ln>
+          <a:effectLst/>
+        </p:spPr>
+        <p:style>
+          <a:lnRef idx="1">
+            <a:schemeClr val="accent1"/>
+          </a:lnRef>
+          <a:fillRef idx="3">
+            <a:schemeClr val="accent1"/>
+          </a:fillRef>
+          <a:effectRef idx="2">
+            <a:schemeClr val="accent1"/>
+          </a:effectRef>
+          <a:fontRef idx="minor">
+            <a:schemeClr val="lt1"/>
+          </a:fontRef>
+        </p:style>
+        <p:txBody>
+          <a:bodyPr rtlCol="0" anchor="ctr"/>
+          <a:lstStyle/>
+          <a:p>
+            <a:pPr algn="ctr"/>
+          </a:p>
+        </p:txBody>
+      </p:sp>
+      <p:sp>
+        <p:nvSpPr>
+          <p:cNvPr id="13" name="lbl_2_s3"/>
+          <p:cNvSpPr txBox="1"/>
+          <p:nvPr/>
+        </p:nvSpPr>
+        <p:spPr>
+          <a:xfrm>
+            <a:off x="1571625" y="3009863"/>
+            <a:ext cx="571500" cy="150019"/>
+          </a:xfrm>
+          <a:prstGeom prst="rect">
+            <a:avLst/>
+          </a:prstGeom>
+          <a:noFill/>
+        </p:spPr>
+        <p:txBody>
+          <a:bodyPr wrap="square" lIns="0" rIns="0" tIns="0" bIns="0">
+            <a:spAutoFit/>
+          </a:bodyPr>
+          <a:lstStyle/>
+          <a:p>
+            <a:pPr algn="ctr"/>
+            <a:r>
+              <a:rPr sz="900" b="0">
+                <a:solidFill>
+                  <a:srgbClr val="9CA3AF"/>
+                </a:solidFill>
+                <a:latin typeface="Calibri"/>
+              </a:rPr>
+              <a:t>16.04.2026</a:t>
+            </a:r>
+          </a:p>
+        </p:txBody>
+      </p:sp>
+      <p:sp>
+        <p:nvSpPr>
+          <p:cNvPr id="14" name="!!tl_dot_3"/>
+          <p:cNvSpPr/>
+          <p:nvPr/>
+        </p:nvSpPr>
+        <p:spPr>
+          <a:xfrm>
+            <a:off x="2724150" y="2819400"/>
+            <a:ext cx="76200" cy="76200"/>
+          </a:xfrm>
+          <a:prstGeom prst="ellipse">
+            <a:avLst/>
+          </a:prstGeom>
+          <a:solidFill>
+            <a:srgbClr val="D1D5DB"/>
+          </a:solidFill>
+          <a:ln>
+            <a:noFill/>
+          </a:ln>
+          <a:effectLst/>
+        </p:spPr>
+        <p:style>
+          <a:lnRef idx="1">
+            <a:schemeClr val="accent1"/>
+          </a:lnRef>
+          <a:fillRef idx="3">
+            <a:schemeClr val="accent1"/>
+          </a:fillRef>
+          <a:effectRef idx="2">
+            <a:schemeClr val="accent1"/>
+          </a:effectRef>
+          <a:fontRef idx="minor">
+            <a:schemeClr val="lt1"/>
+          </a:fontRef>
+        </p:style>
+        <p:txBody>
+          <a:bodyPr rtlCol="0" anchor="ctr"/>
+          <a:lstStyle/>
+          <a:p>
+            <a:pPr algn="ctr"/>
+          </a:p>
+        </p:txBody>
+      </p:sp>
+      <p:sp>
+        <p:nvSpPr>
+          <p:cNvPr id="15" name="lbl_3_s3"/>
+          <p:cNvSpPr txBox="1"/>
+          <p:nvPr/>
+        </p:nvSpPr>
+        <p:spPr>
+          <a:xfrm>
+            <a:off x="2476500" y="3009863"/>
+            <a:ext cx="571500" cy="150019"/>
+          </a:xfrm>
+          <a:prstGeom prst="rect">
+            <a:avLst/>
+          </a:prstGeom>
+          <a:noFill/>
+        </p:spPr>
+        <p:txBody>
+          <a:bodyPr wrap="square" lIns="0" rIns="0" tIns="0" bIns="0">
+            <a:spAutoFit/>
+          </a:bodyPr>
+          <a:lstStyle/>
+          <a:p>
+            <a:pPr algn="ctr"/>
+            <a:r>
+              <a:rPr sz="900" b="0">
+                <a:solidFill>
+                  <a:srgbClr val="9CA3AF"/>
+                </a:solidFill>
+                <a:latin typeface="Calibri"/>
+              </a:rPr>
+              <a:t>30.04.2026</a:t>
+            </a:r>
+          </a:p>
+        </p:txBody>
+      </p:sp>
+      <p:sp>
+        <p:nvSpPr>
+          <p:cNvPr id="16" name="!!tl_dot_4"/>
+          <p:cNvSpPr/>
+          <p:nvPr/>
+        </p:nvSpPr>
+        <p:spPr>
+          <a:xfrm>
+            <a:off x="3600450" y="2790825"/>
+            <a:ext cx="133350" cy="133350"/>
+          </a:xfrm>
+          <a:prstGeom prst="ellipse">
+            <a:avLst/>
+          </a:prstGeom>
+          <a:solidFill>
+            <a:srgbClr val="325786"/>
+          </a:solidFill>
+          <a:ln>
+            <a:noFill/>
+          </a:ln>
+          <a:effectLst/>
+        </p:spPr>
+        <p:style>
+          <a:lnRef idx="1">
+            <a:schemeClr val="accent1"/>
+          </a:lnRef>
+          <a:fillRef idx="3">
+            <a:schemeClr val="accent1"/>
+          </a:fillRef>
+          <a:effectRef idx="2">
+            <a:schemeClr val="accent1"/>
+          </a:effectRef>
+          <a:fontRef idx="minor">
+            <a:schemeClr val="lt1"/>
+          </a:fontRef>
+        </p:style>
+        <p:txBody>
+          <a:bodyPr rtlCol="0" anchor="ctr"/>
+          <a:lstStyle/>
+          <a:p>
+            <a:pPr algn="ctr"/>
+          </a:p>
+        </p:txBody>
+      </p:sp>
+      <p:sp>
+        <p:nvSpPr>
+          <p:cNvPr id="17" name="lbl_4_s3"/>
+          <p:cNvSpPr txBox="1"/>
+          <p:nvPr/>
+        </p:nvSpPr>
+        <p:spPr>
+          <a:xfrm>
+            <a:off x="3381375" y="3009863"/>
+            <a:ext cx="571500" cy="150019"/>
+          </a:xfrm>
+          <a:prstGeom prst="rect">
+            <a:avLst/>
+          </a:prstGeom>
+          <a:noFill/>
+        </p:spPr>
+        <p:txBody>
+          <a:bodyPr wrap="square" lIns="0" rIns="0" tIns="0" bIns="0">
+            <a:spAutoFit/>
+          </a:bodyPr>
+          <a:lstStyle/>
+          <a:p>
+            <a:pPr algn="ctr"/>
+            <a:r>
+              <a:rPr sz="900" b="1">
+                <a:solidFill>
+                  <a:srgbClr val="1F2023"/>
+                </a:solidFill>
+                <a:latin typeface="Calibri"/>
+              </a:rPr>
+              <a:t>~21.05.2026</a:t>
+            </a:r>
+          </a:p>
+        </p:txBody>
+      </p:sp>
+      <p:sp>
+        <p:nvSpPr>
+          <p:cNvPr id="18" name="!!tl_dot_5"/>
+          <p:cNvSpPr/>
+          <p:nvPr/>
+        </p:nvSpPr>
+        <p:spPr>
+          <a:xfrm>
+            <a:off x="4533900" y="2819400"/>
+            <a:ext cx="76200" cy="76200"/>
+          </a:xfrm>
+          <a:prstGeom prst="ellipse">
+            <a:avLst/>
+          </a:prstGeom>
+          <a:solidFill>
+            <a:srgbClr val="D1D5DB"/>
+          </a:solidFill>
+          <a:ln>
+            <a:noFill/>
+          </a:ln>
+          <a:effectLst/>
+        </p:spPr>
+        <p:style>
+          <a:lnRef idx="1">
+            <a:schemeClr val="accent1"/>
+          </a:lnRef>
+          <a:fillRef idx="3">
+            <a:schemeClr val="accent1"/>
+          </a:fillRef>
+          <a:effectRef idx="2">
+            <a:schemeClr val="accent1"/>
+          </a:effectRef>
+          <a:fontRef idx="minor">
+            <a:schemeClr val="lt1"/>
+          </a:fontRef>
+        </p:style>
+        <p:txBody>
+          <a:bodyPr rtlCol="0" anchor="ctr"/>
+          <a:lstStyle/>
+          <a:p>
+            <a:pPr algn="ctr"/>
+          </a:p>
+        </p:txBody>
+      </p:sp>
+      <p:sp>
+        <p:nvSpPr>
+          <p:cNvPr id="19" name="lbl_5_s3"/>
+          <p:cNvSpPr txBox="1"/>
+          <p:nvPr/>
+        </p:nvSpPr>
+        <p:spPr>
+          <a:xfrm>
+            <a:off x="4286250" y="3009863"/>
+            <a:ext cx="571500" cy="150019"/>
+          </a:xfrm>
+          <a:prstGeom prst="rect">
+            <a:avLst/>
+          </a:prstGeom>
+          <a:noFill/>
+        </p:spPr>
+        <p:txBody>
+          <a:bodyPr wrap="square" lIns="0" rIns="0" tIns="0" bIns="0">
+            <a:spAutoFit/>
+          </a:bodyPr>
+          <a:lstStyle/>
+          <a:p>
+            <a:pPr algn="ctr"/>
+            <a:r>
+              <a:rPr sz="900" b="0">
+                <a:solidFill>
+                  <a:srgbClr val="9CA3AF"/>
+                </a:solidFill>
+                <a:latin typeface="Calibri"/>
+              </a:rPr>
+              <a:t>18.06.2026</a:t>
+            </a:r>
+          </a:p>
+        </p:txBody>
+      </p:sp>
+      <p:sp>
+        <p:nvSpPr>
+          <p:cNvPr id="20" name="!!tl_dot_6"/>
+          <p:cNvSpPr/>
+          <p:nvPr/>
+        </p:nvSpPr>
+        <p:spPr>
+          <a:xfrm>
+            <a:off x="5438775" y="2819400"/>
+            <a:ext cx="76200" cy="76200"/>
+          </a:xfrm>
+          <a:prstGeom prst="ellipse">
+            <a:avLst/>
+          </a:prstGeom>
+          <a:solidFill>
+            <a:srgbClr val="D1D5DB"/>
+          </a:solidFill>
+          <a:ln>
+            <a:noFill/>
+          </a:ln>
+          <a:effectLst/>
+        </p:spPr>
+        <p:style>
+          <a:lnRef idx="1">
+            <a:schemeClr val="accent1"/>
+          </a:lnRef>
+          <a:fillRef idx="3">
+            <a:schemeClr val="accent1"/>
+          </a:fillRef>
+          <a:effectRef idx="2">
+            <a:schemeClr val="accent1"/>
+          </a:effectRef>
+          <a:fontRef idx="minor">
+            <a:schemeClr val="lt1"/>
+          </a:fontRef>
+        </p:style>
+        <p:txBody>
+          <a:bodyPr rtlCol="0" anchor="ctr"/>
+          <a:lstStyle/>
+          <a:p>
+            <a:pPr algn="ctr"/>
+          </a:p>
+        </p:txBody>
+      </p:sp>
+      <p:sp>
+        <p:nvSpPr>
+          <p:cNvPr id="21" name="lbl_6_s3"/>
+          <p:cNvSpPr txBox="1"/>
+          <p:nvPr/>
+        </p:nvSpPr>
+        <p:spPr>
+          <a:xfrm>
+            <a:off x="5191125" y="3009863"/>
+            <a:ext cx="571500" cy="150019"/>
+          </a:xfrm>
+          <a:prstGeom prst="rect">
+            <a:avLst/>
+          </a:prstGeom>
+          <a:noFill/>
+        </p:spPr>
+        <p:txBody>
+          <a:bodyPr wrap="square" lIns="0" rIns="0" tIns="0" bIns="0">
+            <a:spAutoFit/>
+          </a:bodyPr>
+          <a:lstStyle/>
+          <a:p>
+            <a:pPr algn="ctr"/>
+            <a:r>
+              <a:rPr sz="900" b="0">
+                <a:solidFill>
+                  <a:srgbClr val="9CA3AF"/>
+                </a:solidFill>
+                <a:latin typeface="Calibri"/>
+              </a:rPr>
+              <a:t>25.06.2026</a:t>
+            </a:r>
+          </a:p>
+        </p:txBody>
+      </p:sp>
+      <p:sp>
+        <p:nvSpPr>
+          <p:cNvPr id="22" name="!!tl_dot_7"/>
+          <p:cNvSpPr/>
+          <p:nvPr/>
+        </p:nvSpPr>
+        <p:spPr>
+          <a:xfrm>
+            <a:off x="6343650" y="2819400"/>
+            <a:ext cx="76200" cy="76200"/>
+          </a:xfrm>
+          <a:prstGeom prst="ellipse">
+            <a:avLst/>
+          </a:prstGeom>
+          <a:solidFill>
+            <a:srgbClr val="D1D5DB"/>
+          </a:solidFill>
+          <a:ln>
+            <a:noFill/>
+          </a:ln>
+          <a:effectLst/>
+        </p:spPr>
+        <p:style>
+          <a:lnRef idx="1">
+            <a:schemeClr val="accent1"/>
+          </a:lnRef>
+          <a:fillRef idx="3">
+            <a:schemeClr val="accent1"/>
+          </a:fillRef>
+          <a:effectRef idx="2">
+            <a:schemeClr val="accent1"/>
+          </a:effectRef>
+          <a:fontRef idx="minor">
+            <a:schemeClr val="lt1"/>
+          </a:fontRef>
+        </p:style>
+        <p:txBody>
+          <a:bodyPr rtlCol="0" anchor="ctr"/>
+          <a:lstStyle/>
+          <a:p>
+            <a:pPr algn="ctr"/>
+          </a:p>
+        </p:txBody>
+      </p:sp>
+      <p:sp>
+        <p:nvSpPr>
+          <p:cNvPr id="23" name="lbl_7_s3"/>
+          <p:cNvSpPr txBox="1"/>
+          <p:nvPr/>
+        </p:nvSpPr>
+        <p:spPr>
+          <a:xfrm>
+            <a:off x="6096000" y="3009863"/>
+            <a:ext cx="571500" cy="150019"/>
+          </a:xfrm>
+          <a:prstGeom prst="rect">
+            <a:avLst/>
+          </a:prstGeom>
+          <a:noFill/>
+        </p:spPr>
+        <p:txBody>
+          <a:bodyPr wrap="square" lIns="0" rIns="0" tIns="0" bIns="0">
+            <a:spAutoFit/>
+          </a:bodyPr>
+          <a:lstStyle/>
+          <a:p>
+            <a:pPr algn="ctr"/>
+            <a:r>
+              <a:rPr sz="900" b="0">
+                <a:solidFill>
+                  <a:srgbClr val="9CA3AF"/>
+                </a:solidFill>
+                <a:latin typeface="Calibri"/>
+              </a:rPr>
+              <a:t>09.07.2026</a:t>
+            </a:r>
+          </a:p>
+        </p:txBody>
+      </p:sp>
+      <p:sp>
+        <p:nvSpPr>
+          <p:cNvPr id="24" name="!!tl_dot_8"/>
+          <p:cNvSpPr/>
+          <p:nvPr/>
+        </p:nvSpPr>
+        <p:spPr>
+          <a:xfrm>
+            <a:off x="7248525" y="2819400"/>
+            <a:ext cx="76200" cy="76200"/>
+          </a:xfrm>
+          <a:prstGeom prst="ellipse">
+            <a:avLst/>
+          </a:prstGeom>
+          <a:solidFill>
+            <a:srgbClr val="D1D5DB"/>
+          </a:solidFill>
+          <a:ln>
+            <a:noFill/>
+          </a:ln>
+          <a:effectLst/>
+        </p:spPr>
+        <p:style>
+          <a:lnRef idx="1">
+            <a:schemeClr val="accent1"/>
+          </a:lnRef>
+          <a:fillRef idx="3">
+            <a:schemeClr val="accent1"/>
+          </a:fillRef>
+          <a:effectRef idx="2">
+            <a:schemeClr val="accent1"/>
+          </a:effectRef>
+          <a:fontRef idx="minor">
+            <a:schemeClr val="lt1"/>
+          </a:fontRef>
+        </p:style>
+        <p:txBody>
+          <a:bodyPr rtlCol="0" anchor="ctr"/>
+          <a:lstStyle/>
+          <a:p>
+            <a:pPr algn="ctr"/>
+          </a:p>
+        </p:txBody>
+      </p:sp>
+      <p:sp>
+        <p:nvSpPr>
+          <p:cNvPr id="25" name="lbl_8_s3"/>
+          <p:cNvSpPr txBox="1"/>
+          <p:nvPr/>
+        </p:nvSpPr>
+        <p:spPr>
+          <a:xfrm>
+            <a:off x="7000875" y="3009863"/>
+            <a:ext cx="571500" cy="150019"/>
+          </a:xfrm>
+          <a:prstGeom prst="rect">
+            <a:avLst/>
+          </a:prstGeom>
+          <a:noFill/>
+        </p:spPr>
+        <p:txBody>
+          <a:bodyPr wrap="square" lIns="0" rIns="0" tIns="0" bIns="0">
+            <a:spAutoFit/>
+          </a:bodyPr>
+          <a:lstStyle/>
+          <a:p>
+            <a:pPr algn="ctr"/>
+            <a:r>
+              <a:rPr sz="900" b="0">
+                <a:solidFill>
+                  <a:srgbClr val="9CA3AF"/>
+                </a:solidFill>
+                <a:latin typeface="Calibri"/>
+              </a:rPr>
+              <a:t>16.07.2026</a:t>
+            </a:r>
+          </a:p>
+        </p:txBody>
+      </p:sp>
+      <p:sp>
+        <p:nvSpPr>
+          <p:cNvPr id="26" name="!!tl_dot_9"/>
+          <p:cNvSpPr/>
+          <p:nvPr/>
+        </p:nvSpPr>
+        <p:spPr>
+          <a:xfrm>
+            <a:off x="8153400" y="2819400"/>
+            <a:ext cx="76200" cy="76200"/>
+          </a:xfrm>
+          <a:prstGeom prst="ellipse">
+            <a:avLst/>
+          </a:prstGeom>
+          <a:solidFill>
+            <a:srgbClr val="D1D5DB"/>
+          </a:solidFill>
+          <a:ln>
+            <a:noFill/>
+          </a:ln>
+          <a:effectLst/>
+        </p:spPr>
+        <p:style>
+          <a:lnRef idx="1">
+            <a:schemeClr val="accent1"/>
+          </a:lnRef>
+          <a:fillRef idx="3">
+            <a:schemeClr val="accent1"/>
+          </a:fillRef>
+          <a:effectRef idx="2">
+            <a:schemeClr val="accent1"/>
+          </a:effectRef>
+          <a:fontRef idx="minor">
+            <a:schemeClr val="lt1"/>
+          </a:fontRef>
+        </p:style>
+        <p:txBody>
+          <a:bodyPr rtlCol="0" anchor="ctr"/>
+          <a:lstStyle/>
+          <a:p>
+            <a:pPr algn="ctr"/>
+          </a:p>
+        </p:txBody>
+      </p:sp>
+      <p:sp>
+        <p:nvSpPr>
+          <p:cNvPr id="27" name="lbl_9_s3"/>
+          <p:cNvSpPr txBox="1"/>
+          <p:nvPr/>
+        </p:nvSpPr>
+        <p:spPr>
+          <a:xfrm>
+            <a:off x="7905750" y="3009863"/>
+            <a:ext cx="571500" cy="150019"/>
+          </a:xfrm>
+          <a:prstGeom prst="rect">
+            <a:avLst/>
+          </a:prstGeom>
+          <a:noFill/>
+        </p:spPr>
+        <p:txBody>
+          <a:bodyPr wrap="square" lIns="0" rIns="0" tIns="0" bIns="0">
+            <a:spAutoFit/>
+          </a:bodyPr>
+          <a:lstStyle/>
+          <a:p>
+            <a:pPr algn="ctr"/>
+            <a:r>
+              <a:rPr sz="900" b="0">
+                <a:solidFill>
+                  <a:srgbClr val="9CA3AF"/>
+                </a:solidFill>
+                <a:latin typeface="Calibri"/>
+              </a:rPr>
+              <a:t>20.07.2026</a:t>
+            </a:r>
+          </a:p>
+        </p:txBody>
+      </p:sp>
+    </p:spTree>
+  </p:cSld>
+  <p:clrMapOvr>
+    <a:masterClrMapping/>
+  </p:clrMapOvr>
+  <mc:AlternateContent xmlns:mc="http://schemas.openxmlformats.org/markup-compatibility/2006">
+    <mc:Choice xmlns:p159="http://schemas.microsoft.com/office/powerpoint/2015/09/main" Requires="p159">
+      <p:transition spd="slow">
+        <p159:morph option="byObject"/>
+      </p:transition>
+    </mc:Choice>
+    <mc:Fallback>
+      <p:transition spd="slow">
+        <p:fade/>
+      </p:transition>
+    </mc:Fallback>
+  </mc:AlternateContent>
+</p:sld>
+</file>
+
+<file path=ppt/slides/slide18.xml><?xml version="1.0" encoding="utf-8"?>
+<p:sld xmlns:a="http://schemas.openxmlformats.org/drawingml/2006/main" xmlns:p="http://schemas.openxmlformats.org/presentationml/2006/main" xmlns:r="http://schemas.openxmlformats.org/officeDocument/2006/relationships">
+  <p:cSld>
+    <p:spTree>
+      <p:nvGrpSpPr>
+        <p:cNvPr id="1" name=""/>
+        <p:cNvGrpSpPr/>
+        <p:nvPr/>
+      </p:nvGrpSpPr>
+      <p:grpSpPr/>
+      <p:sp>
+        <p:nvSpPr>
+          <p:cNvPr id="2" name="title_m4"/>
+          <p:cNvSpPr txBox="1"/>
+          <p:nvPr/>
+        </p:nvSpPr>
+        <p:spPr>
+          <a:xfrm>
+            <a:off x="457200" y="87474"/>
+            <a:ext cx="8458200" cy="769776"/>
+          </a:xfrm>
+          <a:prstGeom prst="rect">
+            <a:avLst/>
+          </a:prstGeom>
+          <a:noFill/>
+        </p:spPr>
+        <p:txBody>
+          <a:bodyPr wrap="square" lIns="0" rIns="0" tIns="0" bIns="0" anchor="b">
+            <a:spAutoFit/>
+          </a:bodyPr>
+          <a:lstStyle/>
+          <a:p>
+            <a:pPr algn="l"/>
+            <a:r>
+              <a:rPr sz="1800" b="0">
+                <a:solidFill>
+                  <a:srgbClr val="808080"/>
+                </a:solidFill>
+                <a:latin typeface="Calibri"/>
+              </a:rPr>
+              <a:t>FL-Trilemma: Project Timeline</a:t>
+            </a:r>
+          </a:p>
+        </p:txBody>
+      </p:sp>
+      <p:cxnSp>
+        <p:nvCxnSpPr>
+          <p:cNvPr id="4" name="divider_m4"/>
+          <p:cNvCxnSpPr/>
+          <p:nvPr/>
+        </p:nvCxnSpPr>
+        <p:spPr>
+          <a:xfrm>
+            <a:off x="571500" y="952500"/>
+            <a:ext cx="8001000" cy="0"/>
+          </a:xfrm>
+          <a:prstGeom prst="line">
+            <a:avLst/>
+          </a:prstGeom>
+          <a:ln w="9525">
+            <a:solidFill>
+              <a:srgbClr val="B3B3B3"/>
+            </a:solidFill>
+          </a:ln>
+          <a:effectLst/>
+        </p:spPr>
+        <p:style>
+          <a:lnRef idx="2">
+            <a:schemeClr val="accent1"/>
+          </a:lnRef>
+          <a:fillRef idx="0">
+            <a:schemeClr val="accent1"/>
+          </a:fillRef>
+          <a:effectRef idx="1">
+            <a:schemeClr val="accent1"/>
+          </a:effectRef>
+          <a:fontRef idx="minor">
+            <a:schemeClr val="tx1"/>
+          </a:fontRef>
+        </p:style>
+      </p:cxnSp>
+      <p:sp>
+        <p:nvSpPr>
+          <p:cNvPr id="5" name="content_placeholder_m4"/>
+          <p:cNvSpPr/>
+          <p:nvPr/>
+        </p:nvSpPr>
+        <p:spPr>
+          <a:xfrm>
+            <a:off x="762000" y="1095375"/>
+            <a:ext cx="1619250" cy="1047750"/>
+          </a:xfrm>
+          <a:prstGeom prst="roundRect">
+            <a:avLst>
+              <a:gd name="adj" fmla="val 6000"/>
+            </a:avLst>
+          </a:prstGeom>
+          <a:solidFill>
+            <a:srgbClr val="EDEEF0"/>
+          </a:solidFill>
+          <a:ln w="9525">
+            <a:solidFill>
+              <a:srgbClr val="E5E7EB"/>
+            </a:solidFill>
+            <a:prstDash val="dash"/>
+          </a:ln>
+          <a:effectLst/>
+        </p:spPr>
+        <p:style>
+          <a:lnRef idx="1">
+            <a:schemeClr val="accent1"/>
+          </a:lnRef>
+          <a:fillRef idx="3">
+            <a:schemeClr val="accent1"/>
+          </a:fillRef>
+          <a:effectRef idx="2">
+            <a:schemeClr val="accent1"/>
+          </a:effectRef>
+          <a:fontRef idx="minor">
+            <a:schemeClr val="lt1"/>
+          </a:fontRef>
+        </p:style>
+        <p:txBody>
+          <a:bodyPr rtlCol="0" anchor="ctr" wrap="square" lIns="120000" rIns="120000"/>
+          <a:lstStyle/>
+          <a:p>
+            <a:pPr algn="ctr"/>
+            <a:r>
+              <a:rPr sz="550">
+                <a:solidFill>
+                  <a:srgbClr val="9CA3AF"/>
+                </a:solidFill>
+                <a:latin typeface="Consolas"/>
+              </a:rPr>
+              <a:t>INTERIM PRESENTATION 1 - SLIDES</a:t>
+            </a:r>
+          </a:p>
+        </p:txBody>
+      </p:sp>
+      <p:sp>
+        <p:nvSpPr>
+          <p:cNvPr id="6" name="content_pill_m4"/>
+          <p:cNvSpPr/>
+          <p:nvPr/>
+        </p:nvSpPr>
+        <p:spPr>
+          <a:xfrm>
+            <a:off x="2571750" y="1095375"/>
+            <a:ext cx="825000" cy="188082"/>
+          </a:xfrm>
+          <a:prstGeom prst="roundRect">
+            <a:avLst>
+              <a:gd name="adj" fmla="val 50000"/>
+            </a:avLst>
+          </a:prstGeom>
+          <a:solidFill>
+            <a:srgbClr val="C9E1FF"/>
+          </a:solidFill>
+          <a:ln>
+            <a:noFill/>
+          </a:ln>
+          <a:effectLst/>
+        </p:spPr>
+        <p:style>
+          <a:lnRef idx="1">
+            <a:schemeClr val="accent1"/>
+          </a:lnRef>
+          <a:fillRef idx="3">
+            <a:schemeClr val="accent1"/>
+          </a:fillRef>
+          <a:effectRef idx="2">
+            <a:schemeClr val="accent1"/>
+          </a:effectRef>
+          <a:fontRef idx="minor">
+            <a:schemeClr val="lt1"/>
+          </a:fontRef>
+        </p:style>
+        <p:txBody>
+          <a:bodyPr rtlCol="0" anchor="ctr" lIns="60000" rIns="60000" tIns="0" bIns="0" wrap="none"/>
+          <a:lstStyle/>
+          <a:p>
+            <a:pPr algn="ctr"/>
+            <a:r>
+              <a:rPr sz="900" b="1">
+                <a:solidFill>
+                  <a:srgbClr val="325786"/>
+                </a:solidFill>
+                <a:latin typeface="Calibri"/>
+              </a:rPr>
+              <a:t>18.06.2026</a:t>
+            </a:r>
+          </a:p>
+        </p:txBody>
+      </p:sp>
+      <p:sp>
+        <p:nvSpPr>
+          <p:cNvPr id="7" name="content_headline_m4"/>
+          <p:cNvSpPr txBox="1"/>
+          <p:nvPr/>
+        </p:nvSpPr>
+        <p:spPr>
+          <a:xfrm>
+            <a:off x="2571750" y="1369126"/>
+            <a:ext cx="5000625" cy="239316"/>
+          </a:xfrm>
+          <a:prstGeom prst="rect">
+            <a:avLst/>
+          </a:prstGeom>
+          <a:noFill/>
+        </p:spPr>
+        <p:txBody>
+          <a:bodyPr wrap="square" lIns="0" rIns="0" tIns="0" bIns="0">
+            <a:spAutoFit/>
+          </a:bodyPr>
+          <a:lstStyle/>
+          <a:p>
+            <a:pPr algn="l"/>
+            <a:r>
+              <a:rPr sz="1500" b="1">
+                <a:solidFill>
+                  <a:srgbClr val="1F2023"/>
+                </a:solidFill>
+                <a:latin typeface="Calibri"/>
+              </a:rPr>
+              <a:t>Interim Presentation 1</a:t>
+            </a:r>
+          </a:p>
+        </p:txBody>
+      </p:sp>
+      <p:sp>
+        <p:nvSpPr>
+          <p:cNvPr id="8" name="content_bullets_m4"/>
+          <p:cNvSpPr txBox="1"/>
+          <p:nvPr/>
+        </p:nvSpPr>
+        <p:spPr>
+          <a:xfrm>
+            <a:off x="2571750" y="1637017"/>
+            <a:ext cx="5000625" cy="188082"/>
+          </a:xfrm>
+          <a:prstGeom prst="rect">
+            <a:avLst/>
+          </a:prstGeom>
+          <a:noFill/>
+        </p:spPr>
+        <p:txBody>
+          <a:bodyPr wrap="square" lIns="0" rIns="0" tIns="0" bIns="0">
+            <a:spAutoFit/>
+          </a:bodyPr>
+          <a:lstStyle/>
+          <a:p>
+            <a:pPr>
+              <a:spcAft>
+                <a:spcPts val="600"/>
+              </a:spcAft>
+            </a:pPr>
+            <a:r>
+              <a:rPr sz="975" b="1">
+                <a:solidFill>
+                  <a:srgbClr val="C1212A"/>
+                </a:solidFill>
+                <a:latin typeface="Calibri"/>
+              </a:rPr>
+              <a:t>-  </a:t>
+            </a:r>
+            <a:r>
+              <a:rPr sz="975">
+                <a:solidFill>
+                  <a:srgbClr val="325786"/>
+                </a:solidFill>
+                <a:latin typeface="Calibri"/>
+              </a:rPr>
+              <a:t>First code foundation building up (MNIST, Flower)</a:t>
+            </a:r>
+          </a:p>
+        </p:txBody>
+      </p:sp>
+      <p:sp>
+        <p:nvSpPr>
+          <p:cNvPr id="9" name="!!tl_track"/>
+          <p:cNvSpPr/>
+          <p:nvPr/>
+        </p:nvSpPr>
+        <p:spPr>
+          <a:xfrm>
+            <a:off x="952500" y="2847919"/>
+            <a:ext cx="7239000" cy="18976"/>
+          </a:xfrm>
+          <a:prstGeom prst="roundRect">
+            <a:avLst>
+              <a:gd name="adj" fmla="val 50000"/>
+            </a:avLst>
+          </a:prstGeom>
+          <a:solidFill>
+            <a:srgbClr val="E2E2E2"/>
+          </a:solidFill>
+          <a:ln>
+            <a:noFill/>
+          </a:ln>
+          <a:effectLst/>
+        </p:spPr>
+        <p:style>
+          <a:lnRef idx="1">
+            <a:schemeClr val="accent1"/>
+          </a:lnRef>
+          <a:fillRef idx="3">
+            <a:schemeClr val="accent1"/>
+          </a:fillRef>
+          <a:effectRef idx="2">
+            <a:schemeClr val="accent1"/>
+          </a:effectRef>
+          <a:fontRef idx="minor">
+            <a:schemeClr val="lt1"/>
+          </a:fontRef>
+        </p:style>
+        <p:txBody>
+          <a:bodyPr rtlCol="0" anchor="ctr"/>
+          <a:lstStyle/>
+          <a:p>
+            <a:pPr algn="ctr"/>
+          </a:p>
+        </p:txBody>
+      </p:sp>
+      <p:sp>
+        <p:nvSpPr>
+          <p:cNvPr id="10" name="!!tl_fill"/>
+          <p:cNvSpPr/>
+          <p:nvPr/>
+        </p:nvSpPr>
+        <p:spPr>
+          <a:xfrm>
+            <a:off x="952500" y="2847919"/>
+            <a:ext cx="3619500" cy="18976"/>
+          </a:xfrm>
+          <a:prstGeom prst="roundRect">
+            <a:avLst>
+              <a:gd name="adj" fmla="val 50000"/>
+            </a:avLst>
+          </a:prstGeom>
+          <a:solidFill>
+            <a:srgbClr val="325786"/>
+          </a:solidFill>
+          <a:ln>
+            <a:noFill/>
+          </a:ln>
+          <a:effectLst/>
+        </p:spPr>
+        <p:style>
+          <a:lnRef idx="1">
+            <a:schemeClr val="accent1"/>
+          </a:lnRef>
+          <a:fillRef idx="3">
+            <a:schemeClr val="accent1"/>
+          </a:fillRef>
+          <a:effectRef idx="2">
+            <a:schemeClr val="accent1"/>
+          </a:effectRef>
+          <a:fontRef idx="minor">
+            <a:schemeClr val="lt1"/>
+          </a:fontRef>
+        </p:style>
+        <p:txBody>
+          <a:bodyPr rtlCol="0" anchor="ctr"/>
+          <a:lstStyle/>
+          <a:p>
+            <a:pPr algn="ctr"/>
+          </a:p>
+        </p:txBody>
+      </p:sp>
+      <p:sp>
+        <p:nvSpPr>
+          <p:cNvPr id="11" name="!!tl_dot_1"/>
+          <p:cNvSpPr/>
+          <p:nvPr/>
+        </p:nvSpPr>
+        <p:spPr>
+          <a:xfrm>
+            <a:off x="914400" y="2819400"/>
+            <a:ext cx="76200" cy="76200"/>
+          </a:xfrm>
+          <a:prstGeom prst="ellipse">
+            <a:avLst/>
+          </a:prstGeom>
+          <a:solidFill>
+            <a:srgbClr val="D1D5DB"/>
+          </a:solidFill>
+          <a:ln>
+            <a:noFill/>
+          </a:ln>
+          <a:effectLst/>
+        </p:spPr>
+        <p:style>
+          <a:lnRef idx="1">
+            <a:schemeClr val="accent1"/>
+          </a:lnRef>
+          <a:fillRef idx="3">
+            <a:schemeClr val="accent1"/>
+          </a:fillRef>
+          <a:effectRef idx="2">
+            <a:schemeClr val="accent1"/>
+          </a:effectRef>
+          <a:fontRef idx="minor">
+            <a:schemeClr val="lt1"/>
+          </a:fontRef>
+        </p:style>
+        <p:txBody>
+          <a:bodyPr rtlCol="0" anchor="ctr"/>
+          <a:lstStyle/>
+          <a:p>
+            <a:pPr algn="ctr"/>
+          </a:p>
+        </p:txBody>
+      </p:sp>
+      <p:sp>
+        <p:nvSpPr>
+          <p:cNvPr id="12" name="lbl_1_s4"/>
+          <p:cNvSpPr txBox="1"/>
+          <p:nvPr/>
+        </p:nvSpPr>
+        <p:spPr>
+          <a:xfrm>
+            <a:off x="666750" y="3009863"/>
+            <a:ext cx="571500" cy="150019"/>
+          </a:xfrm>
+          <a:prstGeom prst="rect">
+            <a:avLst/>
+          </a:prstGeom>
+          <a:noFill/>
+        </p:spPr>
+        <p:txBody>
+          <a:bodyPr wrap="square" lIns="0" rIns="0" tIns="0" bIns="0">
+            <a:spAutoFit/>
+          </a:bodyPr>
+          <a:lstStyle/>
+          <a:p>
+            <a:pPr algn="ctr"/>
+            <a:r>
+              <a:rPr sz="900" b="0">
+                <a:solidFill>
+                  <a:srgbClr val="9CA3AF"/>
+                </a:solidFill>
+                <a:latin typeface="Calibri"/>
+              </a:rPr>
+              <a:t>09.04.2026</a:t>
+            </a:r>
+          </a:p>
+        </p:txBody>
+      </p:sp>
+      <p:sp>
+        <p:nvSpPr>
+          <p:cNvPr id="13" name="!!tl_dot_2"/>
+          <p:cNvSpPr/>
+          <p:nvPr/>
+        </p:nvSpPr>
+        <p:spPr>
+          <a:xfrm>
+            <a:off x="1819275" y="2819400"/>
+            <a:ext cx="76200" cy="76200"/>
+          </a:xfrm>
+          <a:prstGeom prst="ellipse">
+            <a:avLst/>
+          </a:prstGeom>
+          <a:solidFill>
+            <a:srgbClr val="D1D5DB"/>
+          </a:solidFill>
+          <a:ln>
+            <a:noFill/>
+          </a:ln>
+          <a:effectLst/>
+        </p:spPr>
+        <p:style>
+          <a:lnRef idx="1">
+            <a:schemeClr val="accent1"/>
+          </a:lnRef>
+          <a:fillRef idx="3">
+            <a:schemeClr val="accent1"/>
+          </a:fillRef>
+          <a:effectRef idx="2">
+            <a:schemeClr val="accent1"/>
+          </a:effectRef>
+          <a:fontRef idx="minor">
+            <a:schemeClr val="lt1"/>
+          </a:fontRef>
+        </p:style>
+        <p:txBody>
+          <a:bodyPr rtlCol="0" anchor="ctr"/>
+          <a:lstStyle/>
+          <a:p>
+            <a:pPr algn="ctr"/>
+          </a:p>
+        </p:txBody>
+      </p:sp>
+      <p:sp>
+        <p:nvSpPr>
+          <p:cNvPr id="14" name="lbl_2_s4"/>
+          <p:cNvSpPr txBox="1"/>
+          <p:nvPr/>
+        </p:nvSpPr>
+        <p:spPr>
+          <a:xfrm>
+            <a:off x="1571625" y="3009863"/>
+            <a:ext cx="571500" cy="150019"/>
+          </a:xfrm>
+          <a:prstGeom prst="rect">
+            <a:avLst/>
+          </a:prstGeom>
+          <a:noFill/>
+        </p:spPr>
+        <p:txBody>
+          <a:bodyPr wrap="square" lIns="0" rIns="0" tIns="0" bIns="0">
+            <a:spAutoFit/>
+          </a:bodyPr>
+          <a:lstStyle/>
+          <a:p>
+            <a:pPr algn="ctr"/>
+            <a:r>
+              <a:rPr sz="900" b="0">
+                <a:solidFill>
+                  <a:srgbClr val="9CA3AF"/>
+                </a:solidFill>
+                <a:latin typeface="Calibri"/>
+              </a:rPr>
+              <a:t>16.04.2026</a:t>
+            </a:r>
+          </a:p>
+        </p:txBody>
+      </p:sp>
+      <p:sp>
+        <p:nvSpPr>
+          <p:cNvPr id="15" name="!!tl_dot_3"/>
+          <p:cNvSpPr/>
+          <p:nvPr/>
+        </p:nvSpPr>
+        <p:spPr>
+          <a:xfrm>
+            <a:off x="2724150" y="2819400"/>
+            <a:ext cx="76200" cy="76200"/>
+          </a:xfrm>
+          <a:prstGeom prst="ellipse">
+            <a:avLst/>
+          </a:prstGeom>
+          <a:solidFill>
+            <a:srgbClr val="D1D5DB"/>
+          </a:solidFill>
+          <a:ln>
+            <a:noFill/>
+          </a:ln>
+          <a:effectLst/>
+        </p:spPr>
+        <p:style>
+          <a:lnRef idx="1">
+            <a:schemeClr val="accent1"/>
+          </a:lnRef>
+          <a:fillRef idx="3">
+            <a:schemeClr val="accent1"/>
+          </a:fillRef>
+          <a:effectRef idx="2">
+            <a:schemeClr val="accent1"/>
+          </a:effectRef>
+          <a:fontRef idx="minor">
+            <a:schemeClr val="lt1"/>
+          </a:fontRef>
+        </p:style>
+        <p:txBody>
+          <a:bodyPr rtlCol="0" anchor="ctr"/>
+          <a:lstStyle/>
+          <a:p>
+            <a:pPr algn="ctr"/>
+          </a:p>
+        </p:txBody>
+      </p:sp>
+      <p:sp>
+        <p:nvSpPr>
+          <p:cNvPr id="16" name="lbl_3_s4"/>
+          <p:cNvSpPr txBox="1"/>
+          <p:nvPr/>
+        </p:nvSpPr>
+        <p:spPr>
+          <a:xfrm>
+            <a:off x="2476500" y="3009863"/>
+            <a:ext cx="571500" cy="150019"/>
+          </a:xfrm>
+          <a:prstGeom prst="rect">
+            <a:avLst/>
+          </a:prstGeom>
+          <a:noFill/>
+        </p:spPr>
+        <p:txBody>
+          <a:bodyPr wrap="square" lIns="0" rIns="0" tIns="0" bIns="0">
+            <a:spAutoFit/>
+          </a:bodyPr>
+          <a:lstStyle/>
+          <a:p>
+            <a:pPr algn="ctr"/>
+            <a:r>
+              <a:rPr sz="900" b="0">
+                <a:solidFill>
+                  <a:srgbClr val="9CA3AF"/>
+                </a:solidFill>
+                <a:latin typeface="Calibri"/>
+              </a:rPr>
+              <a:t>30.04.2026</a:t>
+            </a:r>
+          </a:p>
+        </p:txBody>
+      </p:sp>
+      <p:sp>
+        <p:nvSpPr>
+          <p:cNvPr id="17" name="!!tl_dot_4"/>
+          <p:cNvSpPr/>
+          <p:nvPr/>
+        </p:nvSpPr>
+        <p:spPr>
+          <a:xfrm>
+            <a:off x="3629025" y="2819400"/>
+            <a:ext cx="76200" cy="76200"/>
+          </a:xfrm>
+          <a:prstGeom prst="ellipse">
+            <a:avLst/>
+          </a:prstGeom>
+          <a:solidFill>
+            <a:srgbClr val="D1D5DB"/>
+          </a:solidFill>
+          <a:ln>
+            <a:noFill/>
+          </a:ln>
+          <a:effectLst/>
+        </p:spPr>
+        <p:style>
+          <a:lnRef idx="1">
+            <a:schemeClr val="accent1"/>
+          </a:lnRef>
+          <a:fillRef idx="3">
+            <a:schemeClr val="accent1"/>
+          </a:fillRef>
+          <a:effectRef idx="2">
+            <a:schemeClr val="accent1"/>
+          </a:effectRef>
+          <a:fontRef idx="minor">
+            <a:schemeClr val="lt1"/>
+          </a:fontRef>
+        </p:style>
+        <p:txBody>
+          <a:bodyPr rtlCol="0" anchor="ctr"/>
+          <a:lstStyle/>
+          <a:p>
+            <a:pPr algn="ctr"/>
+          </a:p>
+        </p:txBody>
+      </p:sp>
+      <p:sp>
+        <p:nvSpPr>
+          <p:cNvPr id="18" name="lbl_4_s4"/>
+          <p:cNvSpPr txBox="1"/>
+          <p:nvPr/>
+        </p:nvSpPr>
+        <p:spPr>
+          <a:xfrm>
+            <a:off x="3381375" y="3009863"/>
+            <a:ext cx="571500" cy="150019"/>
+          </a:xfrm>
+          <a:prstGeom prst="rect">
+            <a:avLst/>
+          </a:prstGeom>
+          <a:noFill/>
+        </p:spPr>
+        <p:txBody>
+          <a:bodyPr wrap="square" lIns="0" rIns="0" tIns="0" bIns="0">
+            <a:spAutoFit/>
+          </a:bodyPr>
+          <a:lstStyle/>
+          <a:p>
+            <a:pPr algn="ctr"/>
+            <a:r>
+              <a:rPr sz="900" b="0">
+                <a:solidFill>
+                  <a:srgbClr val="9CA3AF"/>
+                </a:solidFill>
+                <a:latin typeface="Calibri"/>
+              </a:rPr>
+              <a:t>~21.05.2026</a:t>
+            </a:r>
+          </a:p>
+        </p:txBody>
+      </p:sp>
+      <p:sp>
+        <p:nvSpPr>
+          <p:cNvPr id="19" name="!!tl_dot_5"/>
+          <p:cNvSpPr/>
+          <p:nvPr/>
+        </p:nvSpPr>
+        <p:spPr>
+          <a:xfrm>
+            <a:off x="4505325" y="2790825"/>
+            <a:ext cx="133350" cy="133350"/>
+          </a:xfrm>
+          <a:prstGeom prst="ellipse">
+            <a:avLst/>
+          </a:prstGeom>
+          <a:solidFill>
+            <a:srgbClr val="325786"/>
+          </a:solidFill>
+          <a:ln>
+            <a:noFill/>
+          </a:ln>
+          <a:effectLst/>
+        </p:spPr>
+        <p:style>
+          <a:lnRef idx="1">
+            <a:schemeClr val="accent1"/>
+          </a:lnRef>
+          <a:fillRef idx="3">
+            <a:schemeClr val="accent1"/>
+          </a:fillRef>
+          <a:effectRef idx="2">
+            <a:schemeClr val="accent1"/>
+          </a:effectRef>
+          <a:fontRef idx="minor">
+            <a:schemeClr val="lt1"/>
+          </a:fontRef>
+        </p:style>
+        <p:txBody>
+          <a:bodyPr rtlCol="0" anchor="ctr"/>
+          <a:lstStyle/>
+          <a:p>
+            <a:pPr algn="ctr"/>
+          </a:p>
+        </p:txBody>
+      </p:sp>
+      <p:sp>
+        <p:nvSpPr>
+          <p:cNvPr id="20" name="lbl_5_s4"/>
+          <p:cNvSpPr txBox="1"/>
+          <p:nvPr/>
+        </p:nvSpPr>
+        <p:spPr>
+          <a:xfrm>
+            <a:off x="4286250" y="3009863"/>
+            <a:ext cx="571500" cy="150019"/>
+          </a:xfrm>
+          <a:prstGeom prst="rect">
+            <a:avLst/>
+          </a:prstGeom>
+          <a:noFill/>
+        </p:spPr>
+        <p:txBody>
+          <a:bodyPr wrap="square" lIns="0" rIns="0" tIns="0" bIns="0">
+            <a:spAutoFit/>
+          </a:bodyPr>
+          <a:lstStyle/>
+          <a:p>
+            <a:pPr algn="ctr"/>
+            <a:r>
+              <a:rPr sz="900" b="1">
+                <a:solidFill>
+                  <a:srgbClr val="1F2023"/>
+                </a:solidFill>
+                <a:latin typeface="Calibri"/>
+              </a:rPr>
+              <a:t>18.06.2026</a:t>
+            </a:r>
+          </a:p>
+        </p:txBody>
+      </p:sp>
+      <p:sp>
+        <p:nvSpPr>
+          <p:cNvPr id="21" name="!!tl_dot_6"/>
+          <p:cNvSpPr/>
+          <p:nvPr/>
+        </p:nvSpPr>
+        <p:spPr>
+          <a:xfrm>
+            <a:off x="5438775" y="2819400"/>
+            <a:ext cx="76200" cy="76200"/>
+          </a:xfrm>
+          <a:prstGeom prst="ellipse">
+            <a:avLst/>
+          </a:prstGeom>
+          <a:solidFill>
+            <a:srgbClr val="D1D5DB"/>
+          </a:solidFill>
+          <a:ln>
+            <a:noFill/>
+          </a:ln>
+          <a:effectLst/>
+        </p:spPr>
+        <p:style>
+          <a:lnRef idx="1">
+            <a:schemeClr val="accent1"/>
+          </a:lnRef>
+          <a:fillRef idx="3">
+            <a:schemeClr val="accent1"/>
+          </a:fillRef>
+          <a:effectRef idx="2">
+            <a:schemeClr val="accent1"/>
+          </a:effectRef>
+          <a:fontRef idx="minor">
+            <a:schemeClr val="lt1"/>
+          </a:fontRef>
+        </p:style>
+        <p:txBody>
+          <a:bodyPr rtlCol="0" anchor="ctr"/>
+          <a:lstStyle/>
+          <a:p>
+            <a:pPr algn="ctr"/>
+          </a:p>
+        </p:txBody>
+      </p:sp>
+      <p:sp>
+        <p:nvSpPr>
+          <p:cNvPr id="22" name="lbl_6_s4"/>
+          <p:cNvSpPr txBox="1"/>
+          <p:nvPr/>
+        </p:nvSpPr>
+        <p:spPr>
+          <a:xfrm>
+            <a:off x="5191125" y="3009863"/>
+            <a:ext cx="571500" cy="150019"/>
+          </a:xfrm>
+          <a:prstGeom prst="rect">
+            <a:avLst/>
+          </a:prstGeom>
+          <a:noFill/>
+        </p:spPr>
+        <p:txBody>
+          <a:bodyPr wrap="square" lIns="0" rIns="0" tIns="0" bIns="0">
+            <a:spAutoFit/>
+          </a:bodyPr>
+          <a:lstStyle/>
+          <a:p>
+            <a:pPr algn="ctr"/>
+            <a:r>
+              <a:rPr sz="900" b="0">
+                <a:solidFill>
+                  <a:srgbClr val="9CA3AF"/>
+                </a:solidFill>
+                <a:latin typeface="Calibri"/>
+              </a:rPr>
+              <a:t>25.06.2026</a:t>
+            </a:r>
+          </a:p>
+        </p:txBody>
+      </p:sp>
+      <p:sp>
+        <p:nvSpPr>
+          <p:cNvPr id="23" name="!!tl_dot_7"/>
+          <p:cNvSpPr/>
+          <p:nvPr/>
+        </p:nvSpPr>
+        <p:spPr>
+          <a:xfrm>
+            <a:off x="6343650" y="2819400"/>
+            <a:ext cx="76200" cy="76200"/>
+          </a:xfrm>
+          <a:prstGeom prst="ellipse">
+            <a:avLst/>
+          </a:prstGeom>
+          <a:solidFill>
+            <a:srgbClr val="D1D5DB"/>
+          </a:solidFill>
+          <a:ln>
+            <a:noFill/>
+          </a:ln>
+          <a:effectLst/>
+        </p:spPr>
+        <p:style>
+          <a:lnRef idx="1">
+            <a:schemeClr val="accent1"/>
+          </a:lnRef>
+          <a:fillRef idx="3">
+            <a:schemeClr val="accent1"/>
+          </a:fillRef>
+          <a:effectRef idx="2">
+            <a:schemeClr val="accent1"/>
+          </a:effectRef>
+          <a:fontRef idx="minor">
+            <a:schemeClr val="lt1"/>
+          </a:fontRef>
+        </p:style>
+        <p:txBody>
+          <a:bodyPr rtlCol="0" anchor="ctr"/>
+          <a:lstStyle/>
+          <a:p>
+            <a:pPr algn="ctr"/>
+          </a:p>
+        </p:txBody>
+      </p:sp>
+      <p:sp>
+        <p:nvSpPr>
+          <p:cNvPr id="24" name="lbl_7_s4"/>
+          <p:cNvSpPr txBox="1"/>
+          <p:nvPr/>
+        </p:nvSpPr>
+        <p:spPr>
+          <a:xfrm>
+            <a:off x="6096000" y="3009863"/>
+            <a:ext cx="571500" cy="150019"/>
+          </a:xfrm>
+          <a:prstGeom prst="rect">
+            <a:avLst/>
+          </a:prstGeom>
+          <a:noFill/>
+        </p:spPr>
+        <p:txBody>
+          <a:bodyPr wrap="square" lIns="0" rIns="0" tIns="0" bIns="0">
+            <a:spAutoFit/>
+          </a:bodyPr>
+          <a:lstStyle/>
+          <a:p>
+            <a:pPr algn="ctr"/>
+            <a:r>
+              <a:rPr sz="900" b="0">
+                <a:solidFill>
+                  <a:srgbClr val="9CA3AF"/>
+                </a:solidFill>
+                <a:latin typeface="Calibri"/>
+              </a:rPr>
+              <a:t>09.07.2026</a:t>
+            </a:r>
+          </a:p>
+        </p:txBody>
+      </p:sp>
+      <p:sp>
+        <p:nvSpPr>
+          <p:cNvPr id="25" name="!!tl_dot_8"/>
+          <p:cNvSpPr/>
+          <p:nvPr/>
+        </p:nvSpPr>
+        <p:spPr>
+          <a:xfrm>
+            <a:off x="7248525" y="2819400"/>
+            <a:ext cx="76200" cy="76200"/>
+          </a:xfrm>
+          <a:prstGeom prst="ellipse">
+            <a:avLst/>
+          </a:prstGeom>
+          <a:solidFill>
+            <a:srgbClr val="D1D5DB"/>
+          </a:solidFill>
+          <a:ln>
+            <a:noFill/>
+          </a:ln>
+          <a:effectLst/>
+        </p:spPr>
+        <p:style>
+          <a:lnRef idx="1">
+            <a:schemeClr val="accent1"/>
+          </a:lnRef>
+          <a:fillRef idx="3">
+            <a:schemeClr val="accent1"/>
+          </a:fillRef>
+          <a:effectRef idx="2">
+            <a:schemeClr val="accent1"/>
+          </a:effectRef>
+          <a:fontRef idx="minor">
+            <a:schemeClr val="lt1"/>
+          </a:fontRef>
+        </p:style>
+        <p:txBody>
+          <a:bodyPr rtlCol="0" anchor="ctr"/>
+          <a:lstStyle/>
+          <a:p>
+            <a:pPr algn="ctr"/>
+          </a:p>
+        </p:txBody>
+      </p:sp>
+      <p:sp>
+        <p:nvSpPr>
+          <p:cNvPr id="26" name="lbl_8_s4"/>
+          <p:cNvSpPr txBox="1"/>
+          <p:nvPr/>
+        </p:nvSpPr>
+        <p:spPr>
+          <a:xfrm>
+            <a:off x="7000875" y="3009863"/>
+            <a:ext cx="571500" cy="150019"/>
+          </a:xfrm>
+          <a:prstGeom prst="rect">
+            <a:avLst/>
+          </a:prstGeom>
+          <a:noFill/>
+        </p:spPr>
+        <p:txBody>
+          <a:bodyPr wrap="square" lIns="0" rIns="0" tIns="0" bIns="0">
+            <a:spAutoFit/>
+          </a:bodyPr>
+          <a:lstStyle/>
+          <a:p>
+            <a:pPr algn="ctr"/>
+            <a:r>
+              <a:rPr sz="900" b="0">
+                <a:solidFill>
+                  <a:srgbClr val="9CA3AF"/>
+                </a:solidFill>
+                <a:latin typeface="Calibri"/>
+              </a:rPr>
+              <a:t>16.07.2026</a:t>
+            </a:r>
+          </a:p>
+        </p:txBody>
+      </p:sp>
+      <p:sp>
+        <p:nvSpPr>
+          <p:cNvPr id="27" name="!!tl_dot_9"/>
+          <p:cNvSpPr/>
+          <p:nvPr/>
+        </p:nvSpPr>
+        <p:spPr>
+          <a:xfrm>
+            <a:off x="8153400" y="2819400"/>
+            <a:ext cx="76200" cy="76200"/>
+          </a:xfrm>
+          <a:prstGeom prst="ellipse">
+            <a:avLst/>
+          </a:prstGeom>
+          <a:solidFill>
+            <a:srgbClr val="D1D5DB"/>
+          </a:solidFill>
+          <a:ln>
+            <a:noFill/>
+          </a:ln>
+          <a:effectLst/>
+        </p:spPr>
+        <p:style>
+          <a:lnRef idx="1">
+            <a:schemeClr val="accent1"/>
+          </a:lnRef>
+          <a:fillRef idx="3">
+            <a:schemeClr val="accent1"/>
+          </a:fillRef>
+          <a:effectRef idx="2">
+            <a:schemeClr val="accent1"/>
+          </a:effectRef>
+          <a:fontRef idx="minor">
+            <a:schemeClr val="lt1"/>
+          </a:fontRef>
+        </p:style>
+        <p:txBody>
+          <a:bodyPr rtlCol="0" anchor="ctr"/>
+          <a:lstStyle/>
+          <a:p>
+            <a:pPr algn="ctr"/>
+          </a:p>
+        </p:txBody>
+      </p:sp>
+      <p:sp>
+        <p:nvSpPr>
+          <p:cNvPr id="28" name="lbl_9_s4"/>
+          <p:cNvSpPr txBox="1"/>
+          <p:nvPr/>
+        </p:nvSpPr>
+        <p:spPr>
+          <a:xfrm>
+            <a:off x="7905750" y="3009863"/>
+            <a:ext cx="571500" cy="150019"/>
+          </a:xfrm>
+          <a:prstGeom prst="rect">
+            <a:avLst/>
+          </a:prstGeom>
+          <a:noFill/>
+        </p:spPr>
+        <p:txBody>
+          <a:bodyPr wrap="square" lIns="0" rIns="0" tIns="0" bIns="0">
+            <a:spAutoFit/>
+          </a:bodyPr>
+          <a:lstStyle/>
+          <a:p>
+            <a:pPr algn="ctr"/>
+            <a:r>
+              <a:rPr sz="900" b="0">
+                <a:solidFill>
+                  <a:srgbClr val="9CA3AF"/>
+                </a:solidFill>
+                <a:latin typeface="Calibri"/>
+              </a:rPr>
+              <a:t>20.07.2026</a:t>
+            </a:r>
+          </a:p>
+        </p:txBody>
+      </p:sp>
+    </p:spTree>
+  </p:cSld>
+  <p:clrMapOvr>
+    <a:masterClrMapping/>
+  </p:clrMapOvr>
+  <mc:AlternateContent xmlns:mc="http://schemas.openxmlformats.org/markup-compatibility/2006">
+    <mc:Choice xmlns:p159="http://schemas.microsoft.com/office/powerpoint/2015/09/main" Requires="p159">
+      <p:transition spd="slow">
+        <p159:morph option="byObject"/>
+      </p:transition>
+    </mc:Choice>
+    <mc:Fallback>
+      <p:transition spd="slow">
+        <p:fade/>
+      </p:transition>
+    </mc:Fallback>
+  </mc:AlternateContent>
+</p:sld>
+</file>
+
+<file path=ppt/slides/slide19.xml><?xml version="1.0" encoding="utf-8"?>
+<p:sld xmlns:a="http://schemas.openxmlformats.org/drawingml/2006/main" xmlns:p="http://schemas.openxmlformats.org/presentationml/2006/main" xmlns:r="http://schemas.openxmlformats.org/officeDocument/2006/relationships">
+  <p:cSld>
+    <p:spTree>
+      <p:nvGrpSpPr>
+        <p:cNvPr id="1" name=""/>
+        <p:cNvGrpSpPr/>
+        <p:nvPr/>
+      </p:nvGrpSpPr>
+      <p:grpSpPr/>
+      <p:sp>
+        <p:nvSpPr>
+          <p:cNvPr id="2" name="title_m5"/>
+          <p:cNvSpPr txBox="1"/>
+          <p:nvPr/>
+        </p:nvSpPr>
+        <p:spPr>
+          <a:xfrm>
+            <a:off x="457200" y="87474"/>
+            <a:ext cx="8458200" cy="769776"/>
+          </a:xfrm>
+          <a:prstGeom prst="rect">
+            <a:avLst/>
+          </a:prstGeom>
+          <a:noFill/>
+        </p:spPr>
+        <p:txBody>
+          <a:bodyPr wrap="square" lIns="0" rIns="0" tIns="0" bIns="0" anchor="b">
+            <a:spAutoFit/>
+          </a:bodyPr>
+          <a:lstStyle/>
+          <a:p>
+            <a:pPr algn="l"/>
+            <a:r>
+              <a:rPr sz="1800" b="0">
+                <a:solidFill>
+                  <a:srgbClr val="808080"/>
+                </a:solidFill>
+                <a:latin typeface="Calibri"/>
+              </a:rPr>
+              <a:t>FL-Trilemma: Project Timeline</a:t>
+            </a:r>
+          </a:p>
+        </p:txBody>
+      </p:sp>
+      <p:cxnSp>
+        <p:nvCxnSpPr>
+          <p:cNvPr id="4" name="divider_m5"/>
+          <p:cNvCxnSpPr/>
+          <p:nvPr/>
+        </p:nvCxnSpPr>
+        <p:spPr>
+          <a:xfrm>
+            <a:off x="571500" y="952500"/>
+            <a:ext cx="8001000" cy="0"/>
+          </a:xfrm>
+          <a:prstGeom prst="line">
+            <a:avLst/>
+          </a:prstGeom>
+          <a:ln w="9525">
+            <a:solidFill>
+              <a:srgbClr val="B3B3B3"/>
+            </a:solidFill>
+          </a:ln>
+          <a:effectLst/>
+        </p:spPr>
+        <p:style>
+          <a:lnRef idx="2">
+            <a:schemeClr val="accent1"/>
+          </a:lnRef>
+          <a:fillRef idx="0">
+            <a:schemeClr val="accent1"/>
+          </a:fillRef>
+          <a:effectRef idx="1">
+            <a:schemeClr val="accent1"/>
+          </a:effectRef>
+          <a:fontRef idx="minor">
+            <a:schemeClr val="tx1"/>
+          </a:fontRef>
+        </p:style>
+      </p:cxnSp>
+      <p:sp>
+        <p:nvSpPr>
+          <p:cNvPr id="5" name="content_placeholder_m5"/>
+          <p:cNvSpPr/>
+          <p:nvPr/>
+        </p:nvSpPr>
+        <p:spPr>
+          <a:xfrm>
+            <a:off x="762000" y="3333750"/>
+            <a:ext cx="1619250" cy="1047750"/>
+          </a:xfrm>
+          <a:prstGeom prst="roundRect">
+            <a:avLst>
+              <a:gd name="adj" fmla="val 6000"/>
+            </a:avLst>
+          </a:prstGeom>
+          <a:solidFill>
+            <a:srgbClr val="EDEEF0"/>
+          </a:solidFill>
+          <a:ln w="9525">
+            <a:solidFill>
+              <a:srgbClr val="E5E7EB"/>
+            </a:solidFill>
+            <a:prstDash val="dash"/>
+          </a:ln>
+          <a:effectLst/>
+        </p:spPr>
+        <p:style>
+          <a:lnRef idx="1">
+            <a:schemeClr val="accent1"/>
+          </a:lnRef>
+          <a:fillRef idx="3">
+            <a:schemeClr val="accent1"/>
+          </a:fillRef>
+          <a:effectRef idx="2">
+            <a:schemeClr val="accent1"/>
+          </a:effectRef>
+          <a:fontRef idx="minor">
+            <a:schemeClr val="lt1"/>
+          </a:fontRef>
+        </p:style>
+        <p:txBody>
+          <a:bodyPr rtlCol="0" anchor="ctr" wrap="square" lIns="120000" rIns="120000"/>
+          <a:lstStyle/>
+          <a:p>
+            <a:pPr algn="ctr"/>
+            <a:r>
+              <a:rPr sz="550">
+                <a:solidFill>
+                  <a:srgbClr val="9CA3AF"/>
+                </a:solidFill>
+                <a:latin typeface="Consolas"/>
+              </a:rPr>
+              <a:t>INTERIM PRESENTATION 2 - SLIDES</a:t>
+            </a:r>
+          </a:p>
+        </p:txBody>
+      </p:sp>
+      <p:sp>
+        <p:nvSpPr>
+          <p:cNvPr id="6" name="content_pill_m5"/>
+          <p:cNvSpPr/>
+          <p:nvPr/>
+        </p:nvSpPr>
+        <p:spPr>
+          <a:xfrm>
+            <a:off x="2571750" y="3333750"/>
+            <a:ext cx="825000" cy="188082"/>
+          </a:xfrm>
+          <a:prstGeom prst="roundRect">
+            <a:avLst>
+              <a:gd name="adj" fmla="val 50000"/>
+            </a:avLst>
+          </a:prstGeom>
+          <a:solidFill>
+            <a:srgbClr val="C9E1FF"/>
+          </a:solidFill>
+          <a:ln>
+            <a:noFill/>
+          </a:ln>
+          <a:effectLst/>
+        </p:spPr>
+        <p:style>
+          <a:lnRef idx="1">
+            <a:schemeClr val="accent1"/>
+          </a:lnRef>
+          <a:fillRef idx="3">
+            <a:schemeClr val="accent1"/>
+          </a:fillRef>
+          <a:effectRef idx="2">
+            <a:schemeClr val="accent1"/>
+          </a:effectRef>
+          <a:fontRef idx="minor">
+            <a:schemeClr val="lt1"/>
+          </a:fontRef>
+        </p:style>
+        <p:txBody>
+          <a:bodyPr rtlCol="0" anchor="ctr" lIns="60000" rIns="60000" tIns="0" bIns="0" wrap="none"/>
+          <a:lstStyle/>
+          <a:p>
+            <a:pPr algn="ctr"/>
+            <a:r>
+              <a:rPr sz="900" b="1">
+                <a:solidFill>
+                  <a:srgbClr val="325786"/>
+                </a:solidFill>
+                <a:latin typeface="Calibri"/>
+              </a:rPr>
+              <a:t>25.06.2026</a:t>
+            </a:r>
+          </a:p>
+        </p:txBody>
+      </p:sp>
+      <p:sp>
+        <p:nvSpPr>
+          <p:cNvPr id="7" name="content_headline_m5"/>
+          <p:cNvSpPr txBox="1"/>
+          <p:nvPr/>
+        </p:nvSpPr>
+        <p:spPr>
+          <a:xfrm>
+            <a:off x="2571750" y="3607501"/>
+            <a:ext cx="5000625" cy="239316"/>
+          </a:xfrm>
+          <a:prstGeom prst="rect">
+            <a:avLst/>
+          </a:prstGeom>
+          <a:noFill/>
+        </p:spPr>
+        <p:txBody>
+          <a:bodyPr wrap="square" lIns="0" rIns="0" tIns="0" bIns="0">
+            <a:spAutoFit/>
+          </a:bodyPr>
+          <a:lstStyle/>
+          <a:p>
+            <a:pPr algn="l"/>
+            <a:r>
+              <a:rPr sz="1500" b="1">
+                <a:solidFill>
+                  <a:srgbClr val="1F2023"/>
+                </a:solidFill>
+                <a:latin typeface="Calibri"/>
+              </a:rPr>
+              <a:t>Interim Presentation 2</a:t>
+            </a:r>
+          </a:p>
+        </p:txBody>
+      </p:sp>
+      <p:sp>
+        <p:nvSpPr>
+          <p:cNvPr id="8" name="content_bullets_m5"/>
+          <p:cNvSpPr txBox="1"/>
+          <p:nvPr/>
+        </p:nvSpPr>
+        <p:spPr>
+          <a:xfrm>
+            <a:off x="2571750" y="3875392"/>
+            <a:ext cx="5000625" cy="376163"/>
+          </a:xfrm>
+          <a:prstGeom prst="rect">
+            <a:avLst/>
+          </a:prstGeom>
+          <a:noFill/>
+        </p:spPr>
+        <p:txBody>
+          <a:bodyPr wrap="square" lIns="0" rIns="0" tIns="0" bIns="0">
+            <a:spAutoFit/>
+          </a:bodyPr>
+          <a:lstStyle/>
+          <a:p>
+            <a:pPr>
+              <a:spcAft>
+                <a:spcPts val="600"/>
+              </a:spcAft>
+            </a:pPr>
+            <a:r>
+              <a:rPr sz="975" b="1">
+                <a:solidFill>
+                  <a:srgbClr val="C1212A"/>
+                </a:solidFill>
+                <a:latin typeface="Calibri"/>
+              </a:rPr>
+              <a:t>-  </a:t>
+            </a:r>
+            <a:r>
+              <a:rPr sz="975">
+                <a:solidFill>
+                  <a:srgbClr val="325786"/>
+                </a:solidFill>
+                <a:latin typeface="Calibri"/>
+              </a:rPr>
+              <a:t>Mechanisms implemented albeit partly flawed (DP, FLTrust, TopK)</a:t>
+            </a:r>
+          </a:p>
+          <a:p>
+            <a:pPr>
+              <a:spcAft>
+                <a:spcPts val="600"/>
+              </a:spcAft>
+            </a:pPr>
+            <a:r>
+              <a:rPr sz="975" b="1">
+                <a:solidFill>
+                  <a:srgbClr val="C1212A"/>
+                </a:solidFill>
+                <a:latin typeface="Calibri"/>
+              </a:rPr>
+              <a:t>-  </a:t>
+            </a:r>
+            <a:r>
+              <a:rPr sz="975">
+                <a:solidFill>
+                  <a:srgbClr val="325786"/>
+                </a:solidFill>
+                <a:latin typeface="Calibri"/>
+              </a:rPr>
+              <a:t>Testing extremely slow due to missing resources</a:t>
+            </a:r>
+          </a:p>
+        </p:txBody>
+      </p:sp>
+      <p:sp>
+        <p:nvSpPr>
+          <p:cNvPr id="9" name="!!tl_track"/>
+          <p:cNvSpPr/>
+          <p:nvPr/>
+        </p:nvSpPr>
+        <p:spPr>
+          <a:xfrm>
+            <a:off x="952500" y="2847919"/>
+            <a:ext cx="7239000" cy="18976"/>
+          </a:xfrm>
+          <a:prstGeom prst="roundRect">
+            <a:avLst>
+              <a:gd name="adj" fmla="val 50000"/>
+            </a:avLst>
+          </a:prstGeom>
+          <a:solidFill>
+            <a:srgbClr val="E2E2E2"/>
+          </a:solidFill>
+          <a:ln>
+            <a:noFill/>
+          </a:ln>
+          <a:effectLst/>
+        </p:spPr>
+        <p:style>
+          <a:lnRef idx="1">
+            <a:schemeClr val="accent1"/>
+          </a:lnRef>
+          <a:fillRef idx="3">
+            <a:schemeClr val="accent1"/>
+          </a:fillRef>
+          <a:effectRef idx="2">
+            <a:schemeClr val="accent1"/>
+          </a:effectRef>
+          <a:fontRef idx="minor">
+            <a:schemeClr val="lt1"/>
+          </a:fontRef>
+        </p:style>
+        <p:txBody>
+          <a:bodyPr rtlCol="0" anchor="ctr"/>
+          <a:lstStyle/>
+          <a:p>
+            <a:pPr algn="ctr"/>
+          </a:p>
+        </p:txBody>
+      </p:sp>
+      <p:sp>
+        <p:nvSpPr>
+          <p:cNvPr id="10" name="!!tl_fill"/>
+          <p:cNvSpPr/>
+          <p:nvPr/>
+        </p:nvSpPr>
+        <p:spPr>
+          <a:xfrm>
+            <a:off x="952500" y="2847919"/>
+            <a:ext cx="4524375" cy="18976"/>
+          </a:xfrm>
+          <a:prstGeom prst="roundRect">
+            <a:avLst>
+              <a:gd name="adj" fmla="val 50000"/>
+            </a:avLst>
+          </a:prstGeom>
+          <a:solidFill>
+            <a:srgbClr val="325786"/>
+          </a:solidFill>
+          <a:ln>
+            <a:noFill/>
+          </a:ln>
+          <a:effectLst/>
+        </p:spPr>
+        <p:style>
+          <a:lnRef idx="1">
+            <a:schemeClr val="accent1"/>
+          </a:lnRef>
+          <a:fillRef idx="3">
+            <a:schemeClr val="accent1"/>
+          </a:fillRef>
+          <a:effectRef idx="2">
+            <a:schemeClr val="accent1"/>
+          </a:effectRef>
+          <a:fontRef idx="minor">
+            <a:schemeClr val="lt1"/>
+          </a:fontRef>
+        </p:style>
+        <p:txBody>
+          <a:bodyPr rtlCol="0" anchor="ctr"/>
+          <a:lstStyle/>
+          <a:p>
+            <a:pPr algn="ctr"/>
+          </a:p>
+        </p:txBody>
+      </p:sp>
+      <p:sp>
+        <p:nvSpPr>
+          <p:cNvPr id="11" name="!!tl_dot_1"/>
+          <p:cNvSpPr/>
+          <p:nvPr/>
+        </p:nvSpPr>
+        <p:spPr>
+          <a:xfrm>
+            <a:off x="914400" y="2819400"/>
+            <a:ext cx="76200" cy="76200"/>
+          </a:xfrm>
+          <a:prstGeom prst="ellipse">
+            <a:avLst/>
+          </a:prstGeom>
+          <a:solidFill>
+            <a:srgbClr val="D1D5DB"/>
+          </a:solidFill>
+          <a:ln>
+            <a:noFill/>
+          </a:ln>
+          <a:effectLst/>
+        </p:spPr>
+        <p:style>
+          <a:lnRef idx="1">
+            <a:schemeClr val="accent1"/>
+          </a:lnRef>
+          <a:fillRef idx="3">
+            <a:schemeClr val="accent1"/>
+          </a:fillRef>
+          <a:effectRef idx="2">
+            <a:schemeClr val="accent1"/>
+          </a:effectRef>
+          <a:fontRef idx="minor">
+            <a:schemeClr val="lt1"/>
+          </a:fontRef>
+        </p:style>
+        <p:txBody>
+          <a:bodyPr rtlCol="0" anchor="ctr"/>
+          <a:lstStyle/>
+          <a:p>
+            <a:pPr algn="ctr"/>
+          </a:p>
+        </p:txBody>
+      </p:sp>
+      <p:sp>
+        <p:nvSpPr>
+          <p:cNvPr id="12" name="lbl_1_s5"/>
+          <p:cNvSpPr txBox="1"/>
+          <p:nvPr/>
+        </p:nvSpPr>
+        <p:spPr>
+          <a:xfrm>
+            <a:off x="666750" y="3009863"/>
+            <a:ext cx="571500" cy="150019"/>
+          </a:xfrm>
+          <a:prstGeom prst="rect">
+            <a:avLst/>
+          </a:prstGeom>
+          <a:noFill/>
+        </p:spPr>
+        <p:txBody>
+          <a:bodyPr wrap="square" lIns="0" rIns="0" tIns="0" bIns="0">
+            <a:spAutoFit/>
+          </a:bodyPr>
+          <a:lstStyle/>
+          <a:p>
+            <a:pPr algn="ctr"/>
+            <a:r>
+              <a:rPr sz="900" b="0">
+                <a:solidFill>
+                  <a:srgbClr val="9CA3AF"/>
+                </a:solidFill>
+                <a:latin typeface="Calibri"/>
+              </a:rPr>
+              <a:t>09.04.2026</a:t>
+            </a:r>
+          </a:p>
+        </p:txBody>
+      </p:sp>
+      <p:sp>
+        <p:nvSpPr>
+          <p:cNvPr id="13" name="!!tl_dot_2"/>
+          <p:cNvSpPr/>
+          <p:nvPr/>
+        </p:nvSpPr>
+        <p:spPr>
+          <a:xfrm>
+            <a:off x="1819275" y="2819400"/>
+            <a:ext cx="76200" cy="76200"/>
+          </a:xfrm>
+          <a:prstGeom prst="ellipse">
+            <a:avLst/>
+          </a:prstGeom>
+          <a:solidFill>
+            <a:srgbClr val="D1D5DB"/>
+          </a:solidFill>
+          <a:ln>
+            <a:noFill/>
+          </a:ln>
+          <a:effectLst/>
+        </p:spPr>
+        <p:style>
+          <a:lnRef idx="1">
+            <a:schemeClr val="accent1"/>
+          </a:lnRef>
+          <a:fillRef idx="3">
+            <a:schemeClr val="accent1"/>
+          </a:fillRef>
+          <a:effectRef idx="2">
+            <a:schemeClr val="accent1"/>
+          </a:effectRef>
+          <a:fontRef idx="minor">
+            <a:schemeClr val="lt1"/>
+          </a:fontRef>
+        </p:style>
+        <p:txBody>
+          <a:bodyPr rtlCol="0" anchor="ctr"/>
+          <a:lstStyle/>
+          <a:p>
+            <a:pPr algn="ctr"/>
+          </a:p>
+        </p:txBody>
+      </p:sp>
+      <p:sp>
+        <p:nvSpPr>
+          <p:cNvPr id="14" name="lbl_2_s5"/>
+          <p:cNvSpPr txBox="1"/>
+          <p:nvPr/>
+        </p:nvSpPr>
+        <p:spPr>
+          <a:xfrm>
+            <a:off x="1571625" y="3009863"/>
+            <a:ext cx="571500" cy="150019"/>
+          </a:xfrm>
+          <a:prstGeom prst="rect">
+            <a:avLst/>
+          </a:prstGeom>
+          <a:noFill/>
+        </p:spPr>
+        <p:txBody>
+          <a:bodyPr wrap="square" lIns="0" rIns="0" tIns="0" bIns="0">
+            <a:spAutoFit/>
+          </a:bodyPr>
+          <a:lstStyle/>
+          <a:p>
+            <a:pPr algn="ctr"/>
+            <a:r>
+              <a:rPr sz="900" b="0">
+                <a:solidFill>
+                  <a:srgbClr val="9CA3AF"/>
+                </a:solidFill>
+                <a:latin typeface="Calibri"/>
+              </a:rPr>
+              <a:t>16.04.2026</a:t>
+            </a:r>
+          </a:p>
+        </p:txBody>
+      </p:sp>
+      <p:sp>
+        <p:nvSpPr>
+          <p:cNvPr id="15" name="!!tl_dot_3"/>
+          <p:cNvSpPr/>
+          <p:nvPr/>
+        </p:nvSpPr>
+        <p:spPr>
+          <a:xfrm>
+            <a:off x="2724150" y="2819400"/>
+            <a:ext cx="76200" cy="76200"/>
+          </a:xfrm>
+          <a:prstGeom prst="ellipse">
+            <a:avLst/>
+          </a:prstGeom>
+          <a:solidFill>
+            <a:srgbClr val="D1D5DB"/>
+          </a:solidFill>
+          <a:ln>
+            <a:noFill/>
+          </a:ln>
+          <a:effectLst/>
+        </p:spPr>
+        <p:style>
+          <a:lnRef idx="1">
+            <a:schemeClr val="accent1"/>
+          </a:lnRef>
+          <a:fillRef idx="3">
+            <a:schemeClr val="accent1"/>
+          </a:fillRef>
+          <a:effectRef idx="2">
+            <a:schemeClr val="accent1"/>
+          </a:effectRef>
+          <a:fontRef idx="minor">
+            <a:schemeClr val="lt1"/>
+          </a:fontRef>
+        </p:style>
+        <p:txBody>
+          <a:bodyPr rtlCol="0" anchor="ctr"/>
+          <a:lstStyle/>
+          <a:p>
+            <a:pPr algn="ctr"/>
+          </a:p>
+        </p:txBody>
+      </p:sp>
+      <p:sp>
+        <p:nvSpPr>
+          <p:cNvPr id="16" name="lbl_3_s5"/>
+          <p:cNvSpPr txBox="1"/>
+          <p:nvPr/>
+        </p:nvSpPr>
+        <p:spPr>
+          <a:xfrm>
+            <a:off x="2476500" y="3009863"/>
+            <a:ext cx="571500" cy="150019"/>
+          </a:xfrm>
+          <a:prstGeom prst="rect">
+            <a:avLst/>
+          </a:prstGeom>
+          <a:noFill/>
+        </p:spPr>
+        <p:txBody>
+          <a:bodyPr wrap="square" lIns="0" rIns="0" tIns="0" bIns="0">
+            <a:spAutoFit/>
+          </a:bodyPr>
+          <a:lstStyle/>
+          <a:p>
+            <a:pPr algn="ctr"/>
+            <a:r>
+              <a:rPr sz="900" b="0">
+                <a:solidFill>
+                  <a:srgbClr val="9CA3AF"/>
+                </a:solidFill>
+                <a:latin typeface="Calibri"/>
+              </a:rPr>
+              <a:t>30.04.2026</a:t>
+            </a:r>
+          </a:p>
+        </p:txBody>
+      </p:sp>
+      <p:sp>
+        <p:nvSpPr>
+          <p:cNvPr id="17" name="!!tl_dot_4"/>
+          <p:cNvSpPr/>
+          <p:nvPr/>
+        </p:nvSpPr>
+        <p:spPr>
+          <a:xfrm>
+            <a:off x="3629025" y="2819400"/>
+            <a:ext cx="76200" cy="76200"/>
+          </a:xfrm>
+          <a:prstGeom prst="ellipse">
+            <a:avLst/>
+          </a:prstGeom>
+          <a:solidFill>
+            <a:srgbClr val="D1D5DB"/>
+          </a:solidFill>
+          <a:ln>
+            <a:noFill/>
+          </a:ln>
+          <a:effectLst/>
+        </p:spPr>
+        <p:style>
+          <a:lnRef idx="1">
+            <a:schemeClr val="accent1"/>
+          </a:lnRef>
+          <a:fillRef idx="3">
+            <a:schemeClr val="accent1"/>
+          </a:fillRef>
+          <a:effectRef idx="2">
+            <a:schemeClr val="accent1"/>
+          </a:effectRef>
+          <a:fontRef idx="minor">
+            <a:schemeClr val="lt1"/>
+          </a:fontRef>
+        </p:style>
+        <p:txBody>
+          <a:bodyPr rtlCol="0" anchor="ctr"/>
+          <a:lstStyle/>
+          <a:p>
+            <a:pPr algn="ctr"/>
+          </a:p>
+        </p:txBody>
+      </p:sp>
+      <p:sp>
+        <p:nvSpPr>
+          <p:cNvPr id="18" name="lbl_4_s5"/>
+          <p:cNvSpPr txBox="1"/>
+          <p:nvPr/>
+        </p:nvSpPr>
+        <p:spPr>
+          <a:xfrm>
+            <a:off x="3381375" y="3009863"/>
+            <a:ext cx="571500" cy="150019"/>
+          </a:xfrm>
+          <a:prstGeom prst="rect">
+            <a:avLst/>
+          </a:prstGeom>
+          <a:noFill/>
+        </p:spPr>
+        <p:txBody>
+          <a:bodyPr wrap="square" lIns="0" rIns="0" tIns="0" bIns="0">
+            <a:spAutoFit/>
+          </a:bodyPr>
+          <a:lstStyle/>
+          <a:p>
+            <a:pPr algn="ctr"/>
+            <a:r>
+              <a:rPr sz="900" b="0">
+                <a:solidFill>
+                  <a:srgbClr val="9CA3AF"/>
+                </a:solidFill>
+                <a:latin typeface="Calibri"/>
+              </a:rPr>
+              <a:t>~21.05.2026</a:t>
+            </a:r>
+          </a:p>
+        </p:txBody>
+      </p:sp>
+      <p:sp>
+        <p:nvSpPr>
+          <p:cNvPr id="19" name="!!tl_dot_5"/>
+          <p:cNvSpPr/>
+          <p:nvPr/>
+        </p:nvSpPr>
+        <p:spPr>
+          <a:xfrm>
+            <a:off x="4533900" y="2819400"/>
+            <a:ext cx="76200" cy="76200"/>
+          </a:xfrm>
+          <a:prstGeom prst="ellipse">
+            <a:avLst/>
+          </a:prstGeom>
+          <a:solidFill>
+            <a:srgbClr val="D1D5DB"/>
+          </a:solidFill>
+          <a:ln>
+            <a:noFill/>
+          </a:ln>
+          <a:effectLst/>
+        </p:spPr>
+        <p:style>
+          <a:lnRef idx="1">
+            <a:schemeClr val="accent1"/>
+          </a:lnRef>
+          <a:fillRef idx="3">
+            <a:schemeClr val="accent1"/>
+          </a:fillRef>
+          <a:effectRef idx="2">
+            <a:schemeClr val="accent1"/>
+          </a:effectRef>
+          <a:fontRef idx="minor">
+            <a:schemeClr val="lt1"/>
+          </a:fontRef>
+        </p:style>
+        <p:txBody>
+          <a:bodyPr rtlCol="0" anchor="ctr"/>
+          <a:lstStyle/>
+          <a:p>
+            <a:pPr algn="ctr"/>
+          </a:p>
+        </p:txBody>
+      </p:sp>
+      <p:sp>
+        <p:nvSpPr>
+          <p:cNvPr id="20" name="lbl_5_s5"/>
+          <p:cNvSpPr txBox="1"/>
+          <p:nvPr/>
+        </p:nvSpPr>
+        <p:spPr>
+          <a:xfrm>
+            <a:off x="4286250" y="3009863"/>
+            <a:ext cx="571500" cy="150019"/>
+          </a:xfrm>
+          <a:prstGeom prst="rect">
+            <a:avLst/>
+          </a:prstGeom>
+          <a:noFill/>
+        </p:spPr>
+        <p:txBody>
+          <a:bodyPr wrap="square" lIns="0" rIns="0" tIns="0" bIns="0">
+            <a:spAutoFit/>
+          </a:bodyPr>
+          <a:lstStyle/>
+          <a:p>
+            <a:pPr algn="ctr"/>
+            <a:r>
+              <a:rPr sz="900" b="0">
+                <a:solidFill>
+                  <a:srgbClr val="9CA3AF"/>
+                </a:solidFill>
+                <a:latin typeface="Calibri"/>
+              </a:rPr>
+              <a:t>18.06.2026</a:t>
+            </a:r>
+          </a:p>
+        </p:txBody>
+      </p:sp>
+      <p:sp>
+        <p:nvSpPr>
+          <p:cNvPr id="21" name="!!tl_dot_6"/>
+          <p:cNvSpPr/>
+          <p:nvPr/>
+        </p:nvSpPr>
+        <p:spPr>
+          <a:xfrm>
+            <a:off x="5410200" y="2790825"/>
+            <a:ext cx="133350" cy="133350"/>
+          </a:xfrm>
+          <a:prstGeom prst="ellipse">
+            <a:avLst/>
+          </a:prstGeom>
+          <a:solidFill>
+            <a:srgbClr val="325786"/>
+          </a:solidFill>
+          <a:ln>
+            <a:noFill/>
+          </a:ln>
+          <a:effectLst/>
+        </p:spPr>
+        <p:style>
+          <a:lnRef idx="1">
+            <a:schemeClr val="accent1"/>
+          </a:lnRef>
+          <a:fillRef idx="3">
+            <a:schemeClr val="accent1"/>
+          </a:fillRef>
+          <a:effectRef idx="2">
+            <a:schemeClr val="accent1"/>
+          </a:effectRef>
+          <a:fontRef idx="minor">
+            <a:schemeClr val="lt1"/>
+          </a:fontRef>
+        </p:style>
+        <p:txBody>
+          <a:bodyPr rtlCol="0" anchor="ctr"/>
+          <a:lstStyle/>
+          <a:p>
+            <a:pPr algn="ctr"/>
+          </a:p>
+        </p:txBody>
+      </p:sp>
+      <p:sp>
+        <p:nvSpPr>
+          <p:cNvPr id="22" name="lbl_6_s5"/>
+          <p:cNvSpPr txBox="1"/>
+          <p:nvPr/>
+        </p:nvSpPr>
+        <p:spPr>
+          <a:xfrm>
+            <a:off x="5191125" y="3009863"/>
+            <a:ext cx="571500" cy="150019"/>
+          </a:xfrm>
+          <a:prstGeom prst="rect">
+            <a:avLst/>
+          </a:prstGeom>
+          <a:noFill/>
+        </p:spPr>
+        <p:txBody>
+          <a:bodyPr wrap="square" lIns="0" rIns="0" tIns="0" bIns="0">
+            <a:spAutoFit/>
+          </a:bodyPr>
+          <a:lstStyle/>
+          <a:p>
+            <a:pPr algn="ctr"/>
+            <a:r>
+              <a:rPr sz="900" b="1">
+                <a:solidFill>
+                  <a:srgbClr val="1F2023"/>
+                </a:solidFill>
+                <a:latin typeface="Calibri"/>
+              </a:rPr>
+              <a:t>25.06.2026</a:t>
+            </a:r>
+          </a:p>
+        </p:txBody>
+      </p:sp>
+      <p:sp>
+        <p:nvSpPr>
+          <p:cNvPr id="23" name="!!tl_dot_7"/>
+          <p:cNvSpPr/>
+          <p:nvPr/>
+        </p:nvSpPr>
+        <p:spPr>
+          <a:xfrm>
+            <a:off x="6343650" y="2819400"/>
+            <a:ext cx="76200" cy="76200"/>
+          </a:xfrm>
+          <a:prstGeom prst="ellipse">
+            <a:avLst/>
+          </a:prstGeom>
+          <a:solidFill>
+            <a:srgbClr val="D1D5DB"/>
+          </a:solidFill>
+          <a:ln>
+            <a:noFill/>
+          </a:ln>
+          <a:effectLst/>
+        </p:spPr>
+        <p:style>
+          <a:lnRef idx="1">
+            <a:schemeClr val="accent1"/>
+          </a:lnRef>
+          <a:fillRef idx="3">
+            <a:schemeClr val="accent1"/>
+          </a:fillRef>
+          <a:effectRef idx="2">
+            <a:schemeClr val="accent1"/>
+          </a:effectRef>
+          <a:fontRef idx="minor">
+            <a:schemeClr val="lt1"/>
+          </a:fontRef>
+        </p:style>
+        <p:txBody>
+          <a:bodyPr rtlCol="0" anchor="ctr"/>
+          <a:lstStyle/>
+          <a:p>
+            <a:pPr algn="ctr"/>
+          </a:p>
+        </p:txBody>
+      </p:sp>
+      <p:sp>
+        <p:nvSpPr>
+          <p:cNvPr id="24" name="lbl_7_s5"/>
+          <p:cNvSpPr txBox="1"/>
+          <p:nvPr/>
+        </p:nvSpPr>
+        <p:spPr>
+          <a:xfrm>
+            <a:off x="6096000" y="3009863"/>
+            <a:ext cx="571500" cy="150019"/>
+          </a:xfrm>
+          <a:prstGeom prst="rect">
+            <a:avLst/>
+          </a:prstGeom>
+          <a:noFill/>
+        </p:spPr>
+        <p:txBody>
+          <a:bodyPr wrap="square" lIns="0" rIns="0" tIns="0" bIns="0">
+            <a:spAutoFit/>
+          </a:bodyPr>
+          <a:lstStyle/>
+          <a:p>
+            <a:pPr algn="ctr"/>
+            <a:r>
+              <a:rPr sz="900" b="0">
+                <a:solidFill>
+                  <a:srgbClr val="9CA3AF"/>
+                </a:solidFill>
+                <a:latin typeface="Calibri"/>
+              </a:rPr>
+              <a:t>09.07.2026</a:t>
+            </a:r>
+          </a:p>
+        </p:txBody>
+      </p:sp>
+      <p:sp>
+        <p:nvSpPr>
+          <p:cNvPr id="25" name="!!tl_dot_8"/>
+          <p:cNvSpPr/>
+          <p:nvPr/>
+        </p:nvSpPr>
+        <p:spPr>
+          <a:xfrm>
+            <a:off x="7248525" y="2819400"/>
+            <a:ext cx="76200" cy="76200"/>
+          </a:xfrm>
+          <a:prstGeom prst="ellipse">
+            <a:avLst/>
+          </a:prstGeom>
+          <a:solidFill>
+            <a:srgbClr val="D1D5DB"/>
+          </a:solidFill>
+          <a:ln>
+            <a:noFill/>
+          </a:ln>
+          <a:effectLst/>
+        </p:spPr>
+        <p:style>
+          <a:lnRef idx="1">
+            <a:schemeClr val="accent1"/>
+          </a:lnRef>
+          <a:fillRef idx="3">
+            <a:schemeClr val="accent1"/>
+          </a:fillRef>
+          <a:effectRef idx="2">
+            <a:schemeClr val="accent1"/>
+          </a:effectRef>
+          <a:fontRef idx="minor">
+            <a:schemeClr val="lt1"/>
+          </a:fontRef>
+        </p:style>
+        <p:txBody>
+          <a:bodyPr rtlCol="0" anchor="ctr"/>
+          <a:lstStyle/>
+          <a:p>
+            <a:pPr algn="ctr"/>
+          </a:p>
+        </p:txBody>
+      </p:sp>
+      <p:sp>
+        <p:nvSpPr>
+          <p:cNvPr id="26" name="lbl_8_s5"/>
+          <p:cNvSpPr txBox="1"/>
+          <p:nvPr/>
+        </p:nvSpPr>
+        <p:spPr>
+          <a:xfrm>
+            <a:off x="7000875" y="3009863"/>
+            <a:ext cx="571500" cy="150019"/>
+          </a:xfrm>
+          <a:prstGeom prst="rect">
+            <a:avLst/>
+          </a:prstGeom>
+          <a:noFill/>
+        </p:spPr>
+        <p:txBody>
+          <a:bodyPr wrap="square" lIns="0" rIns="0" tIns="0" bIns="0">
+            <a:spAutoFit/>
+          </a:bodyPr>
+          <a:lstStyle/>
+          <a:p>
+            <a:pPr algn="ctr"/>
+            <a:r>
+              <a:rPr sz="900" b="0">
+                <a:solidFill>
+                  <a:srgbClr val="9CA3AF"/>
+                </a:solidFill>
+                <a:latin typeface="Calibri"/>
+              </a:rPr>
+              <a:t>16.07.2026</a:t>
+            </a:r>
+          </a:p>
+        </p:txBody>
+      </p:sp>
+      <p:sp>
+        <p:nvSpPr>
+          <p:cNvPr id="27" name="!!tl_dot_9"/>
+          <p:cNvSpPr/>
+          <p:nvPr/>
+        </p:nvSpPr>
+        <p:spPr>
+          <a:xfrm>
+            <a:off x="8153400" y="2819400"/>
+            <a:ext cx="76200" cy="76200"/>
+          </a:xfrm>
+          <a:prstGeom prst="ellipse">
+            <a:avLst/>
+          </a:prstGeom>
+          <a:solidFill>
+            <a:srgbClr val="D1D5DB"/>
+          </a:solidFill>
+          <a:ln>
+            <a:noFill/>
+          </a:ln>
+          <a:effectLst/>
+        </p:spPr>
+        <p:style>
+          <a:lnRef idx="1">
+            <a:schemeClr val="accent1"/>
+          </a:lnRef>
+          <a:fillRef idx="3">
+            <a:schemeClr val="accent1"/>
+          </a:fillRef>
+          <a:effectRef idx="2">
+            <a:schemeClr val="accent1"/>
+          </a:effectRef>
+          <a:fontRef idx="minor">
+            <a:schemeClr val="lt1"/>
+          </a:fontRef>
+        </p:style>
+        <p:txBody>
+          <a:bodyPr rtlCol="0" anchor="ctr"/>
+          <a:lstStyle/>
+          <a:p>
+            <a:pPr algn="ctr"/>
+          </a:p>
+        </p:txBody>
+      </p:sp>
+      <p:sp>
+        <p:nvSpPr>
+          <p:cNvPr id="28" name="lbl_9_s5"/>
+          <p:cNvSpPr txBox="1"/>
+          <p:nvPr/>
+        </p:nvSpPr>
+        <p:spPr>
+          <a:xfrm>
+            <a:off x="7905750" y="3009863"/>
+            <a:ext cx="571500" cy="150019"/>
+          </a:xfrm>
+          <a:prstGeom prst="rect">
+            <a:avLst/>
+          </a:prstGeom>
+          <a:noFill/>
+        </p:spPr>
+        <p:txBody>
+          <a:bodyPr wrap="square" lIns="0" rIns="0" tIns="0" bIns="0">
+            <a:spAutoFit/>
+          </a:bodyPr>
+          <a:lstStyle/>
+          <a:p>
+            <a:pPr algn="ctr"/>
+            <a:r>
+              <a:rPr sz="900" b="0">
+                <a:solidFill>
+                  <a:srgbClr val="9CA3AF"/>
+                </a:solidFill>
+                <a:latin typeface="Calibri"/>
+              </a:rPr>
+              <a:t>20.07.2026</a:t>
+            </a:r>
+          </a:p>
+        </p:txBody>
+      </p:sp>
+    </p:spTree>
+  </p:cSld>
+  <p:clrMapOvr>
+    <a:masterClrMapping/>
+  </p:clrMapOvr>
+  <mc:AlternateContent xmlns:mc="http://schemas.openxmlformats.org/markup-compatibility/2006">
+    <mc:Choice xmlns:p159="http://schemas.microsoft.com/office/powerpoint/2015/09/main" Requires="p159">
+      <p:transition spd="slow">
+        <p159:morph option="byObject"/>
+      </p:transition>
+    </mc:Choice>
+    <mc:Fallback>
+      <p:transition spd="slow">
+        <p:fade/>
+      </p:transition>
+    </mc:Fallback>
+  </mc:AlternateContent>
+</p:sld>
+</file>
+
 <file path=ppt/slides/slide2.xml><?xml version="1.0" encoding="utf-8"?>
 <p:sld xmlns:a="http://schemas.openxmlformats.org/drawingml/2006/main" xmlns:r="http://schemas.openxmlformats.org/officeDocument/2006/relationships" xmlns:p="http://schemas.openxmlformats.org/presentationml/2006/main" xmlns:m="http://schemas.openxmlformats.org/officeDocument/2006/math" xmlns:w="http://schemas.openxmlformats.org/wordprocessingml/2006/main" xmlns:mc="http://schemas.openxmlformats.org/markup-compatibility/2006" showMasterPhAnim="0" showMasterSp="1" show="1">
   <p:cSld name="">
@@ -16081,6 +22533,3298 @@
     </mc:Choice>
     <mc:Fallback>
       <p:transition advClick="1"/>
+    </mc:Fallback>
+  </mc:AlternateContent>
+</p:sld>
+</file>
+
+<file path=ppt/slides/slide20.xml><?xml version="1.0" encoding="utf-8"?>
+<p:sld xmlns:a="http://schemas.openxmlformats.org/drawingml/2006/main" xmlns:p="http://schemas.openxmlformats.org/presentationml/2006/main" xmlns:r="http://schemas.openxmlformats.org/officeDocument/2006/relationships">
+  <p:cSld>
+    <p:spTree>
+      <p:nvGrpSpPr>
+        <p:cNvPr id="1" name=""/>
+        <p:cNvGrpSpPr/>
+        <p:nvPr/>
+      </p:nvGrpSpPr>
+      <p:grpSpPr/>
+      <p:sp>
+        <p:nvSpPr>
+          <p:cNvPr id="2" name="title_m6"/>
+          <p:cNvSpPr txBox="1"/>
+          <p:nvPr/>
+        </p:nvSpPr>
+        <p:spPr>
+          <a:xfrm>
+            <a:off x="457200" y="87474"/>
+            <a:ext cx="8458200" cy="769776"/>
+          </a:xfrm>
+          <a:prstGeom prst="rect">
+            <a:avLst/>
+          </a:prstGeom>
+          <a:noFill/>
+        </p:spPr>
+        <p:txBody>
+          <a:bodyPr wrap="square" lIns="0" rIns="0" tIns="0" bIns="0" anchor="b">
+            <a:spAutoFit/>
+          </a:bodyPr>
+          <a:lstStyle/>
+          <a:p>
+            <a:pPr algn="l"/>
+            <a:r>
+              <a:rPr sz="1800" b="0">
+                <a:solidFill>
+                  <a:srgbClr val="808080"/>
+                </a:solidFill>
+                <a:latin typeface="Calibri"/>
+              </a:rPr>
+              <a:t>FL-Trilemma: Project Timeline</a:t>
+            </a:r>
+          </a:p>
+        </p:txBody>
+      </p:sp>
+      <p:cxnSp>
+        <p:nvCxnSpPr>
+          <p:cNvPr id="4" name="divider_m6"/>
+          <p:cNvCxnSpPr/>
+          <p:nvPr/>
+        </p:nvCxnSpPr>
+        <p:spPr>
+          <a:xfrm>
+            <a:off x="571500" y="952500"/>
+            <a:ext cx="8001000" cy="0"/>
+          </a:xfrm>
+          <a:prstGeom prst="line">
+            <a:avLst/>
+          </a:prstGeom>
+          <a:ln w="9525">
+            <a:solidFill>
+              <a:srgbClr val="B3B3B3"/>
+            </a:solidFill>
+          </a:ln>
+          <a:effectLst/>
+        </p:spPr>
+        <p:style>
+          <a:lnRef idx="2">
+            <a:schemeClr val="accent1"/>
+          </a:lnRef>
+          <a:fillRef idx="0">
+            <a:schemeClr val="accent1"/>
+          </a:fillRef>
+          <a:effectRef idx="1">
+            <a:schemeClr val="accent1"/>
+          </a:effectRef>
+          <a:fontRef idx="minor">
+            <a:schemeClr val="tx1"/>
+          </a:fontRef>
+        </p:style>
+      </p:cxnSp>
+      <p:sp>
+        <p:nvSpPr>
+          <p:cNvPr id="5" name="content_placeholder_m6"/>
+          <p:cNvSpPr/>
+          <p:nvPr/>
+        </p:nvSpPr>
+        <p:spPr>
+          <a:xfrm>
+            <a:off x="762000" y="1095375"/>
+            <a:ext cx="1619250" cy="1047750"/>
+          </a:xfrm>
+          <a:prstGeom prst="roundRect">
+            <a:avLst>
+              <a:gd name="adj" fmla="val 6000"/>
+            </a:avLst>
+          </a:prstGeom>
+          <a:solidFill>
+            <a:srgbClr val="EDEEF0"/>
+          </a:solidFill>
+          <a:ln w="9525">
+            <a:solidFill>
+              <a:srgbClr val="E5E7EB"/>
+            </a:solidFill>
+            <a:prstDash val="dash"/>
+          </a:ln>
+          <a:effectLst/>
+        </p:spPr>
+        <p:style>
+          <a:lnRef idx="1">
+            <a:schemeClr val="accent1"/>
+          </a:lnRef>
+          <a:fillRef idx="3">
+            <a:schemeClr val="accent1"/>
+          </a:fillRef>
+          <a:effectRef idx="2">
+            <a:schemeClr val="accent1"/>
+          </a:effectRef>
+          <a:fontRef idx="minor">
+            <a:schemeClr val="lt1"/>
+          </a:fontRef>
+        </p:style>
+        <p:txBody>
+          <a:bodyPr rtlCol="0" anchor="ctr" wrap="square" lIns="120000" rIns="120000"/>
+          <a:lstStyle/>
+          <a:p>
+            <a:pPr algn="ctr"/>
+            <a:r>
+              <a:rPr sz="550">
+                <a:solidFill>
+                  <a:srgbClr val="9CA3AF"/>
+                </a:solidFill>
+                <a:latin typeface="Consolas"/>
+              </a:rPr>
+              <a:t>ACCURACY / RUNTIME CHARTS</a:t>
+            </a:r>
+          </a:p>
+        </p:txBody>
+      </p:sp>
+      <p:sp>
+        <p:nvSpPr>
+          <p:cNvPr id="6" name="content_pill_m6"/>
+          <p:cNvSpPr/>
+          <p:nvPr/>
+        </p:nvSpPr>
+        <p:spPr>
+          <a:xfrm>
+            <a:off x="2571750" y="1095375"/>
+            <a:ext cx="825000" cy="188082"/>
+          </a:xfrm>
+          <a:prstGeom prst="roundRect">
+            <a:avLst>
+              <a:gd name="adj" fmla="val 50000"/>
+            </a:avLst>
+          </a:prstGeom>
+          <a:solidFill>
+            <a:srgbClr val="C9E1FF"/>
+          </a:solidFill>
+          <a:ln>
+            <a:noFill/>
+          </a:ln>
+          <a:effectLst/>
+        </p:spPr>
+        <p:style>
+          <a:lnRef idx="1">
+            <a:schemeClr val="accent1"/>
+          </a:lnRef>
+          <a:fillRef idx="3">
+            <a:schemeClr val="accent1"/>
+          </a:fillRef>
+          <a:effectRef idx="2">
+            <a:schemeClr val="accent1"/>
+          </a:effectRef>
+          <a:fontRef idx="minor">
+            <a:schemeClr val="lt1"/>
+          </a:fontRef>
+        </p:style>
+        <p:txBody>
+          <a:bodyPr rtlCol="0" anchor="ctr" lIns="60000" rIns="60000" tIns="0" bIns="0" wrap="none"/>
+          <a:lstStyle/>
+          <a:p>
+            <a:pPr algn="ctr"/>
+            <a:r>
+              <a:rPr sz="900" b="1">
+                <a:solidFill>
+                  <a:srgbClr val="325786"/>
+                </a:solidFill>
+                <a:latin typeface="Calibri"/>
+              </a:rPr>
+              <a:t>09.07.2026</a:t>
+            </a:r>
+          </a:p>
+        </p:txBody>
+      </p:sp>
+      <p:sp>
+        <p:nvSpPr>
+          <p:cNvPr id="7" name="content_headline_m6"/>
+          <p:cNvSpPr txBox="1"/>
+          <p:nvPr/>
+        </p:nvSpPr>
+        <p:spPr>
+          <a:xfrm>
+            <a:off x="2571750" y="1369126"/>
+            <a:ext cx="5000625" cy="239316"/>
+          </a:xfrm>
+          <a:prstGeom prst="rect">
+            <a:avLst/>
+          </a:prstGeom>
+          <a:noFill/>
+        </p:spPr>
+        <p:txBody>
+          <a:bodyPr wrap="square" lIns="0" rIns="0" tIns="0" bIns="0">
+            <a:spAutoFit/>
+          </a:bodyPr>
+          <a:lstStyle/>
+          <a:p>
+            <a:pPr algn="l"/>
+            <a:r>
+              <a:rPr sz="1500" b="1">
+                <a:solidFill>
+                  <a:srgbClr val="1F2023"/>
+                </a:solidFill>
+                <a:latin typeface="Calibri"/>
+              </a:rPr>
+              <a:t>Unlock of Computational Resources</a:t>
+            </a:r>
+          </a:p>
+        </p:txBody>
+      </p:sp>
+      <p:sp>
+        <p:nvSpPr>
+          <p:cNvPr id="8" name="content_bullets_m6"/>
+          <p:cNvSpPr txBox="1"/>
+          <p:nvPr/>
+        </p:nvSpPr>
+        <p:spPr>
+          <a:xfrm>
+            <a:off x="2571750" y="1637017"/>
+            <a:ext cx="5000625" cy="564244"/>
+          </a:xfrm>
+          <a:prstGeom prst="rect">
+            <a:avLst/>
+          </a:prstGeom>
+          <a:noFill/>
+        </p:spPr>
+        <p:txBody>
+          <a:bodyPr wrap="square" lIns="0" rIns="0" tIns="0" bIns="0">
+            <a:spAutoFit/>
+          </a:bodyPr>
+          <a:lstStyle/>
+          <a:p>
+            <a:pPr>
+              <a:spcAft>
+                <a:spcPts val="600"/>
+              </a:spcAft>
+            </a:pPr>
+            <a:r>
+              <a:rPr sz="975" b="1">
+                <a:solidFill>
+                  <a:srgbClr val="C1212A"/>
+                </a:solidFill>
+                <a:latin typeface="Calibri"/>
+              </a:rPr>
+              <a:t>-  </a:t>
+            </a:r>
+            <a:r>
+              <a:rPr sz="975">
+                <a:solidFill>
+                  <a:srgbClr val="325786"/>
+                </a:solidFill>
+                <a:latin typeface="Calibri"/>
+              </a:rPr>
+              <a:t>Larger scale testing unlocked</a:t>
+            </a:r>
+          </a:p>
+          <a:p>
+            <a:pPr>
+              <a:spcAft>
+                <a:spcPts val="600"/>
+              </a:spcAft>
+            </a:pPr>
+            <a:r>
+              <a:rPr sz="975" b="1">
+                <a:solidFill>
+                  <a:srgbClr val="C1212A"/>
+                </a:solidFill>
+                <a:latin typeface="Calibri"/>
+              </a:rPr>
+              <a:t>-  </a:t>
+            </a:r>
+            <a:r>
+              <a:rPr sz="975">
+                <a:solidFill>
+                  <a:srgbClr val="325786"/>
+                </a:solidFill>
+                <a:latin typeface="Calibri"/>
+              </a:rPr>
+              <a:t>GPU access and incrementally stable code foundation allows for CIFAR-10 testing</a:t>
+            </a:r>
+          </a:p>
+          <a:p>
+            <a:pPr>
+              <a:spcAft>
+                <a:spcPts val="600"/>
+              </a:spcAft>
+            </a:pPr>
+            <a:r>
+              <a:rPr sz="975" b="1">
+                <a:solidFill>
+                  <a:srgbClr val="C1212A"/>
+                </a:solidFill>
+                <a:latin typeface="Calibri"/>
+              </a:rPr>
+              <a:t>-  </a:t>
+            </a:r>
+            <a:r>
+              <a:rPr sz="975">
+                <a:solidFill>
+                  <a:srgbClr val="325786"/>
+                </a:solidFill>
+                <a:latin typeface="Calibri"/>
+              </a:rPr>
+              <a:t>First results for large runs are coming through</a:t>
+            </a:r>
+          </a:p>
+        </p:txBody>
+      </p:sp>
+      <p:sp>
+        <p:nvSpPr>
+          <p:cNvPr id="9" name="!!tl_track"/>
+          <p:cNvSpPr/>
+          <p:nvPr/>
+        </p:nvSpPr>
+        <p:spPr>
+          <a:xfrm>
+            <a:off x="952500" y="2847919"/>
+            <a:ext cx="7239000" cy="18976"/>
+          </a:xfrm>
+          <a:prstGeom prst="roundRect">
+            <a:avLst>
+              <a:gd name="adj" fmla="val 50000"/>
+            </a:avLst>
+          </a:prstGeom>
+          <a:solidFill>
+            <a:srgbClr val="E2E2E2"/>
+          </a:solidFill>
+          <a:ln>
+            <a:noFill/>
+          </a:ln>
+          <a:effectLst/>
+        </p:spPr>
+        <p:style>
+          <a:lnRef idx="1">
+            <a:schemeClr val="accent1"/>
+          </a:lnRef>
+          <a:fillRef idx="3">
+            <a:schemeClr val="accent1"/>
+          </a:fillRef>
+          <a:effectRef idx="2">
+            <a:schemeClr val="accent1"/>
+          </a:effectRef>
+          <a:fontRef idx="minor">
+            <a:schemeClr val="lt1"/>
+          </a:fontRef>
+        </p:style>
+        <p:txBody>
+          <a:bodyPr rtlCol="0" anchor="ctr"/>
+          <a:lstStyle/>
+          <a:p>
+            <a:pPr algn="ctr"/>
+          </a:p>
+        </p:txBody>
+      </p:sp>
+      <p:sp>
+        <p:nvSpPr>
+          <p:cNvPr id="10" name="!!tl_fill"/>
+          <p:cNvSpPr/>
+          <p:nvPr/>
+        </p:nvSpPr>
+        <p:spPr>
+          <a:xfrm>
+            <a:off x="952500" y="2847919"/>
+            <a:ext cx="5429250" cy="18976"/>
+          </a:xfrm>
+          <a:prstGeom prst="roundRect">
+            <a:avLst>
+              <a:gd name="adj" fmla="val 50000"/>
+            </a:avLst>
+          </a:prstGeom>
+          <a:solidFill>
+            <a:srgbClr val="325786"/>
+          </a:solidFill>
+          <a:ln>
+            <a:noFill/>
+          </a:ln>
+          <a:effectLst/>
+        </p:spPr>
+        <p:style>
+          <a:lnRef idx="1">
+            <a:schemeClr val="accent1"/>
+          </a:lnRef>
+          <a:fillRef idx="3">
+            <a:schemeClr val="accent1"/>
+          </a:fillRef>
+          <a:effectRef idx="2">
+            <a:schemeClr val="accent1"/>
+          </a:effectRef>
+          <a:fontRef idx="minor">
+            <a:schemeClr val="lt1"/>
+          </a:fontRef>
+        </p:style>
+        <p:txBody>
+          <a:bodyPr rtlCol="0" anchor="ctr"/>
+          <a:lstStyle/>
+          <a:p>
+            <a:pPr algn="ctr"/>
+          </a:p>
+        </p:txBody>
+      </p:sp>
+      <p:sp>
+        <p:nvSpPr>
+          <p:cNvPr id="11" name="!!tl_dot_1"/>
+          <p:cNvSpPr/>
+          <p:nvPr/>
+        </p:nvSpPr>
+        <p:spPr>
+          <a:xfrm>
+            <a:off x="914400" y="2819400"/>
+            <a:ext cx="76200" cy="76200"/>
+          </a:xfrm>
+          <a:prstGeom prst="ellipse">
+            <a:avLst/>
+          </a:prstGeom>
+          <a:solidFill>
+            <a:srgbClr val="D1D5DB"/>
+          </a:solidFill>
+          <a:ln>
+            <a:noFill/>
+          </a:ln>
+          <a:effectLst/>
+        </p:spPr>
+        <p:style>
+          <a:lnRef idx="1">
+            <a:schemeClr val="accent1"/>
+          </a:lnRef>
+          <a:fillRef idx="3">
+            <a:schemeClr val="accent1"/>
+          </a:fillRef>
+          <a:effectRef idx="2">
+            <a:schemeClr val="accent1"/>
+          </a:effectRef>
+          <a:fontRef idx="minor">
+            <a:schemeClr val="lt1"/>
+          </a:fontRef>
+        </p:style>
+        <p:txBody>
+          <a:bodyPr rtlCol="0" anchor="ctr"/>
+          <a:lstStyle/>
+          <a:p>
+            <a:pPr algn="ctr"/>
+          </a:p>
+        </p:txBody>
+      </p:sp>
+      <p:sp>
+        <p:nvSpPr>
+          <p:cNvPr id="12" name="lbl_1_s6"/>
+          <p:cNvSpPr txBox="1"/>
+          <p:nvPr/>
+        </p:nvSpPr>
+        <p:spPr>
+          <a:xfrm>
+            <a:off x="666750" y="3009863"/>
+            <a:ext cx="571500" cy="150019"/>
+          </a:xfrm>
+          <a:prstGeom prst="rect">
+            <a:avLst/>
+          </a:prstGeom>
+          <a:noFill/>
+        </p:spPr>
+        <p:txBody>
+          <a:bodyPr wrap="square" lIns="0" rIns="0" tIns="0" bIns="0">
+            <a:spAutoFit/>
+          </a:bodyPr>
+          <a:lstStyle/>
+          <a:p>
+            <a:pPr algn="ctr"/>
+            <a:r>
+              <a:rPr sz="900" b="0">
+                <a:solidFill>
+                  <a:srgbClr val="9CA3AF"/>
+                </a:solidFill>
+                <a:latin typeface="Calibri"/>
+              </a:rPr>
+              <a:t>09.04.2026</a:t>
+            </a:r>
+          </a:p>
+        </p:txBody>
+      </p:sp>
+      <p:sp>
+        <p:nvSpPr>
+          <p:cNvPr id="13" name="!!tl_dot_2"/>
+          <p:cNvSpPr/>
+          <p:nvPr/>
+        </p:nvSpPr>
+        <p:spPr>
+          <a:xfrm>
+            <a:off x="1819275" y="2819400"/>
+            <a:ext cx="76200" cy="76200"/>
+          </a:xfrm>
+          <a:prstGeom prst="ellipse">
+            <a:avLst/>
+          </a:prstGeom>
+          <a:solidFill>
+            <a:srgbClr val="D1D5DB"/>
+          </a:solidFill>
+          <a:ln>
+            <a:noFill/>
+          </a:ln>
+          <a:effectLst/>
+        </p:spPr>
+        <p:style>
+          <a:lnRef idx="1">
+            <a:schemeClr val="accent1"/>
+          </a:lnRef>
+          <a:fillRef idx="3">
+            <a:schemeClr val="accent1"/>
+          </a:fillRef>
+          <a:effectRef idx="2">
+            <a:schemeClr val="accent1"/>
+          </a:effectRef>
+          <a:fontRef idx="minor">
+            <a:schemeClr val="lt1"/>
+          </a:fontRef>
+        </p:style>
+        <p:txBody>
+          <a:bodyPr rtlCol="0" anchor="ctr"/>
+          <a:lstStyle/>
+          <a:p>
+            <a:pPr algn="ctr"/>
+          </a:p>
+        </p:txBody>
+      </p:sp>
+      <p:sp>
+        <p:nvSpPr>
+          <p:cNvPr id="14" name="lbl_2_s6"/>
+          <p:cNvSpPr txBox="1"/>
+          <p:nvPr/>
+        </p:nvSpPr>
+        <p:spPr>
+          <a:xfrm>
+            <a:off x="1571625" y="3009863"/>
+            <a:ext cx="571500" cy="150019"/>
+          </a:xfrm>
+          <a:prstGeom prst="rect">
+            <a:avLst/>
+          </a:prstGeom>
+          <a:noFill/>
+        </p:spPr>
+        <p:txBody>
+          <a:bodyPr wrap="square" lIns="0" rIns="0" tIns="0" bIns="0">
+            <a:spAutoFit/>
+          </a:bodyPr>
+          <a:lstStyle/>
+          <a:p>
+            <a:pPr algn="ctr"/>
+            <a:r>
+              <a:rPr sz="900" b="0">
+                <a:solidFill>
+                  <a:srgbClr val="9CA3AF"/>
+                </a:solidFill>
+                <a:latin typeface="Calibri"/>
+              </a:rPr>
+              <a:t>16.04.2026</a:t>
+            </a:r>
+          </a:p>
+        </p:txBody>
+      </p:sp>
+      <p:sp>
+        <p:nvSpPr>
+          <p:cNvPr id="15" name="!!tl_dot_3"/>
+          <p:cNvSpPr/>
+          <p:nvPr/>
+        </p:nvSpPr>
+        <p:spPr>
+          <a:xfrm>
+            <a:off x="2724150" y="2819400"/>
+            <a:ext cx="76200" cy="76200"/>
+          </a:xfrm>
+          <a:prstGeom prst="ellipse">
+            <a:avLst/>
+          </a:prstGeom>
+          <a:solidFill>
+            <a:srgbClr val="D1D5DB"/>
+          </a:solidFill>
+          <a:ln>
+            <a:noFill/>
+          </a:ln>
+          <a:effectLst/>
+        </p:spPr>
+        <p:style>
+          <a:lnRef idx="1">
+            <a:schemeClr val="accent1"/>
+          </a:lnRef>
+          <a:fillRef idx="3">
+            <a:schemeClr val="accent1"/>
+          </a:fillRef>
+          <a:effectRef idx="2">
+            <a:schemeClr val="accent1"/>
+          </a:effectRef>
+          <a:fontRef idx="minor">
+            <a:schemeClr val="lt1"/>
+          </a:fontRef>
+        </p:style>
+        <p:txBody>
+          <a:bodyPr rtlCol="0" anchor="ctr"/>
+          <a:lstStyle/>
+          <a:p>
+            <a:pPr algn="ctr"/>
+          </a:p>
+        </p:txBody>
+      </p:sp>
+      <p:sp>
+        <p:nvSpPr>
+          <p:cNvPr id="16" name="lbl_3_s6"/>
+          <p:cNvSpPr txBox="1"/>
+          <p:nvPr/>
+        </p:nvSpPr>
+        <p:spPr>
+          <a:xfrm>
+            <a:off x="2476500" y="3009863"/>
+            <a:ext cx="571500" cy="150019"/>
+          </a:xfrm>
+          <a:prstGeom prst="rect">
+            <a:avLst/>
+          </a:prstGeom>
+          <a:noFill/>
+        </p:spPr>
+        <p:txBody>
+          <a:bodyPr wrap="square" lIns="0" rIns="0" tIns="0" bIns="0">
+            <a:spAutoFit/>
+          </a:bodyPr>
+          <a:lstStyle/>
+          <a:p>
+            <a:pPr algn="ctr"/>
+            <a:r>
+              <a:rPr sz="900" b="0">
+                <a:solidFill>
+                  <a:srgbClr val="9CA3AF"/>
+                </a:solidFill>
+                <a:latin typeface="Calibri"/>
+              </a:rPr>
+              <a:t>30.04.2026</a:t>
+            </a:r>
+          </a:p>
+        </p:txBody>
+      </p:sp>
+      <p:sp>
+        <p:nvSpPr>
+          <p:cNvPr id="17" name="!!tl_dot_4"/>
+          <p:cNvSpPr/>
+          <p:nvPr/>
+        </p:nvSpPr>
+        <p:spPr>
+          <a:xfrm>
+            <a:off x="3629025" y="2819400"/>
+            <a:ext cx="76200" cy="76200"/>
+          </a:xfrm>
+          <a:prstGeom prst="ellipse">
+            <a:avLst/>
+          </a:prstGeom>
+          <a:solidFill>
+            <a:srgbClr val="D1D5DB"/>
+          </a:solidFill>
+          <a:ln>
+            <a:noFill/>
+          </a:ln>
+          <a:effectLst/>
+        </p:spPr>
+        <p:style>
+          <a:lnRef idx="1">
+            <a:schemeClr val="accent1"/>
+          </a:lnRef>
+          <a:fillRef idx="3">
+            <a:schemeClr val="accent1"/>
+          </a:fillRef>
+          <a:effectRef idx="2">
+            <a:schemeClr val="accent1"/>
+          </a:effectRef>
+          <a:fontRef idx="minor">
+            <a:schemeClr val="lt1"/>
+          </a:fontRef>
+        </p:style>
+        <p:txBody>
+          <a:bodyPr rtlCol="0" anchor="ctr"/>
+          <a:lstStyle/>
+          <a:p>
+            <a:pPr algn="ctr"/>
+          </a:p>
+        </p:txBody>
+      </p:sp>
+      <p:sp>
+        <p:nvSpPr>
+          <p:cNvPr id="18" name="lbl_4_s6"/>
+          <p:cNvSpPr txBox="1"/>
+          <p:nvPr/>
+        </p:nvSpPr>
+        <p:spPr>
+          <a:xfrm>
+            <a:off x="3381375" y="3009863"/>
+            <a:ext cx="571500" cy="150019"/>
+          </a:xfrm>
+          <a:prstGeom prst="rect">
+            <a:avLst/>
+          </a:prstGeom>
+          <a:noFill/>
+        </p:spPr>
+        <p:txBody>
+          <a:bodyPr wrap="square" lIns="0" rIns="0" tIns="0" bIns="0">
+            <a:spAutoFit/>
+          </a:bodyPr>
+          <a:lstStyle/>
+          <a:p>
+            <a:pPr algn="ctr"/>
+            <a:r>
+              <a:rPr sz="900" b="0">
+                <a:solidFill>
+                  <a:srgbClr val="9CA3AF"/>
+                </a:solidFill>
+                <a:latin typeface="Calibri"/>
+              </a:rPr>
+              <a:t>~21.05.2026</a:t>
+            </a:r>
+          </a:p>
+        </p:txBody>
+      </p:sp>
+      <p:sp>
+        <p:nvSpPr>
+          <p:cNvPr id="19" name="!!tl_dot_5"/>
+          <p:cNvSpPr/>
+          <p:nvPr/>
+        </p:nvSpPr>
+        <p:spPr>
+          <a:xfrm>
+            <a:off x="4533900" y="2819400"/>
+            <a:ext cx="76200" cy="76200"/>
+          </a:xfrm>
+          <a:prstGeom prst="ellipse">
+            <a:avLst/>
+          </a:prstGeom>
+          <a:solidFill>
+            <a:srgbClr val="D1D5DB"/>
+          </a:solidFill>
+          <a:ln>
+            <a:noFill/>
+          </a:ln>
+          <a:effectLst/>
+        </p:spPr>
+        <p:style>
+          <a:lnRef idx="1">
+            <a:schemeClr val="accent1"/>
+          </a:lnRef>
+          <a:fillRef idx="3">
+            <a:schemeClr val="accent1"/>
+          </a:fillRef>
+          <a:effectRef idx="2">
+            <a:schemeClr val="accent1"/>
+          </a:effectRef>
+          <a:fontRef idx="minor">
+            <a:schemeClr val="lt1"/>
+          </a:fontRef>
+        </p:style>
+        <p:txBody>
+          <a:bodyPr rtlCol="0" anchor="ctr"/>
+          <a:lstStyle/>
+          <a:p>
+            <a:pPr algn="ctr"/>
+          </a:p>
+        </p:txBody>
+      </p:sp>
+      <p:sp>
+        <p:nvSpPr>
+          <p:cNvPr id="20" name="lbl_5_s6"/>
+          <p:cNvSpPr txBox="1"/>
+          <p:nvPr/>
+        </p:nvSpPr>
+        <p:spPr>
+          <a:xfrm>
+            <a:off x="4286250" y="3009863"/>
+            <a:ext cx="571500" cy="150019"/>
+          </a:xfrm>
+          <a:prstGeom prst="rect">
+            <a:avLst/>
+          </a:prstGeom>
+          <a:noFill/>
+        </p:spPr>
+        <p:txBody>
+          <a:bodyPr wrap="square" lIns="0" rIns="0" tIns="0" bIns="0">
+            <a:spAutoFit/>
+          </a:bodyPr>
+          <a:lstStyle/>
+          <a:p>
+            <a:pPr algn="ctr"/>
+            <a:r>
+              <a:rPr sz="900" b="0">
+                <a:solidFill>
+                  <a:srgbClr val="9CA3AF"/>
+                </a:solidFill>
+                <a:latin typeface="Calibri"/>
+              </a:rPr>
+              <a:t>18.06.2026</a:t>
+            </a:r>
+          </a:p>
+        </p:txBody>
+      </p:sp>
+      <p:sp>
+        <p:nvSpPr>
+          <p:cNvPr id="21" name="!!tl_dot_6"/>
+          <p:cNvSpPr/>
+          <p:nvPr/>
+        </p:nvSpPr>
+        <p:spPr>
+          <a:xfrm>
+            <a:off x="5438775" y="2819400"/>
+            <a:ext cx="76200" cy="76200"/>
+          </a:xfrm>
+          <a:prstGeom prst="ellipse">
+            <a:avLst/>
+          </a:prstGeom>
+          <a:solidFill>
+            <a:srgbClr val="D1D5DB"/>
+          </a:solidFill>
+          <a:ln>
+            <a:noFill/>
+          </a:ln>
+          <a:effectLst/>
+        </p:spPr>
+        <p:style>
+          <a:lnRef idx="1">
+            <a:schemeClr val="accent1"/>
+          </a:lnRef>
+          <a:fillRef idx="3">
+            <a:schemeClr val="accent1"/>
+          </a:fillRef>
+          <a:effectRef idx="2">
+            <a:schemeClr val="accent1"/>
+          </a:effectRef>
+          <a:fontRef idx="minor">
+            <a:schemeClr val="lt1"/>
+          </a:fontRef>
+        </p:style>
+        <p:txBody>
+          <a:bodyPr rtlCol="0" anchor="ctr"/>
+          <a:lstStyle/>
+          <a:p>
+            <a:pPr algn="ctr"/>
+          </a:p>
+        </p:txBody>
+      </p:sp>
+      <p:sp>
+        <p:nvSpPr>
+          <p:cNvPr id="22" name="lbl_6_s6"/>
+          <p:cNvSpPr txBox="1"/>
+          <p:nvPr/>
+        </p:nvSpPr>
+        <p:spPr>
+          <a:xfrm>
+            <a:off x="5191125" y="3009863"/>
+            <a:ext cx="571500" cy="150019"/>
+          </a:xfrm>
+          <a:prstGeom prst="rect">
+            <a:avLst/>
+          </a:prstGeom>
+          <a:noFill/>
+        </p:spPr>
+        <p:txBody>
+          <a:bodyPr wrap="square" lIns="0" rIns="0" tIns="0" bIns="0">
+            <a:spAutoFit/>
+          </a:bodyPr>
+          <a:lstStyle/>
+          <a:p>
+            <a:pPr algn="ctr"/>
+            <a:r>
+              <a:rPr sz="900" b="0">
+                <a:solidFill>
+                  <a:srgbClr val="9CA3AF"/>
+                </a:solidFill>
+                <a:latin typeface="Calibri"/>
+              </a:rPr>
+              <a:t>25.06.2026</a:t>
+            </a:r>
+          </a:p>
+        </p:txBody>
+      </p:sp>
+      <p:sp>
+        <p:nvSpPr>
+          <p:cNvPr id="23" name="!!tl_dot_7"/>
+          <p:cNvSpPr/>
+          <p:nvPr/>
+        </p:nvSpPr>
+        <p:spPr>
+          <a:xfrm>
+            <a:off x="6315075" y="2790825"/>
+            <a:ext cx="133350" cy="133350"/>
+          </a:xfrm>
+          <a:prstGeom prst="ellipse">
+            <a:avLst/>
+          </a:prstGeom>
+          <a:solidFill>
+            <a:srgbClr val="325786"/>
+          </a:solidFill>
+          <a:ln>
+            <a:noFill/>
+          </a:ln>
+          <a:effectLst/>
+        </p:spPr>
+        <p:style>
+          <a:lnRef idx="1">
+            <a:schemeClr val="accent1"/>
+          </a:lnRef>
+          <a:fillRef idx="3">
+            <a:schemeClr val="accent1"/>
+          </a:fillRef>
+          <a:effectRef idx="2">
+            <a:schemeClr val="accent1"/>
+          </a:effectRef>
+          <a:fontRef idx="minor">
+            <a:schemeClr val="lt1"/>
+          </a:fontRef>
+        </p:style>
+        <p:txBody>
+          <a:bodyPr rtlCol="0" anchor="ctr"/>
+          <a:lstStyle/>
+          <a:p>
+            <a:pPr algn="ctr"/>
+          </a:p>
+        </p:txBody>
+      </p:sp>
+      <p:sp>
+        <p:nvSpPr>
+          <p:cNvPr id="24" name="lbl_7_s6"/>
+          <p:cNvSpPr txBox="1"/>
+          <p:nvPr/>
+        </p:nvSpPr>
+        <p:spPr>
+          <a:xfrm>
+            <a:off x="6096000" y="3009863"/>
+            <a:ext cx="571500" cy="150019"/>
+          </a:xfrm>
+          <a:prstGeom prst="rect">
+            <a:avLst/>
+          </a:prstGeom>
+          <a:noFill/>
+        </p:spPr>
+        <p:txBody>
+          <a:bodyPr wrap="square" lIns="0" rIns="0" tIns="0" bIns="0">
+            <a:spAutoFit/>
+          </a:bodyPr>
+          <a:lstStyle/>
+          <a:p>
+            <a:pPr algn="ctr"/>
+            <a:r>
+              <a:rPr sz="900" b="1">
+                <a:solidFill>
+                  <a:srgbClr val="1F2023"/>
+                </a:solidFill>
+                <a:latin typeface="Calibri"/>
+              </a:rPr>
+              <a:t>09.07.2026</a:t>
+            </a:r>
+          </a:p>
+        </p:txBody>
+      </p:sp>
+      <p:sp>
+        <p:nvSpPr>
+          <p:cNvPr id="25" name="!!tl_dot_8"/>
+          <p:cNvSpPr/>
+          <p:nvPr/>
+        </p:nvSpPr>
+        <p:spPr>
+          <a:xfrm>
+            <a:off x="7248525" y="2819400"/>
+            <a:ext cx="76200" cy="76200"/>
+          </a:xfrm>
+          <a:prstGeom prst="ellipse">
+            <a:avLst/>
+          </a:prstGeom>
+          <a:solidFill>
+            <a:srgbClr val="D1D5DB"/>
+          </a:solidFill>
+          <a:ln>
+            <a:noFill/>
+          </a:ln>
+          <a:effectLst/>
+        </p:spPr>
+        <p:style>
+          <a:lnRef idx="1">
+            <a:schemeClr val="accent1"/>
+          </a:lnRef>
+          <a:fillRef idx="3">
+            <a:schemeClr val="accent1"/>
+          </a:fillRef>
+          <a:effectRef idx="2">
+            <a:schemeClr val="accent1"/>
+          </a:effectRef>
+          <a:fontRef idx="minor">
+            <a:schemeClr val="lt1"/>
+          </a:fontRef>
+        </p:style>
+        <p:txBody>
+          <a:bodyPr rtlCol="0" anchor="ctr"/>
+          <a:lstStyle/>
+          <a:p>
+            <a:pPr algn="ctr"/>
+          </a:p>
+        </p:txBody>
+      </p:sp>
+      <p:sp>
+        <p:nvSpPr>
+          <p:cNvPr id="26" name="lbl_8_s6"/>
+          <p:cNvSpPr txBox="1"/>
+          <p:nvPr/>
+        </p:nvSpPr>
+        <p:spPr>
+          <a:xfrm>
+            <a:off x="7000875" y="3009863"/>
+            <a:ext cx="571500" cy="150019"/>
+          </a:xfrm>
+          <a:prstGeom prst="rect">
+            <a:avLst/>
+          </a:prstGeom>
+          <a:noFill/>
+        </p:spPr>
+        <p:txBody>
+          <a:bodyPr wrap="square" lIns="0" rIns="0" tIns="0" bIns="0">
+            <a:spAutoFit/>
+          </a:bodyPr>
+          <a:lstStyle/>
+          <a:p>
+            <a:pPr algn="ctr"/>
+            <a:r>
+              <a:rPr sz="900" b="0">
+                <a:solidFill>
+                  <a:srgbClr val="9CA3AF"/>
+                </a:solidFill>
+                <a:latin typeface="Calibri"/>
+              </a:rPr>
+              <a:t>16.07.2026</a:t>
+            </a:r>
+          </a:p>
+        </p:txBody>
+      </p:sp>
+      <p:sp>
+        <p:nvSpPr>
+          <p:cNvPr id="27" name="!!tl_dot_9"/>
+          <p:cNvSpPr/>
+          <p:nvPr/>
+        </p:nvSpPr>
+        <p:spPr>
+          <a:xfrm>
+            <a:off x="8153400" y="2819400"/>
+            <a:ext cx="76200" cy="76200"/>
+          </a:xfrm>
+          <a:prstGeom prst="ellipse">
+            <a:avLst/>
+          </a:prstGeom>
+          <a:solidFill>
+            <a:srgbClr val="D1D5DB"/>
+          </a:solidFill>
+          <a:ln>
+            <a:noFill/>
+          </a:ln>
+          <a:effectLst/>
+        </p:spPr>
+        <p:style>
+          <a:lnRef idx="1">
+            <a:schemeClr val="accent1"/>
+          </a:lnRef>
+          <a:fillRef idx="3">
+            <a:schemeClr val="accent1"/>
+          </a:fillRef>
+          <a:effectRef idx="2">
+            <a:schemeClr val="accent1"/>
+          </a:effectRef>
+          <a:fontRef idx="minor">
+            <a:schemeClr val="lt1"/>
+          </a:fontRef>
+        </p:style>
+        <p:txBody>
+          <a:bodyPr rtlCol="0" anchor="ctr"/>
+          <a:lstStyle/>
+          <a:p>
+            <a:pPr algn="ctr"/>
+          </a:p>
+        </p:txBody>
+      </p:sp>
+      <p:sp>
+        <p:nvSpPr>
+          <p:cNvPr id="28" name="lbl_9_s6"/>
+          <p:cNvSpPr txBox="1"/>
+          <p:nvPr/>
+        </p:nvSpPr>
+        <p:spPr>
+          <a:xfrm>
+            <a:off x="7905750" y="3009863"/>
+            <a:ext cx="571500" cy="150019"/>
+          </a:xfrm>
+          <a:prstGeom prst="rect">
+            <a:avLst/>
+          </a:prstGeom>
+          <a:noFill/>
+        </p:spPr>
+        <p:txBody>
+          <a:bodyPr wrap="square" lIns="0" rIns="0" tIns="0" bIns="0">
+            <a:spAutoFit/>
+          </a:bodyPr>
+          <a:lstStyle/>
+          <a:p>
+            <a:pPr algn="ctr"/>
+            <a:r>
+              <a:rPr sz="900" b="0">
+                <a:solidFill>
+                  <a:srgbClr val="9CA3AF"/>
+                </a:solidFill>
+                <a:latin typeface="Calibri"/>
+              </a:rPr>
+              <a:t>20.07.2026</a:t>
+            </a:r>
+          </a:p>
+        </p:txBody>
+      </p:sp>
+    </p:spTree>
+  </p:cSld>
+  <p:clrMapOvr>
+    <a:masterClrMapping/>
+  </p:clrMapOvr>
+  <mc:AlternateContent xmlns:mc="http://schemas.openxmlformats.org/markup-compatibility/2006">
+    <mc:Choice xmlns:p159="http://schemas.microsoft.com/office/powerpoint/2015/09/main" Requires="p159">
+      <p:transition spd="slow">
+        <p159:morph option="byObject"/>
+      </p:transition>
+    </mc:Choice>
+    <mc:Fallback>
+      <p:transition spd="slow">
+        <p:fade/>
+      </p:transition>
+    </mc:Fallback>
+  </mc:AlternateContent>
+</p:sld>
+</file>
+
+<file path=ppt/slides/slide21.xml><?xml version="1.0" encoding="utf-8"?>
+<p:sld xmlns:a="http://schemas.openxmlformats.org/drawingml/2006/main" xmlns:p="http://schemas.openxmlformats.org/presentationml/2006/main" xmlns:r="http://schemas.openxmlformats.org/officeDocument/2006/relationships">
+  <p:cSld>
+    <p:spTree>
+      <p:nvGrpSpPr>
+        <p:cNvPr id="1" name=""/>
+        <p:cNvGrpSpPr/>
+        <p:nvPr/>
+      </p:nvGrpSpPr>
+      <p:grpSpPr/>
+      <p:sp>
+        <p:nvSpPr>
+          <p:cNvPr id="2" name="title_m7"/>
+          <p:cNvSpPr txBox="1"/>
+          <p:nvPr/>
+        </p:nvSpPr>
+        <p:spPr>
+          <a:xfrm>
+            <a:off x="457200" y="87474"/>
+            <a:ext cx="8458200" cy="769776"/>
+          </a:xfrm>
+          <a:prstGeom prst="rect">
+            <a:avLst/>
+          </a:prstGeom>
+          <a:noFill/>
+        </p:spPr>
+        <p:txBody>
+          <a:bodyPr wrap="square" lIns="0" rIns="0" tIns="0" bIns="0" anchor="b">
+            <a:spAutoFit/>
+          </a:bodyPr>
+          <a:lstStyle/>
+          <a:p>
+            <a:pPr algn="l"/>
+            <a:r>
+              <a:rPr sz="1800" b="0">
+                <a:solidFill>
+                  <a:srgbClr val="808080"/>
+                </a:solidFill>
+                <a:latin typeface="Calibri"/>
+              </a:rPr>
+              <a:t>FL-Trilemma: Project Timeline</a:t>
+            </a:r>
+          </a:p>
+        </p:txBody>
+      </p:sp>
+      <p:cxnSp>
+        <p:nvCxnSpPr>
+          <p:cNvPr id="4" name="divider_m7"/>
+          <p:cNvCxnSpPr/>
+          <p:nvPr/>
+        </p:nvCxnSpPr>
+        <p:spPr>
+          <a:xfrm>
+            <a:off x="571500" y="952500"/>
+            <a:ext cx="8001000" cy="0"/>
+          </a:xfrm>
+          <a:prstGeom prst="line">
+            <a:avLst/>
+          </a:prstGeom>
+          <a:ln w="9525">
+            <a:solidFill>
+              <a:srgbClr val="B3B3B3"/>
+            </a:solidFill>
+          </a:ln>
+          <a:effectLst/>
+        </p:spPr>
+        <p:style>
+          <a:lnRef idx="2">
+            <a:schemeClr val="accent1"/>
+          </a:lnRef>
+          <a:fillRef idx="0">
+            <a:schemeClr val="accent1"/>
+          </a:fillRef>
+          <a:effectRef idx="1">
+            <a:schemeClr val="accent1"/>
+          </a:effectRef>
+          <a:fontRef idx="minor">
+            <a:schemeClr val="tx1"/>
+          </a:fontRef>
+        </p:style>
+      </p:cxnSp>
+      <p:sp>
+        <p:nvSpPr>
+          <p:cNvPr id="5" name="content_pill_m7"/>
+          <p:cNvSpPr/>
+          <p:nvPr/>
+        </p:nvSpPr>
+        <p:spPr>
+          <a:xfrm>
+            <a:off x="762000" y="3333750"/>
+            <a:ext cx="825000" cy="188082"/>
+          </a:xfrm>
+          <a:prstGeom prst="roundRect">
+            <a:avLst>
+              <a:gd name="adj" fmla="val 50000"/>
+            </a:avLst>
+          </a:prstGeom>
+          <a:solidFill>
+            <a:srgbClr val="C9E1FF"/>
+          </a:solidFill>
+          <a:ln>
+            <a:noFill/>
+          </a:ln>
+          <a:effectLst/>
+        </p:spPr>
+        <p:style>
+          <a:lnRef idx="1">
+            <a:schemeClr val="accent1"/>
+          </a:lnRef>
+          <a:fillRef idx="3">
+            <a:schemeClr val="accent1"/>
+          </a:fillRef>
+          <a:effectRef idx="2">
+            <a:schemeClr val="accent1"/>
+          </a:effectRef>
+          <a:fontRef idx="minor">
+            <a:schemeClr val="lt1"/>
+          </a:fontRef>
+        </p:style>
+        <p:txBody>
+          <a:bodyPr rtlCol="0" anchor="ctr" lIns="60000" rIns="60000" tIns="0" bIns="0" wrap="none"/>
+          <a:lstStyle/>
+          <a:p>
+            <a:pPr algn="ctr"/>
+            <a:r>
+              <a:rPr sz="900" b="1">
+                <a:solidFill>
+                  <a:srgbClr val="325786"/>
+                </a:solidFill>
+                <a:latin typeface="Calibri"/>
+              </a:rPr>
+              <a:t>16.07.2026</a:t>
+            </a:r>
+          </a:p>
+        </p:txBody>
+      </p:sp>
+      <p:sp>
+        <p:nvSpPr>
+          <p:cNvPr id="6" name="content_headline_m7"/>
+          <p:cNvSpPr txBox="1"/>
+          <p:nvPr/>
+        </p:nvSpPr>
+        <p:spPr>
+          <a:xfrm>
+            <a:off x="762000" y="3607501"/>
+            <a:ext cx="5762625" cy="239316"/>
+          </a:xfrm>
+          <a:prstGeom prst="rect">
+            <a:avLst/>
+          </a:prstGeom>
+          <a:noFill/>
+        </p:spPr>
+        <p:txBody>
+          <a:bodyPr wrap="square" lIns="0" rIns="0" tIns="0" bIns="0">
+            <a:spAutoFit/>
+          </a:bodyPr>
+          <a:lstStyle/>
+          <a:p>
+            <a:pPr algn="l"/>
+            <a:r>
+              <a:rPr sz="1500" b="1">
+                <a:solidFill>
+                  <a:srgbClr val="1F2023"/>
+                </a:solidFill>
+                <a:latin typeface="Calibri"/>
+              </a:rPr>
+              <a:t>Final Report Submission</a:t>
+            </a:r>
+          </a:p>
+        </p:txBody>
+      </p:sp>
+      <p:sp>
+        <p:nvSpPr>
+          <p:cNvPr id="7" name="content_bullets_m7"/>
+          <p:cNvSpPr txBox="1"/>
+          <p:nvPr/>
+        </p:nvSpPr>
+        <p:spPr>
+          <a:xfrm>
+            <a:off x="762000" y="3884880"/>
+            <a:ext cx="5762625" cy="188082"/>
+          </a:xfrm>
+          <a:prstGeom prst="rect">
+            <a:avLst/>
+          </a:prstGeom>
+          <a:noFill/>
+        </p:spPr>
+        <p:txBody>
+          <a:bodyPr wrap="square" lIns="0" rIns="0" tIns="0" bIns="0">
+            <a:spAutoFit/>
+          </a:bodyPr>
+          <a:lstStyle/>
+          <a:p>
+            <a:pPr>
+              <a:spcAft>
+                <a:spcPts val="600"/>
+              </a:spcAft>
+            </a:pPr>
+            <a:r>
+              <a:rPr sz="1050" b="1">
+                <a:solidFill>
+                  <a:srgbClr val="C1212A"/>
+                </a:solidFill>
+                <a:latin typeface="Calibri"/>
+              </a:rPr>
+              <a:t>-  </a:t>
+            </a:r>
+            <a:r>
+              <a:rPr sz="1050">
+                <a:solidFill>
+                  <a:srgbClr val="325786"/>
+                </a:solidFill>
+                <a:latin typeface="Calibri"/>
+              </a:rPr>
+              <a:t>Written report on the Privacy-Robustness-Performance Trilemma due</a:t>
+            </a:r>
+          </a:p>
+        </p:txBody>
+      </p:sp>
+      <p:sp>
+        <p:nvSpPr>
+          <p:cNvPr id="8" name="!!tl_track"/>
+          <p:cNvSpPr/>
+          <p:nvPr/>
+        </p:nvSpPr>
+        <p:spPr>
+          <a:xfrm>
+            <a:off x="952500" y="2847919"/>
+            <a:ext cx="7239000" cy="18976"/>
+          </a:xfrm>
+          <a:prstGeom prst="roundRect">
+            <a:avLst>
+              <a:gd name="adj" fmla="val 50000"/>
+            </a:avLst>
+          </a:prstGeom>
+          <a:solidFill>
+            <a:srgbClr val="E2E2E2"/>
+          </a:solidFill>
+          <a:ln>
+            <a:noFill/>
+          </a:ln>
+          <a:effectLst/>
+        </p:spPr>
+        <p:style>
+          <a:lnRef idx="1">
+            <a:schemeClr val="accent1"/>
+          </a:lnRef>
+          <a:fillRef idx="3">
+            <a:schemeClr val="accent1"/>
+          </a:fillRef>
+          <a:effectRef idx="2">
+            <a:schemeClr val="accent1"/>
+          </a:effectRef>
+          <a:fontRef idx="minor">
+            <a:schemeClr val="lt1"/>
+          </a:fontRef>
+        </p:style>
+        <p:txBody>
+          <a:bodyPr rtlCol="0" anchor="ctr"/>
+          <a:lstStyle/>
+          <a:p>
+            <a:pPr algn="ctr"/>
+          </a:p>
+        </p:txBody>
+      </p:sp>
+      <p:sp>
+        <p:nvSpPr>
+          <p:cNvPr id="9" name="!!tl_fill"/>
+          <p:cNvSpPr/>
+          <p:nvPr/>
+        </p:nvSpPr>
+        <p:spPr>
+          <a:xfrm>
+            <a:off x="952500" y="2847919"/>
+            <a:ext cx="6334125" cy="18976"/>
+          </a:xfrm>
+          <a:prstGeom prst="roundRect">
+            <a:avLst>
+              <a:gd name="adj" fmla="val 50000"/>
+            </a:avLst>
+          </a:prstGeom>
+          <a:solidFill>
+            <a:srgbClr val="325786"/>
+          </a:solidFill>
+          <a:ln>
+            <a:noFill/>
+          </a:ln>
+          <a:effectLst/>
+        </p:spPr>
+        <p:style>
+          <a:lnRef idx="1">
+            <a:schemeClr val="accent1"/>
+          </a:lnRef>
+          <a:fillRef idx="3">
+            <a:schemeClr val="accent1"/>
+          </a:fillRef>
+          <a:effectRef idx="2">
+            <a:schemeClr val="accent1"/>
+          </a:effectRef>
+          <a:fontRef idx="minor">
+            <a:schemeClr val="lt1"/>
+          </a:fontRef>
+        </p:style>
+        <p:txBody>
+          <a:bodyPr rtlCol="0" anchor="ctr"/>
+          <a:lstStyle/>
+          <a:p>
+            <a:pPr algn="ctr"/>
+          </a:p>
+        </p:txBody>
+      </p:sp>
+      <p:sp>
+        <p:nvSpPr>
+          <p:cNvPr id="10" name="!!tl_dot_1"/>
+          <p:cNvSpPr/>
+          <p:nvPr/>
+        </p:nvSpPr>
+        <p:spPr>
+          <a:xfrm>
+            <a:off x="914400" y="2819400"/>
+            <a:ext cx="76200" cy="76200"/>
+          </a:xfrm>
+          <a:prstGeom prst="ellipse">
+            <a:avLst/>
+          </a:prstGeom>
+          <a:solidFill>
+            <a:srgbClr val="D1D5DB"/>
+          </a:solidFill>
+          <a:ln>
+            <a:noFill/>
+          </a:ln>
+          <a:effectLst/>
+        </p:spPr>
+        <p:style>
+          <a:lnRef idx="1">
+            <a:schemeClr val="accent1"/>
+          </a:lnRef>
+          <a:fillRef idx="3">
+            <a:schemeClr val="accent1"/>
+          </a:fillRef>
+          <a:effectRef idx="2">
+            <a:schemeClr val="accent1"/>
+          </a:effectRef>
+          <a:fontRef idx="minor">
+            <a:schemeClr val="lt1"/>
+          </a:fontRef>
+        </p:style>
+        <p:txBody>
+          <a:bodyPr rtlCol="0" anchor="ctr"/>
+          <a:lstStyle/>
+          <a:p>
+            <a:pPr algn="ctr"/>
+          </a:p>
+        </p:txBody>
+      </p:sp>
+      <p:sp>
+        <p:nvSpPr>
+          <p:cNvPr id="11" name="lbl_1_s7"/>
+          <p:cNvSpPr txBox="1"/>
+          <p:nvPr/>
+        </p:nvSpPr>
+        <p:spPr>
+          <a:xfrm>
+            <a:off x="666750" y="3009863"/>
+            <a:ext cx="571500" cy="150019"/>
+          </a:xfrm>
+          <a:prstGeom prst="rect">
+            <a:avLst/>
+          </a:prstGeom>
+          <a:noFill/>
+        </p:spPr>
+        <p:txBody>
+          <a:bodyPr wrap="square" lIns="0" rIns="0" tIns="0" bIns="0">
+            <a:spAutoFit/>
+          </a:bodyPr>
+          <a:lstStyle/>
+          <a:p>
+            <a:pPr algn="ctr"/>
+            <a:r>
+              <a:rPr sz="900" b="0">
+                <a:solidFill>
+                  <a:srgbClr val="9CA3AF"/>
+                </a:solidFill>
+                <a:latin typeface="Calibri"/>
+              </a:rPr>
+              <a:t>09.04.2026</a:t>
+            </a:r>
+          </a:p>
+        </p:txBody>
+      </p:sp>
+      <p:sp>
+        <p:nvSpPr>
+          <p:cNvPr id="12" name="!!tl_dot_2"/>
+          <p:cNvSpPr/>
+          <p:nvPr/>
+        </p:nvSpPr>
+        <p:spPr>
+          <a:xfrm>
+            <a:off x="1819275" y="2819400"/>
+            <a:ext cx="76200" cy="76200"/>
+          </a:xfrm>
+          <a:prstGeom prst="ellipse">
+            <a:avLst/>
+          </a:prstGeom>
+          <a:solidFill>
+            <a:srgbClr val="D1D5DB"/>
+          </a:solidFill>
+          <a:ln>
+            <a:noFill/>
+          </a:ln>
+          <a:effectLst/>
+        </p:spPr>
+        <p:style>
+          <a:lnRef idx="1">
+            <a:schemeClr val="accent1"/>
+          </a:lnRef>
+          <a:fillRef idx="3">
+            <a:schemeClr val="accent1"/>
+          </a:fillRef>
+          <a:effectRef idx="2">
+            <a:schemeClr val="accent1"/>
+          </a:effectRef>
+          <a:fontRef idx="minor">
+            <a:schemeClr val="lt1"/>
+          </a:fontRef>
+        </p:style>
+        <p:txBody>
+          <a:bodyPr rtlCol="0" anchor="ctr"/>
+          <a:lstStyle/>
+          <a:p>
+            <a:pPr algn="ctr"/>
+          </a:p>
+        </p:txBody>
+      </p:sp>
+      <p:sp>
+        <p:nvSpPr>
+          <p:cNvPr id="13" name="lbl_2_s7"/>
+          <p:cNvSpPr txBox="1"/>
+          <p:nvPr/>
+        </p:nvSpPr>
+        <p:spPr>
+          <a:xfrm>
+            <a:off x="1571625" y="3009863"/>
+            <a:ext cx="571500" cy="150019"/>
+          </a:xfrm>
+          <a:prstGeom prst="rect">
+            <a:avLst/>
+          </a:prstGeom>
+          <a:noFill/>
+        </p:spPr>
+        <p:txBody>
+          <a:bodyPr wrap="square" lIns="0" rIns="0" tIns="0" bIns="0">
+            <a:spAutoFit/>
+          </a:bodyPr>
+          <a:lstStyle/>
+          <a:p>
+            <a:pPr algn="ctr"/>
+            <a:r>
+              <a:rPr sz="900" b="0">
+                <a:solidFill>
+                  <a:srgbClr val="9CA3AF"/>
+                </a:solidFill>
+                <a:latin typeface="Calibri"/>
+              </a:rPr>
+              <a:t>16.04.2026</a:t>
+            </a:r>
+          </a:p>
+        </p:txBody>
+      </p:sp>
+      <p:sp>
+        <p:nvSpPr>
+          <p:cNvPr id="14" name="!!tl_dot_3"/>
+          <p:cNvSpPr/>
+          <p:nvPr/>
+        </p:nvSpPr>
+        <p:spPr>
+          <a:xfrm>
+            <a:off x="2724150" y="2819400"/>
+            <a:ext cx="76200" cy="76200"/>
+          </a:xfrm>
+          <a:prstGeom prst="ellipse">
+            <a:avLst/>
+          </a:prstGeom>
+          <a:solidFill>
+            <a:srgbClr val="D1D5DB"/>
+          </a:solidFill>
+          <a:ln>
+            <a:noFill/>
+          </a:ln>
+          <a:effectLst/>
+        </p:spPr>
+        <p:style>
+          <a:lnRef idx="1">
+            <a:schemeClr val="accent1"/>
+          </a:lnRef>
+          <a:fillRef idx="3">
+            <a:schemeClr val="accent1"/>
+          </a:fillRef>
+          <a:effectRef idx="2">
+            <a:schemeClr val="accent1"/>
+          </a:effectRef>
+          <a:fontRef idx="minor">
+            <a:schemeClr val="lt1"/>
+          </a:fontRef>
+        </p:style>
+        <p:txBody>
+          <a:bodyPr rtlCol="0" anchor="ctr"/>
+          <a:lstStyle/>
+          <a:p>
+            <a:pPr algn="ctr"/>
+          </a:p>
+        </p:txBody>
+      </p:sp>
+      <p:sp>
+        <p:nvSpPr>
+          <p:cNvPr id="15" name="lbl_3_s7"/>
+          <p:cNvSpPr txBox="1"/>
+          <p:nvPr/>
+        </p:nvSpPr>
+        <p:spPr>
+          <a:xfrm>
+            <a:off x="2476500" y="3009863"/>
+            <a:ext cx="571500" cy="150019"/>
+          </a:xfrm>
+          <a:prstGeom prst="rect">
+            <a:avLst/>
+          </a:prstGeom>
+          <a:noFill/>
+        </p:spPr>
+        <p:txBody>
+          <a:bodyPr wrap="square" lIns="0" rIns="0" tIns="0" bIns="0">
+            <a:spAutoFit/>
+          </a:bodyPr>
+          <a:lstStyle/>
+          <a:p>
+            <a:pPr algn="ctr"/>
+            <a:r>
+              <a:rPr sz="900" b="0">
+                <a:solidFill>
+                  <a:srgbClr val="9CA3AF"/>
+                </a:solidFill>
+                <a:latin typeface="Calibri"/>
+              </a:rPr>
+              <a:t>30.04.2026</a:t>
+            </a:r>
+          </a:p>
+        </p:txBody>
+      </p:sp>
+      <p:sp>
+        <p:nvSpPr>
+          <p:cNvPr id="16" name="!!tl_dot_4"/>
+          <p:cNvSpPr/>
+          <p:nvPr/>
+        </p:nvSpPr>
+        <p:spPr>
+          <a:xfrm>
+            <a:off x="3629025" y="2819400"/>
+            <a:ext cx="76200" cy="76200"/>
+          </a:xfrm>
+          <a:prstGeom prst="ellipse">
+            <a:avLst/>
+          </a:prstGeom>
+          <a:solidFill>
+            <a:srgbClr val="D1D5DB"/>
+          </a:solidFill>
+          <a:ln>
+            <a:noFill/>
+          </a:ln>
+          <a:effectLst/>
+        </p:spPr>
+        <p:style>
+          <a:lnRef idx="1">
+            <a:schemeClr val="accent1"/>
+          </a:lnRef>
+          <a:fillRef idx="3">
+            <a:schemeClr val="accent1"/>
+          </a:fillRef>
+          <a:effectRef idx="2">
+            <a:schemeClr val="accent1"/>
+          </a:effectRef>
+          <a:fontRef idx="minor">
+            <a:schemeClr val="lt1"/>
+          </a:fontRef>
+        </p:style>
+        <p:txBody>
+          <a:bodyPr rtlCol="0" anchor="ctr"/>
+          <a:lstStyle/>
+          <a:p>
+            <a:pPr algn="ctr"/>
+          </a:p>
+        </p:txBody>
+      </p:sp>
+      <p:sp>
+        <p:nvSpPr>
+          <p:cNvPr id="17" name="lbl_4_s7"/>
+          <p:cNvSpPr txBox="1"/>
+          <p:nvPr/>
+        </p:nvSpPr>
+        <p:spPr>
+          <a:xfrm>
+            <a:off x="3381375" y="3009863"/>
+            <a:ext cx="571500" cy="150019"/>
+          </a:xfrm>
+          <a:prstGeom prst="rect">
+            <a:avLst/>
+          </a:prstGeom>
+          <a:noFill/>
+        </p:spPr>
+        <p:txBody>
+          <a:bodyPr wrap="square" lIns="0" rIns="0" tIns="0" bIns="0">
+            <a:spAutoFit/>
+          </a:bodyPr>
+          <a:lstStyle/>
+          <a:p>
+            <a:pPr algn="ctr"/>
+            <a:r>
+              <a:rPr sz="900" b="0">
+                <a:solidFill>
+                  <a:srgbClr val="9CA3AF"/>
+                </a:solidFill>
+                <a:latin typeface="Calibri"/>
+              </a:rPr>
+              <a:t>~21.05.2026</a:t>
+            </a:r>
+          </a:p>
+        </p:txBody>
+      </p:sp>
+      <p:sp>
+        <p:nvSpPr>
+          <p:cNvPr id="18" name="!!tl_dot_5"/>
+          <p:cNvSpPr/>
+          <p:nvPr/>
+        </p:nvSpPr>
+        <p:spPr>
+          <a:xfrm>
+            <a:off x="4533900" y="2819400"/>
+            <a:ext cx="76200" cy="76200"/>
+          </a:xfrm>
+          <a:prstGeom prst="ellipse">
+            <a:avLst/>
+          </a:prstGeom>
+          <a:solidFill>
+            <a:srgbClr val="D1D5DB"/>
+          </a:solidFill>
+          <a:ln>
+            <a:noFill/>
+          </a:ln>
+          <a:effectLst/>
+        </p:spPr>
+        <p:style>
+          <a:lnRef idx="1">
+            <a:schemeClr val="accent1"/>
+          </a:lnRef>
+          <a:fillRef idx="3">
+            <a:schemeClr val="accent1"/>
+          </a:fillRef>
+          <a:effectRef idx="2">
+            <a:schemeClr val="accent1"/>
+          </a:effectRef>
+          <a:fontRef idx="minor">
+            <a:schemeClr val="lt1"/>
+          </a:fontRef>
+        </p:style>
+        <p:txBody>
+          <a:bodyPr rtlCol="0" anchor="ctr"/>
+          <a:lstStyle/>
+          <a:p>
+            <a:pPr algn="ctr"/>
+          </a:p>
+        </p:txBody>
+      </p:sp>
+      <p:sp>
+        <p:nvSpPr>
+          <p:cNvPr id="19" name="lbl_5_s7"/>
+          <p:cNvSpPr txBox="1"/>
+          <p:nvPr/>
+        </p:nvSpPr>
+        <p:spPr>
+          <a:xfrm>
+            <a:off x="4286250" y="3009863"/>
+            <a:ext cx="571500" cy="150019"/>
+          </a:xfrm>
+          <a:prstGeom prst="rect">
+            <a:avLst/>
+          </a:prstGeom>
+          <a:noFill/>
+        </p:spPr>
+        <p:txBody>
+          <a:bodyPr wrap="square" lIns="0" rIns="0" tIns="0" bIns="0">
+            <a:spAutoFit/>
+          </a:bodyPr>
+          <a:lstStyle/>
+          <a:p>
+            <a:pPr algn="ctr"/>
+            <a:r>
+              <a:rPr sz="900" b="0">
+                <a:solidFill>
+                  <a:srgbClr val="9CA3AF"/>
+                </a:solidFill>
+                <a:latin typeface="Calibri"/>
+              </a:rPr>
+              <a:t>18.06.2026</a:t>
+            </a:r>
+          </a:p>
+        </p:txBody>
+      </p:sp>
+      <p:sp>
+        <p:nvSpPr>
+          <p:cNvPr id="20" name="!!tl_dot_6"/>
+          <p:cNvSpPr/>
+          <p:nvPr/>
+        </p:nvSpPr>
+        <p:spPr>
+          <a:xfrm>
+            <a:off x="5438775" y="2819400"/>
+            <a:ext cx="76200" cy="76200"/>
+          </a:xfrm>
+          <a:prstGeom prst="ellipse">
+            <a:avLst/>
+          </a:prstGeom>
+          <a:solidFill>
+            <a:srgbClr val="D1D5DB"/>
+          </a:solidFill>
+          <a:ln>
+            <a:noFill/>
+          </a:ln>
+          <a:effectLst/>
+        </p:spPr>
+        <p:style>
+          <a:lnRef idx="1">
+            <a:schemeClr val="accent1"/>
+          </a:lnRef>
+          <a:fillRef idx="3">
+            <a:schemeClr val="accent1"/>
+          </a:fillRef>
+          <a:effectRef idx="2">
+            <a:schemeClr val="accent1"/>
+          </a:effectRef>
+          <a:fontRef idx="minor">
+            <a:schemeClr val="lt1"/>
+          </a:fontRef>
+        </p:style>
+        <p:txBody>
+          <a:bodyPr rtlCol="0" anchor="ctr"/>
+          <a:lstStyle/>
+          <a:p>
+            <a:pPr algn="ctr"/>
+          </a:p>
+        </p:txBody>
+      </p:sp>
+      <p:sp>
+        <p:nvSpPr>
+          <p:cNvPr id="21" name="lbl_6_s7"/>
+          <p:cNvSpPr txBox="1"/>
+          <p:nvPr/>
+        </p:nvSpPr>
+        <p:spPr>
+          <a:xfrm>
+            <a:off x="5191125" y="3009863"/>
+            <a:ext cx="571500" cy="150019"/>
+          </a:xfrm>
+          <a:prstGeom prst="rect">
+            <a:avLst/>
+          </a:prstGeom>
+          <a:noFill/>
+        </p:spPr>
+        <p:txBody>
+          <a:bodyPr wrap="square" lIns="0" rIns="0" tIns="0" bIns="0">
+            <a:spAutoFit/>
+          </a:bodyPr>
+          <a:lstStyle/>
+          <a:p>
+            <a:pPr algn="ctr"/>
+            <a:r>
+              <a:rPr sz="900" b="0">
+                <a:solidFill>
+                  <a:srgbClr val="9CA3AF"/>
+                </a:solidFill>
+                <a:latin typeface="Calibri"/>
+              </a:rPr>
+              <a:t>25.06.2026</a:t>
+            </a:r>
+          </a:p>
+        </p:txBody>
+      </p:sp>
+      <p:sp>
+        <p:nvSpPr>
+          <p:cNvPr id="22" name="!!tl_dot_7"/>
+          <p:cNvSpPr/>
+          <p:nvPr/>
+        </p:nvSpPr>
+        <p:spPr>
+          <a:xfrm>
+            <a:off x="6343650" y="2819400"/>
+            <a:ext cx="76200" cy="76200"/>
+          </a:xfrm>
+          <a:prstGeom prst="ellipse">
+            <a:avLst/>
+          </a:prstGeom>
+          <a:solidFill>
+            <a:srgbClr val="D1D5DB"/>
+          </a:solidFill>
+          <a:ln>
+            <a:noFill/>
+          </a:ln>
+          <a:effectLst/>
+        </p:spPr>
+        <p:style>
+          <a:lnRef idx="1">
+            <a:schemeClr val="accent1"/>
+          </a:lnRef>
+          <a:fillRef idx="3">
+            <a:schemeClr val="accent1"/>
+          </a:fillRef>
+          <a:effectRef idx="2">
+            <a:schemeClr val="accent1"/>
+          </a:effectRef>
+          <a:fontRef idx="minor">
+            <a:schemeClr val="lt1"/>
+          </a:fontRef>
+        </p:style>
+        <p:txBody>
+          <a:bodyPr rtlCol="0" anchor="ctr"/>
+          <a:lstStyle/>
+          <a:p>
+            <a:pPr algn="ctr"/>
+          </a:p>
+        </p:txBody>
+      </p:sp>
+      <p:sp>
+        <p:nvSpPr>
+          <p:cNvPr id="23" name="lbl_7_s7"/>
+          <p:cNvSpPr txBox="1"/>
+          <p:nvPr/>
+        </p:nvSpPr>
+        <p:spPr>
+          <a:xfrm>
+            <a:off x="6096000" y="3009863"/>
+            <a:ext cx="571500" cy="150019"/>
+          </a:xfrm>
+          <a:prstGeom prst="rect">
+            <a:avLst/>
+          </a:prstGeom>
+          <a:noFill/>
+        </p:spPr>
+        <p:txBody>
+          <a:bodyPr wrap="square" lIns="0" rIns="0" tIns="0" bIns="0">
+            <a:spAutoFit/>
+          </a:bodyPr>
+          <a:lstStyle/>
+          <a:p>
+            <a:pPr algn="ctr"/>
+            <a:r>
+              <a:rPr sz="900" b="0">
+                <a:solidFill>
+                  <a:srgbClr val="9CA3AF"/>
+                </a:solidFill>
+                <a:latin typeface="Calibri"/>
+              </a:rPr>
+              <a:t>09.07.2026</a:t>
+            </a:r>
+          </a:p>
+        </p:txBody>
+      </p:sp>
+      <p:sp>
+        <p:nvSpPr>
+          <p:cNvPr id="24" name="!!tl_dot_8"/>
+          <p:cNvSpPr/>
+          <p:nvPr/>
+        </p:nvSpPr>
+        <p:spPr>
+          <a:xfrm>
+            <a:off x="7219950" y="2790825"/>
+            <a:ext cx="133350" cy="133350"/>
+          </a:xfrm>
+          <a:prstGeom prst="ellipse">
+            <a:avLst/>
+          </a:prstGeom>
+          <a:solidFill>
+            <a:srgbClr val="325786"/>
+          </a:solidFill>
+          <a:ln>
+            <a:noFill/>
+          </a:ln>
+          <a:effectLst/>
+        </p:spPr>
+        <p:style>
+          <a:lnRef idx="1">
+            <a:schemeClr val="accent1"/>
+          </a:lnRef>
+          <a:fillRef idx="3">
+            <a:schemeClr val="accent1"/>
+          </a:fillRef>
+          <a:effectRef idx="2">
+            <a:schemeClr val="accent1"/>
+          </a:effectRef>
+          <a:fontRef idx="minor">
+            <a:schemeClr val="lt1"/>
+          </a:fontRef>
+        </p:style>
+        <p:txBody>
+          <a:bodyPr rtlCol="0" anchor="ctr"/>
+          <a:lstStyle/>
+          <a:p>
+            <a:pPr algn="ctr"/>
+          </a:p>
+        </p:txBody>
+      </p:sp>
+      <p:sp>
+        <p:nvSpPr>
+          <p:cNvPr id="25" name="lbl_8_s7"/>
+          <p:cNvSpPr txBox="1"/>
+          <p:nvPr/>
+        </p:nvSpPr>
+        <p:spPr>
+          <a:xfrm>
+            <a:off x="7000875" y="3009863"/>
+            <a:ext cx="571500" cy="150019"/>
+          </a:xfrm>
+          <a:prstGeom prst="rect">
+            <a:avLst/>
+          </a:prstGeom>
+          <a:noFill/>
+        </p:spPr>
+        <p:txBody>
+          <a:bodyPr wrap="square" lIns="0" rIns="0" tIns="0" bIns="0">
+            <a:spAutoFit/>
+          </a:bodyPr>
+          <a:lstStyle/>
+          <a:p>
+            <a:pPr algn="ctr"/>
+            <a:r>
+              <a:rPr sz="900" b="1">
+                <a:solidFill>
+                  <a:srgbClr val="1F2023"/>
+                </a:solidFill>
+                <a:latin typeface="Calibri"/>
+              </a:rPr>
+              <a:t>16.07.2026</a:t>
+            </a:r>
+          </a:p>
+        </p:txBody>
+      </p:sp>
+      <p:sp>
+        <p:nvSpPr>
+          <p:cNvPr id="26" name="!!tl_dot_9"/>
+          <p:cNvSpPr/>
+          <p:nvPr/>
+        </p:nvSpPr>
+        <p:spPr>
+          <a:xfrm>
+            <a:off x="8153400" y="2819400"/>
+            <a:ext cx="76200" cy="76200"/>
+          </a:xfrm>
+          <a:prstGeom prst="ellipse">
+            <a:avLst/>
+          </a:prstGeom>
+          <a:solidFill>
+            <a:srgbClr val="D1D5DB"/>
+          </a:solidFill>
+          <a:ln>
+            <a:noFill/>
+          </a:ln>
+          <a:effectLst/>
+        </p:spPr>
+        <p:style>
+          <a:lnRef idx="1">
+            <a:schemeClr val="accent1"/>
+          </a:lnRef>
+          <a:fillRef idx="3">
+            <a:schemeClr val="accent1"/>
+          </a:fillRef>
+          <a:effectRef idx="2">
+            <a:schemeClr val="accent1"/>
+          </a:effectRef>
+          <a:fontRef idx="minor">
+            <a:schemeClr val="lt1"/>
+          </a:fontRef>
+        </p:style>
+        <p:txBody>
+          <a:bodyPr rtlCol="0" anchor="ctr"/>
+          <a:lstStyle/>
+          <a:p>
+            <a:pPr algn="ctr"/>
+          </a:p>
+        </p:txBody>
+      </p:sp>
+      <p:sp>
+        <p:nvSpPr>
+          <p:cNvPr id="27" name="lbl_9_s7"/>
+          <p:cNvSpPr txBox="1"/>
+          <p:nvPr/>
+        </p:nvSpPr>
+        <p:spPr>
+          <a:xfrm>
+            <a:off x="7905750" y="3009863"/>
+            <a:ext cx="571500" cy="150019"/>
+          </a:xfrm>
+          <a:prstGeom prst="rect">
+            <a:avLst/>
+          </a:prstGeom>
+          <a:noFill/>
+        </p:spPr>
+        <p:txBody>
+          <a:bodyPr wrap="square" lIns="0" rIns="0" tIns="0" bIns="0">
+            <a:spAutoFit/>
+          </a:bodyPr>
+          <a:lstStyle/>
+          <a:p>
+            <a:pPr algn="ctr"/>
+            <a:r>
+              <a:rPr sz="900" b="0">
+                <a:solidFill>
+                  <a:srgbClr val="9CA3AF"/>
+                </a:solidFill>
+                <a:latin typeface="Calibri"/>
+              </a:rPr>
+              <a:t>20.07.2026</a:t>
+            </a:r>
+          </a:p>
+        </p:txBody>
+      </p:sp>
+    </p:spTree>
+  </p:cSld>
+  <p:clrMapOvr>
+    <a:masterClrMapping/>
+  </p:clrMapOvr>
+  <mc:AlternateContent xmlns:mc="http://schemas.openxmlformats.org/markup-compatibility/2006">
+    <mc:Choice xmlns:p159="http://schemas.microsoft.com/office/powerpoint/2015/09/main" Requires="p159">
+      <p:transition spd="slow">
+        <p159:morph option="byObject"/>
+      </p:transition>
+    </mc:Choice>
+    <mc:Fallback>
+      <p:transition spd="slow">
+        <p:fade/>
+      </p:transition>
+    </mc:Fallback>
+  </mc:AlternateContent>
+</p:sld>
+</file>
+
+<file path=ppt/slides/slide22.xml><?xml version="1.0" encoding="utf-8"?>
+<p:sld xmlns:a="http://schemas.openxmlformats.org/drawingml/2006/main" xmlns:p="http://schemas.openxmlformats.org/presentationml/2006/main" xmlns:r="http://schemas.openxmlformats.org/officeDocument/2006/relationships">
+  <p:cSld>
+    <p:spTree>
+      <p:nvGrpSpPr>
+        <p:cNvPr id="1" name=""/>
+        <p:cNvGrpSpPr/>
+        <p:nvPr/>
+      </p:nvGrpSpPr>
+      <p:grpSpPr/>
+      <p:sp>
+        <p:nvSpPr>
+          <p:cNvPr id="2" name="title_m8"/>
+          <p:cNvSpPr txBox="1"/>
+          <p:nvPr/>
+        </p:nvSpPr>
+        <p:spPr>
+          <a:xfrm>
+            <a:off x="457200" y="87474"/>
+            <a:ext cx="8458200" cy="769776"/>
+          </a:xfrm>
+          <a:prstGeom prst="rect">
+            <a:avLst/>
+          </a:prstGeom>
+          <a:noFill/>
+        </p:spPr>
+        <p:txBody>
+          <a:bodyPr wrap="square" lIns="0" rIns="0" tIns="0" bIns="0" anchor="b">
+            <a:spAutoFit/>
+          </a:bodyPr>
+          <a:lstStyle/>
+          <a:p>
+            <a:pPr algn="l"/>
+            <a:r>
+              <a:rPr sz="1800" b="0">
+                <a:solidFill>
+                  <a:srgbClr val="808080"/>
+                </a:solidFill>
+                <a:latin typeface="Calibri"/>
+              </a:rPr>
+              <a:t>FL-Trilemma: Project Timeline</a:t>
+            </a:r>
+          </a:p>
+        </p:txBody>
+      </p:sp>
+      <p:cxnSp>
+        <p:nvCxnSpPr>
+          <p:cNvPr id="4" name="divider_m8"/>
+          <p:cNvCxnSpPr/>
+          <p:nvPr/>
+        </p:nvCxnSpPr>
+        <p:spPr>
+          <a:xfrm>
+            <a:off x="571500" y="952500"/>
+            <a:ext cx="8001000" cy="0"/>
+          </a:xfrm>
+          <a:prstGeom prst="line">
+            <a:avLst/>
+          </a:prstGeom>
+          <a:ln w="9525">
+            <a:solidFill>
+              <a:srgbClr val="B3B3B3"/>
+            </a:solidFill>
+          </a:ln>
+          <a:effectLst/>
+        </p:spPr>
+        <p:style>
+          <a:lnRef idx="2">
+            <a:schemeClr val="accent1"/>
+          </a:lnRef>
+          <a:fillRef idx="0">
+            <a:schemeClr val="accent1"/>
+          </a:fillRef>
+          <a:effectRef idx="1">
+            <a:schemeClr val="accent1"/>
+          </a:effectRef>
+          <a:fontRef idx="minor">
+            <a:schemeClr val="tx1"/>
+          </a:fontRef>
+        </p:style>
+      </p:cxnSp>
+      <p:sp>
+        <p:nvSpPr>
+          <p:cNvPr id="5" name="content_placeholder_m8"/>
+          <p:cNvSpPr/>
+          <p:nvPr/>
+        </p:nvSpPr>
+        <p:spPr>
+          <a:xfrm>
+            <a:off x="762000" y="1095375"/>
+            <a:ext cx="1619250" cy="1047750"/>
+          </a:xfrm>
+          <a:prstGeom prst="roundRect">
+            <a:avLst>
+              <a:gd name="adj" fmla="val 6000"/>
+            </a:avLst>
+          </a:prstGeom>
+          <a:solidFill>
+            <a:srgbClr val="EDEEF0"/>
+          </a:solidFill>
+          <a:ln w="9525">
+            <a:solidFill>
+              <a:srgbClr val="E5E7EB"/>
+            </a:solidFill>
+            <a:prstDash val="dash"/>
+          </a:ln>
+          <a:effectLst/>
+        </p:spPr>
+        <p:style>
+          <a:lnRef idx="1">
+            <a:schemeClr val="accent1"/>
+          </a:lnRef>
+          <a:fillRef idx="3">
+            <a:schemeClr val="accent1"/>
+          </a:fillRef>
+          <a:effectRef idx="2">
+            <a:schemeClr val="accent1"/>
+          </a:effectRef>
+          <a:fontRef idx="minor">
+            <a:schemeClr val="lt1"/>
+          </a:fontRef>
+        </p:style>
+        <p:txBody>
+          <a:bodyPr rtlCol="0" anchor="ctr" wrap="square" lIns="120000" rIns="120000"/>
+          <a:lstStyle/>
+          <a:p>
+            <a:pPr algn="ctr"/>
+            <a:r>
+              <a:rPr sz="550">
+                <a:solidFill>
+                  <a:srgbClr val="9CA3AF"/>
+                </a:solidFill>
+                <a:latin typeface="Consolas"/>
+              </a:rPr>
+              <a:t>FINAL PRESENTATION - SLIDES/RESULTS</a:t>
+            </a:r>
+          </a:p>
+        </p:txBody>
+      </p:sp>
+      <p:sp>
+        <p:nvSpPr>
+          <p:cNvPr id="6" name="content_pill_m8"/>
+          <p:cNvSpPr/>
+          <p:nvPr/>
+        </p:nvSpPr>
+        <p:spPr>
+          <a:xfrm>
+            <a:off x="2571750" y="1095375"/>
+            <a:ext cx="825000" cy="188082"/>
+          </a:xfrm>
+          <a:prstGeom prst="roundRect">
+            <a:avLst>
+              <a:gd name="adj" fmla="val 50000"/>
+            </a:avLst>
+          </a:prstGeom>
+          <a:solidFill>
+            <a:srgbClr val="C9E1FF"/>
+          </a:solidFill>
+          <a:ln>
+            <a:noFill/>
+          </a:ln>
+          <a:effectLst/>
+        </p:spPr>
+        <p:style>
+          <a:lnRef idx="1">
+            <a:schemeClr val="accent1"/>
+          </a:lnRef>
+          <a:fillRef idx="3">
+            <a:schemeClr val="accent1"/>
+          </a:fillRef>
+          <a:effectRef idx="2">
+            <a:schemeClr val="accent1"/>
+          </a:effectRef>
+          <a:fontRef idx="minor">
+            <a:schemeClr val="lt1"/>
+          </a:fontRef>
+        </p:style>
+        <p:txBody>
+          <a:bodyPr rtlCol="0" anchor="ctr" lIns="60000" rIns="60000" tIns="0" bIns="0" wrap="none"/>
+          <a:lstStyle/>
+          <a:p>
+            <a:pPr algn="ctr"/>
+            <a:r>
+              <a:rPr sz="900" b="1">
+                <a:solidFill>
+                  <a:srgbClr val="325786"/>
+                </a:solidFill>
+                <a:latin typeface="Calibri"/>
+              </a:rPr>
+              <a:t>20.07.2026</a:t>
+            </a:r>
+          </a:p>
+        </p:txBody>
+      </p:sp>
+      <p:sp>
+        <p:nvSpPr>
+          <p:cNvPr id="7" name="content_headline_m8"/>
+          <p:cNvSpPr txBox="1"/>
+          <p:nvPr/>
+        </p:nvSpPr>
+        <p:spPr>
+          <a:xfrm>
+            <a:off x="2571750" y="1369126"/>
+            <a:ext cx="5000625" cy="239316"/>
+          </a:xfrm>
+          <a:prstGeom prst="rect">
+            <a:avLst/>
+          </a:prstGeom>
+          <a:noFill/>
+        </p:spPr>
+        <p:txBody>
+          <a:bodyPr wrap="square" lIns="0" rIns="0" tIns="0" bIns="0">
+            <a:spAutoFit/>
+          </a:bodyPr>
+          <a:lstStyle/>
+          <a:p>
+            <a:pPr algn="l"/>
+            <a:r>
+              <a:rPr sz="1500" b="1">
+                <a:solidFill>
+                  <a:srgbClr val="1F2023"/>
+                </a:solidFill>
+                <a:latin typeface="Calibri"/>
+              </a:rPr>
+              <a:t>Final Presentation</a:t>
+            </a:r>
+          </a:p>
+        </p:txBody>
+      </p:sp>
+      <p:sp>
+        <p:nvSpPr>
+          <p:cNvPr id="8" name="content_bullets_m8"/>
+          <p:cNvSpPr txBox="1"/>
+          <p:nvPr/>
+        </p:nvSpPr>
+        <p:spPr>
+          <a:xfrm>
+            <a:off x="2571750" y="1637017"/>
+            <a:ext cx="5000625" cy="188082"/>
+          </a:xfrm>
+          <a:prstGeom prst="rect">
+            <a:avLst/>
+          </a:prstGeom>
+          <a:noFill/>
+        </p:spPr>
+        <p:txBody>
+          <a:bodyPr wrap="square" lIns="0" rIns="0" tIns="0" bIns="0">
+            <a:spAutoFit/>
+          </a:bodyPr>
+          <a:lstStyle/>
+          <a:p>
+            <a:pPr>
+              <a:spcAft>
+                <a:spcPts val="600"/>
+              </a:spcAft>
+            </a:pPr>
+            <a:r>
+              <a:rPr sz="975" b="1">
+                <a:solidFill>
+                  <a:srgbClr val="C1212A"/>
+                </a:solidFill>
+                <a:latin typeface="Calibri"/>
+              </a:rPr>
+              <a:t>-  </a:t>
+            </a:r>
+            <a:r>
+              <a:rPr sz="975">
+                <a:solidFill>
+                  <a:srgbClr val="325786"/>
+                </a:solidFill>
+                <a:latin typeface="Calibri"/>
+              </a:rPr>
+              <a:t>Closing presentation of findings</a:t>
+            </a:r>
+          </a:p>
+        </p:txBody>
+      </p:sp>
+      <p:sp>
+        <p:nvSpPr>
+          <p:cNvPr id="9" name="!!tl_track"/>
+          <p:cNvSpPr/>
+          <p:nvPr/>
+        </p:nvSpPr>
+        <p:spPr>
+          <a:xfrm>
+            <a:off x="952500" y="2847919"/>
+            <a:ext cx="7239000" cy="18976"/>
+          </a:xfrm>
+          <a:prstGeom prst="roundRect">
+            <a:avLst>
+              <a:gd name="adj" fmla="val 50000"/>
+            </a:avLst>
+          </a:prstGeom>
+          <a:solidFill>
+            <a:srgbClr val="E2E2E2"/>
+          </a:solidFill>
+          <a:ln>
+            <a:noFill/>
+          </a:ln>
+          <a:effectLst/>
+        </p:spPr>
+        <p:style>
+          <a:lnRef idx="1">
+            <a:schemeClr val="accent1"/>
+          </a:lnRef>
+          <a:fillRef idx="3">
+            <a:schemeClr val="accent1"/>
+          </a:fillRef>
+          <a:effectRef idx="2">
+            <a:schemeClr val="accent1"/>
+          </a:effectRef>
+          <a:fontRef idx="minor">
+            <a:schemeClr val="lt1"/>
+          </a:fontRef>
+        </p:style>
+        <p:txBody>
+          <a:bodyPr rtlCol="0" anchor="ctr"/>
+          <a:lstStyle/>
+          <a:p>
+            <a:pPr algn="ctr"/>
+          </a:p>
+        </p:txBody>
+      </p:sp>
+      <p:sp>
+        <p:nvSpPr>
+          <p:cNvPr id="10" name="!!tl_fill"/>
+          <p:cNvSpPr/>
+          <p:nvPr/>
+        </p:nvSpPr>
+        <p:spPr>
+          <a:xfrm>
+            <a:off x="952500" y="2847919"/>
+            <a:ext cx="7239000" cy="18976"/>
+          </a:xfrm>
+          <a:prstGeom prst="roundRect">
+            <a:avLst>
+              <a:gd name="adj" fmla="val 50000"/>
+            </a:avLst>
+          </a:prstGeom>
+          <a:solidFill>
+            <a:srgbClr val="325786"/>
+          </a:solidFill>
+          <a:ln>
+            <a:noFill/>
+          </a:ln>
+          <a:effectLst/>
+        </p:spPr>
+        <p:style>
+          <a:lnRef idx="1">
+            <a:schemeClr val="accent1"/>
+          </a:lnRef>
+          <a:fillRef idx="3">
+            <a:schemeClr val="accent1"/>
+          </a:fillRef>
+          <a:effectRef idx="2">
+            <a:schemeClr val="accent1"/>
+          </a:effectRef>
+          <a:fontRef idx="minor">
+            <a:schemeClr val="lt1"/>
+          </a:fontRef>
+        </p:style>
+        <p:txBody>
+          <a:bodyPr rtlCol="0" anchor="ctr"/>
+          <a:lstStyle/>
+          <a:p>
+            <a:pPr algn="ctr"/>
+          </a:p>
+        </p:txBody>
+      </p:sp>
+      <p:sp>
+        <p:nvSpPr>
+          <p:cNvPr id="11" name="!!tl_dot_1"/>
+          <p:cNvSpPr/>
+          <p:nvPr/>
+        </p:nvSpPr>
+        <p:spPr>
+          <a:xfrm>
+            <a:off x="914400" y="2819400"/>
+            <a:ext cx="76200" cy="76200"/>
+          </a:xfrm>
+          <a:prstGeom prst="ellipse">
+            <a:avLst/>
+          </a:prstGeom>
+          <a:solidFill>
+            <a:srgbClr val="D1D5DB"/>
+          </a:solidFill>
+          <a:ln>
+            <a:noFill/>
+          </a:ln>
+          <a:effectLst/>
+        </p:spPr>
+        <p:style>
+          <a:lnRef idx="1">
+            <a:schemeClr val="accent1"/>
+          </a:lnRef>
+          <a:fillRef idx="3">
+            <a:schemeClr val="accent1"/>
+          </a:fillRef>
+          <a:effectRef idx="2">
+            <a:schemeClr val="accent1"/>
+          </a:effectRef>
+          <a:fontRef idx="minor">
+            <a:schemeClr val="lt1"/>
+          </a:fontRef>
+        </p:style>
+        <p:txBody>
+          <a:bodyPr rtlCol="0" anchor="ctr"/>
+          <a:lstStyle/>
+          <a:p>
+            <a:pPr algn="ctr"/>
+          </a:p>
+        </p:txBody>
+      </p:sp>
+      <p:sp>
+        <p:nvSpPr>
+          <p:cNvPr id="12" name="lbl_1_s8"/>
+          <p:cNvSpPr txBox="1"/>
+          <p:nvPr/>
+        </p:nvSpPr>
+        <p:spPr>
+          <a:xfrm>
+            <a:off x="666750" y="3009863"/>
+            <a:ext cx="571500" cy="150019"/>
+          </a:xfrm>
+          <a:prstGeom prst="rect">
+            <a:avLst/>
+          </a:prstGeom>
+          <a:noFill/>
+        </p:spPr>
+        <p:txBody>
+          <a:bodyPr wrap="square" lIns="0" rIns="0" tIns="0" bIns="0">
+            <a:spAutoFit/>
+          </a:bodyPr>
+          <a:lstStyle/>
+          <a:p>
+            <a:pPr algn="ctr"/>
+            <a:r>
+              <a:rPr sz="900" b="0">
+                <a:solidFill>
+                  <a:srgbClr val="9CA3AF"/>
+                </a:solidFill>
+                <a:latin typeface="Calibri"/>
+              </a:rPr>
+              <a:t>09.04.2026</a:t>
+            </a:r>
+          </a:p>
+        </p:txBody>
+      </p:sp>
+      <p:sp>
+        <p:nvSpPr>
+          <p:cNvPr id="13" name="!!tl_dot_2"/>
+          <p:cNvSpPr/>
+          <p:nvPr/>
+        </p:nvSpPr>
+        <p:spPr>
+          <a:xfrm>
+            <a:off x="1819275" y="2819400"/>
+            <a:ext cx="76200" cy="76200"/>
+          </a:xfrm>
+          <a:prstGeom prst="ellipse">
+            <a:avLst/>
+          </a:prstGeom>
+          <a:solidFill>
+            <a:srgbClr val="D1D5DB"/>
+          </a:solidFill>
+          <a:ln>
+            <a:noFill/>
+          </a:ln>
+          <a:effectLst/>
+        </p:spPr>
+        <p:style>
+          <a:lnRef idx="1">
+            <a:schemeClr val="accent1"/>
+          </a:lnRef>
+          <a:fillRef idx="3">
+            <a:schemeClr val="accent1"/>
+          </a:fillRef>
+          <a:effectRef idx="2">
+            <a:schemeClr val="accent1"/>
+          </a:effectRef>
+          <a:fontRef idx="minor">
+            <a:schemeClr val="lt1"/>
+          </a:fontRef>
+        </p:style>
+        <p:txBody>
+          <a:bodyPr rtlCol="0" anchor="ctr"/>
+          <a:lstStyle/>
+          <a:p>
+            <a:pPr algn="ctr"/>
+          </a:p>
+        </p:txBody>
+      </p:sp>
+      <p:sp>
+        <p:nvSpPr>
+          <p:cNvPr id="14" name="lbl_2_s8"/>
+          <p:cNvSpPr txBox="1"/>
+          <p:nvPr/>
+        </p:nvSpPr>
+        <p:spPr>
+          <a:xfrm>
+            <a:off x="1571625" y="3009863"/>
+            <a:ext cx="571500" cy="150019"/>
+          </a:xfrm>
+          <a:prstGeom prst="rect">
+            <a:avLst/>
+          </a:prstGeom>
+          <a:noFill/>
+        </p:spPr>
+        <p:txBody>
+          <a:bodyPr wrap="square" lIns="0" rIns="0" tIns="0" bIns="0">
+            <a:spAutoFit/>
+          </a:bodyPr>
+          <a:lstStyle/>
+          <a:p>
+            <a:pPr algn="ctr"/>
+            <a:r>
+              <a:rPr sz="900" b="0">
+                <a:solidFill>
+                  <a:srgbClr val="9CA3AF"/>
+                </a:solidFill>
+                <a:latin typeface="Calibri"/>
+              </a:rPr>
+              <a:t>16.04.2026</a:t>
+            </a:r>
+          </a:p>
+        </p:txBody>
+      </p:sp>
+      <p:sp>
+        <p:nvSpPr>
+          <p:cNvPr id="15" name="!!tl_dot_3"/>
+          <p:cNvSpPr/>
+          <p:nvPr/>
+        </p:nvSpPr>
+        <p:spPr>
+          <a:xfrm>
+            <a:off x="2724150" y="2819400"/>
+            <a:ext cx="76200" cy="76200"/>
+          </a:xfrm>
+          <a:prstGeom prst="ellipse">
+            <a:avLst/>
+          </a:prstGeom>
+          <a:solidFill>
+            <a:srgbClr val="D1D5DB"/>
+          </a:solidFill>
+          <a:ln>
+            <a:noFill/>
+          </a:ln>
+          <a:effectLst/>
+        </p:spPr>
+        <p:style>
+          <a:lnRef idx="1">
+            <a:schemeClr val="accent1"/>
+          </a:lnRef>
+          <a:fillRef idx="3">
+            <a:schemeClr val="accent1"/>
+          </a:fillRef>
+          <a:effectRef idx="2">
+            <a:schemeClr val="accent1"/>
+          </a:effectRef>
+          <a:fontRef idx="minor">
+            <a:schemeClr val="lt1"/>
+          </a:fontRef>
+        </p:style>
+        <p:txBody>
+          <a:bodyPr rtlCol="0" anchor="ctr"/>
+          <a:lstStyle/>
+          <a:p>
+            <a:pPr algn="ctr"/>
+          </a:p>
+        </p:txBody>
+      </p:sp>
+      <p:sp>
+        <p:nvSpPr>
+          <p:cNvPr id="16" name="lbl_3_s8"/>
+          <p:cNvSpPr txBox="1"/>
+          <p:nvPr/>
+        </p:nvSpPr>
+        <p:spPr>
+          <a:xfrm>
+            <a:off x="2476500" y="3009863"/>
+            <a:ext cx="571500" cy="150019"/>
+          </a:xfrm>
+          <a:prstGeom prst="rect">
+            <a:avLst/>
+          </a:prstGeom>
+          <a:noFill/>
+        </p:spPr>
+        <p:txBody>
+          <a:bodyPr wrap="square" lIns="0" rIns="0" tIns="0" bIns="0">
+            <a:spAutoFit/>
+          </a:bodyPr>
+          <a:lstStyle/>
+          <a:p>
+            <a:pPr algn="ctr"/>
+            <a:r>
+              <a:rPr sz="900" b="0">
+                <a:solidFill>
+                  <a:srgbClr val="9CA3AF"/>
+                </a:solidFill>
+                <a:latin typeface="Calibri"/>
+              </a:rPr>
+              <a:t>30.04.2026</a:t>
+            </a:r>
+          </a:p>
+        </p:txBody>
+      </p:sp>
+      <p:sp>
+        <p:nvSpPr>
+          <p:cNvPr id="17" name="!!tl_dot_4"/>
+          <p:cNvSpPr/>
+          <p:nvPr/>
+        </p:nvSpPr>
+        <p:spPr>
+          <a:xfrm>
+            <a:off x="3629025" y="2819400"/>
+            <a:ext cx="76200" cy="76200"/>
+          </a:xfrm>
+          <a:prstGeom prst="ellipse">
+            <a:avLst/>
+          </a:prstGeom>
+          <a:solidFill>
+            <a:srgbClr val="D1D5DB"/>
+          </a:solidFill>
+          <a:ln>
+            <a:noFill/>
+          </a:ln>
+          <a:effectLst/>
+        </p:spPr>
+        <p:style>
+          <a:lnRef idx="1">
+            <a:schemeClr val="accent1"/>
+          </a:lnRef>
+          <a:fillRef idx="3">
+            <a:schemeClr val="accent1"/>
+          </a:fillRef>
+          <a:effectRef idx="2">
+            <a:schemeClr val="accent1"/>
+          </a:effectRef>
+          <a:fontRef idx="minor">
+            <a:schemeClr val="lt1"/>
+          </a:fontRef>
+        </p:style>
+        <p:txBody>
+          <a:bodyPr rtlCol="0" anchor="ctr"/>
+          <a:lstStyle/>
+          <a:p>
+            <a:pPr algn="ctr"/>
+          </a:p>
+        </p:txBody>
+      </p:sp>
+      <p:sp>
+        <p:nvSpPr>
+          <p:cNvPr id="18" name="lbl_4_s8"/>
+          <p:cNvSpPr txBox="1"/>
+          <p:nvPr/>
+        </p:nvSpPr>
+        <p:spPr>
+          <a:xfrm>
+            <a:off x="3381375" y="3009863"/>
+            <a:ext cx="571500" cy="150019"/>
+          </a:xfrm>
+          <a:prstGeom prst="rect">
+            <a:avLst/>
+          </a:prstGeom>
+          <a:noFill/>
+        </p:spPr>
+        <p:txBody>
+          <a:bodyPr wrap="square" lIns="0" rIns="0" tIns="0" bIns="0">
+            <a:spAutoFit/>
+          </a:bodyPr>
+          <a:lstStyle/>
+          <a:p>
+            <a:pPr algn="ctr"/>
+            <a:r>
+              <a:rPr sz="900" b="0">
+                <a:solidFill>
+                  <a:srgbClr val="9CA3AF"/>
+                </a:solidFill>
+                <a:latin typeface="Calibri"/>
+              </a:rPr>
+              <a:t>~21.05.2026</a:t>
+            </a:r>
+          </a:p>
+        </p:txBody>
+      </p:sp>
+      <p:sp>
+        <p:nvSpPr>
+          <p:cNvPr id="19" name="!!tl_dot_5"/>
+          <p:cNvSpPr/>
+          <p:nvPr/>
+        </p:nvSpPr>
+        <p:spPr>
+          <a:xfrm>
+            <a:off x="4533900" y="2819400"/>
+            <a:ext cx="76200" cy="76200"/>
+          </a:xfrm>
+          <a:prstGeom prst="ellipse">
+            <a:avLst/>
+          </a:prstGeom>
+          <a:solidFill>
+            <a:srgbClr val="D1D5DB"/>
+          </a:solidFill>
+          <a:ln>
+            <a:noFill/>
+          </a:ln>
+          <a:effectLst/>
+        </p:spPr>
+        <p:style>
+          <a:lnRef idx="1">
+            <a:schemeClr val="accent1"/>
+          </a:lnRef>
+          <a:fillRef idx="3">
+            <a:schemeClr val="accent1"/>
+          </a:fillRef>
+          <a:effectRef idx="2">
+            <a:schemeClr val="accent1"/>
+          </a:effectRef>
+          <a:fontRef idx="minor">
+            <a:schemeClr val="lt1"/>
+          </a:fontRef>
+        </p:style>
+        <p:txBody>
+          <a:bodyPr rtlCol="0" anchor="ctr"/>
+          <a:lstStyle/>
+          <a:p>
+            <a:pPr algn="ctr"/>
+          </a:p>
+        </p:txBody>
+      </p:sp>
+      <p:sp>
+        <p:nvSpPr>
+          <p:cNvPr id="20" name="lbl_5_s8"/>
+          <p:cNvSpPr txBox="1"/>
+          <p:nvPr/>
+        </p:nvSpPr>
+        <p:spPr>
+          <a:xfrm>
+            <a:off x="4286250" y="3009863"/>
+            <a:ext cx="571500" cy="150019"/>
+          </a:xfrm>
+          <a:prstGeom prst="rect">
+            <a:avLst/>
+          </a:prstGeom>
+          <a:noFill/>
+        </p:spPr>
+        <p:txBody>
+          <a:bodyPr wrap="square" lIns="0" rIns="0" tIns="0" bIns="0">
+            <a:spAutoFit/>
+          </a:bodyPr>
+          <a:lstStyle/>
+          <a:p>
+            <a:pPr algn="ctr"/>
+            <a:r>
+              <a:rPr sz="900" b="0">
+                <a:solidFill>
+                  <a:srgbClr val="9CA3AF"/>
+                </a:solidFill>
+                <a:latin typeface="Calibri"/>
+              </a:rPr>
+              <a:t>18.06.2026</a:t>
+            </a:r>
+          </a:p>
+        </p:txBody>
+      </p:sp>
+      <p:sp>
+        <p:nvSpPr>
+          <p:cNvPr id="21" name="!!tl_dot_6"/>
+          <p:cNvSpPr/>
+          <p:nvPr/>
+        </p:nvSpPr>
+        <p:spPr>
+          <a:xfrm>
+            <a:off x="5438775" y="2819400"/>
+            <a:ext cx="76200" cy="76200"/>
+          </a:xfrm>
+          <a:prstGeom prst="ellipse">
+            <a:avLst/>
+          </a:prstGeom>
+          <a:solidFill>
+            <a:srgbClr val="D1D5DB"/>
+          </a:solidFill>
+          <a:ln>
+            <a:noFill/>
+          </a:ln>
+          <a:effectLst/>
+        </p:spPr>
+        <p:style>
+          <a:lnRef idx="1">
+            <a:schemeClr val="accent1"/>
+          </a:lnRef>
+          <a:fillRef idx="3">
+            <a:schemeClr val="accent1"/>
+          </a:fillRef>
+          <a:effectRef idx="2">
+            <a:schemeClr val="accent1"/>
+          </a:effectRef>
+          <a:fontRef idx="minor">
+            <a:schemeClr val="lt1"/>
+          </a:fontRef>
+        </p:style>
+        <p:txBody>
+          <a:bodyPr rtlCol="0" anchor="ctr"/>
+          <a:lstStyle/>
+          <a:p>
+            <a:pPr algn="ctr"/>
+          </a:p>
+        </p:txBody>
+      </p:sp>
+      <p:sp>
+        <p:nvSpPr>
+          <p:cNvPr id="22" name="lbl_6_s8"/>
+          <p:cNvSpPr txBox="1"/>
+          <p:nvPr/>
+        </p:nvSpPr>
+        <p:spPr>
+          <a:xfrm>
+            <a:off x="5191125" y="3009863"/>
+            <a:ext cx="571500" cy="150019"/>
+          </a:xfrm>
+          <a:prstGeom prst="rect">
+            <a:avLst/>
+          </a:prstGeom>
+          <a:noFill/>
+        </p:spPr>
+        <p:txBody>
+          <a:bodyPr wrap="square" lIns="0" rIns="0" tIns="0" bIns="0">
+            <a:spAutoFit/>
+          </a:bodyPr>
+          <a:lstStyle/>
+          <a:p>
+            <a:pPr algn="ctr"/>
+            <a:r>
+              <a:rPr sz="900" b="0">
+                <a:solidFill>
+                  <a:srgbClr val="9CA3AF"/>
+                </a:solidFill>
+                <a:latin typeface="Calibri"/>
+              </a:rPr>
+              <a:t>25.06.2026</a:t>
+            </a:r>
+          </a:p>
+        </p:txBody>
+      </p:sp>
+      <p:sp>
+        <p:nvSpPr>
+          <p:cNvPr id="23" name="!!tl_dot_7"/>
+          <p:cNvSpPr/>
+          <p:nvPr/>
+        </p:nvSpPr>
+        <p:spPr>
+          <a:xfrm>
+            <a:off x="6343650" y="2819400"/>
+            <a:ext cx="76200" cy="76200"/>
+          </a:xfrm>
+          <a:prstGeom prst="ellipse">
+            <a:avLst/>
+          </a:prstGeom>
+          <a:solidFill>
+            <a:srgbClr val="D1D5DB"/>
+          </a:solidFill>
+          <a:ln>
+            <a:noFill/>
+          </a:ln>
+          <a:effectLst/>
+        </p:spPr>
+        <p:style>
+          <a:lnRef idx="1">
+            <a:schemeClr val="accent1"/>
+          </a:lnRef>
+          <a:fillRef idx="3">
+            <a:schemeClr val="accent1"/>
+          </a:fillRef>
+          <a:effectRef idx="2">
+            <a:schemeClr val="accent1"/>
+          </a:effectRef>
+          <a:fontRef idx="minor">
+            <a:schemeClr val="lt1"/>
+          </a:fontRef>
+        </p:style>
+        <p:txBody>
+          <a:bodyPr rtlCol="0" anchor="ctr"/>
+          <a:lstStyle/>
+          <a:p>
+            <a:pPr algn="ctr"/>
+          </a:p>
+        </p:txBody>
+      </p:sp>
+      <p:sp>
+        <p:nvSpPr>
+          <p:cNvPr id="24" name="lbl_7_s8"/>
+          <p:cNvSpPr txBox="1"/>
+          <p:nvPr/>
+        </p:nvSpPr>
+        <p:spPr>
+          <a:xfrm>
+            <a:off x="6096000" y="3009863"/>
+            <a:ext cx="571500" cy="150019"/>
+          </a:xfrm>
+          <a:prstGeom prst="rect">
+            <a:avLst/>
+          </a:prstGeom>
+          <a:noFill/>
+        </p:spPr>
+        <p:txBody>
+          <a:bodyPr wrap="square" lIns="0" rIns="0" tIns="0" bIns="0">
+            <a:spAutoFit/>
+          </a:bodyPr>
+          <a:lstStyle/>
+          <a:p>
+            <a:pPr algn="ctr"/>
+            <a:r>
+              <a:rPr sz="900" b="0">
+                <a:solidFill>
+                  <a:srgbClr val="9CA3AF"/>
+                </a:solidFill>
+                <a:latin typeface="Calibri"/>
+              </a:rPr>
+              <a:t>09.07.2026</a:t>
+            </a:r>
+          </a:p>
+        </p:txBody>
+      </p:sp>
+      <p:sp>
+        <p:nvSpPr>
+          <p:cNvPr id="25" name="!!tl_dot_8"/>
+          <p:cNvSpPr/>
+          <p:nvPr/>
+        </p:nvSpPr>
+        <p:spPr>
+          <a:xfrm>
+            <a:off x="7248525" y="2819400"/>
+            <a:ext cx="76200" cy="76200"/>
+          </a:xfrm>
+          <a:prstGeom prst="ellipse">
+            <a:avLst/>
+          </a:prstGeom>
+          <a:solidFill>
+            <a:srgbClr val="D1D5DB"/>
+          </a:solidFill>
+          <a:ln>
+            <a:noFill/>
+          </a:ln>
+          <a:effectLst/>
+        </p:spPr>
+        <p:style>
+          <a:lnRef idx="1">
+            <a:schemeClr val="accent1"/>
+          </a:lnRef>
+          <a:fillRef idx="3">
+            <a:schemeClr val="accent1"/>
+          </a:fillRef>
+          <a:effectRef idx="2">
+            <a:schemeClr val="accent1"/>
+          </a:effectRef>
+          <a:fontRef idx="minor">
+            <a:schemeClr val="lt1"/>
+          </a:fontRef>
+        </p:style>
+        <p:txBody>
+          <a:bodyPr rtlCol="0" anchor="ctr"/>
+          <a:lstStyle/>
+          <a:p>
+            <a:pPr algn="ctr"/>
+          </a:p>
+        </p:txBody>
+      </p:sp>
+      <p:sp>
+        <p:nvSpPr>
+          <p:cNvPr id="26" name="lbl_8_s8"/>
+          <p:cNvSpPr txBox="1"/>
+          <p:nvPr/>
+        </p:nvSpPr>
+        <p:spPr>
+          <a:xfrm>
+            <a:off x="7000875" y="3009863"/>
+            <a:ext cx="571500" cy="150019"/>
+          </a:xfrm>
+          <a:prstGeom prst="rect">
+            <a:avLst/>
+          </a:prstGeom>
+          <a:noFill/>
+        </p:spPr>
+        <p:txBody>
+          <a:bodyPr wrap="square" lIns="0" rIns="0" tIns="0" bIns="0">
+            <a:spAutoFit/>
+          </a:bodyPr>
+          <a:lstStyle/>
+          <a:p>
+            <a:pPr algn="ctr"/>
+            <a:r>
+              <a:rPr sz="900" b="0">
+                <a:solidFill>
+                  <a:srgbClr val="9CA3AF"/>
+                </a:solidFill>
+                <a:latin typeface="Calibri"/>
+              </a:rPr>
+              <a:t>16.07.2026</a:t>
+            </a:r>
+          </a:p>
+        </p:txBody>
+      </p:sp>
+      <p:sp>
+        <p:nvSpPr>
+          <p:cNvPr id="27" name="!!tl_dot_9"/>
+          <p:cNvSpPr/>
+          <p:nvPr/>
+        </p:nvSpPr>
+        <p:spPr>
+          <a:xfrm>
+            <a:off x="8124825" y="2790825"/>
+            <a:ext cx="133350" cy="133350"/>
+          </a:xfrm>
+          <a:prstGeom prst="ellipse">
+            <a:avLst/>
+          </a:prstGeom>
+          <a:solidFill>
+            <a:srgbClr val="325786"/>
+          </a:solidFill>
+          <a:ln>
+            <a:noFill/>
+          </a:ln>
+          <a:effectLst/>
+        </p:spPr>
+        <p:style>
+          <a:lnRef idx="1">
+            <a:schemeClr val="accent1"/>
+          </a:lnRef>
+          <a:fillRef idx="3">
+            <a:schemeClr val="accent1"/>
+          </a:fillRef>
+          <a:effectRef idx="2">
+            <a:schemeClr val="accent1"/>
+          </a:effectRef>
+          <a:fontRef idx="minor">
+            <a:schemeClr val="lt1"/>
+          </a:fontRef>
+        </p:style>
+        <p:txBody>
+          <a:bodyPr rtlCol="0" anchor="ctr"/>
+          <a:lstStyle/>
+          <a:p>
+            <a:pPr algn="ctr"/>
+          </a:p>
+        </p:txBody>
+      </p:sp>
+      <p:sp>
+        <p:nvSpPr>
+          <p:cNvPr id="28" name="lbl_9_s8"/>
+          <p:cNvSpPr txBox="1"/>
+          <p:nvPr/>
+        </p:nvSpPr>
+        <p:spPr>
+          <a:xfrm>
+            <a:off x="7905750" y="3009863"/>
+            <a:ext cx="571500" cy="150019"/>
+          </a:xfrm>
+          <a:prstGeom prst="rect">
+            <a:avLst/>
+          </a:prstGeom>
+          <a:noFill/>
+        </p:spPr>
+        <p:txBody>
+          <a:bodyPr wrap="square" lIns="0" rIns="0" tIns="0" bIns="0">
+            <a:spAutoFit/>
+          </a:bodyPr>
+          <a:lstStyle/>
+          <a:p>
+            <a:pPr algn="ctr"/>
+            <a:r>
+              <a:rPr sz="900" b="1">
+                <a:solidFill>
+                  <a:srgbClr val="1F2023"/>
+                </a:solidFill>
+                <a:latin typeface="Calibri"/>
+              </a:rPr>
+              <a:t>20.07.2026</a:t>
+            </a:r>
+          </a:p>
+        </p:txBody>
+      </p:sp>
+    </p:spTree>
+  </p:cSld>
+  <p:clrMapOvr>
+    <a:masterClrMapping/>
+  </p:clrMapOvr>
+  <mc:AlternateContent xmlns:mc="http://schemas.openxmlformats.org/markup-compatibility/2006">
+    <mc:Choice xmlns:p159="http://schemas.microsoft.com/office/powerpoint/2015/09/main" Requires="p159">
+      <p:transition spd="slow">
+        <p159:morph option="byObject"/>
+      </p:transition>
+    </mc:Choice>
+    <mc:Fallback>
+      <p:transition spd="slow">
+        <p:fade/>
+      </p:transition>
     </mc:Fallback>
   </mc:AlternateContent>
 </p:sld>
